--- a/output/wordlabs-ing-suffix-3day.pptx
+++ b/output/wordlabs-ing-suffix-3day.pptx
@@ -6057,7 +6057,7 @@
                 <a:ea typeface="Calibri" pitchFamily="34" charset="-122"/>
                 <a:cs typeface="Calibri" pitchFamily="34" charset="-120"/>
               </a:rPr>
-              <a:t>overworking</a:t>
+              <a:t>discovering</a:t>
             </a:r>
             <a:pPr algn="l" indent="0" marL="0">
               <a:buNone/>
@@ -6071,7 +6071,7 @@
                 <a:ea typeface="Calibri" pitchFamily="34" charset="-122"/>
                 <a:cs typeface="Calibri" pitchFamily="34" charset="-120"/>
               </a:rPr>
-              <a:t> themselves instead of </a:t>
+              <a:t> new insects while </a:t>
             </a:r>
             <a:pPr algn="l" indent="0" marL="0">
               <a:buNone/>
@@ -6088,7 +6088,7 @@
                 <a:ea typeface="Calibri" pitchFamily="34" charset="-122"/>
                 <a:cs typeface="Calibri" pitchFamily="34" charset="-120"/>
               </a:rPr>
-              <a:t>resting</a:t>
+              <a:t>exploring</a:t>
             </a:r>
             <a:pPr algn="l" indent="0" marL="0">
               <a:buNone/>
@@ -6102,7 +6102,7 @@
                 <a:ea typeface="Calibri" pitchFamily="34" charset="-122"/>
                 <a:cs typeface="Calibri" pitchFamily="34" charset="-120"/>
               </a:rPr>
-              <a:t>.</a:t>
+              <a:t> the garden.</a:t>
             </a:r>
             <a:endParaRPr lang="en-US" sz="1800" dirty="0"/>
           </a:p>
@@ -6257,7 +6257,7 @@
                 <a:ea typeface="Trebuchet MS" pitchFamily="34" charset="-122"/>
                 <a:cs typeface="Trebuchet MS" pitchFamily="34" charset="-120"/>
               </a:rPr>
-              <a:t>overworking</a:t>
+              <a:t>discovering</a:t>
             </a:r>
             <a:endParaRPr lang="en-US" sz="1400" dirty="0"/>
           </a:p>
@@ -6385,7 +6385,7 @@
                 <a:ea typeface="Trebuchet MS" pitchFamily="34" charset="-122"/>
                 <a:cs typeface="Trebuchet MS" pitchFamily="34" charset="-120"/>
               </a:rPr>
-              <a:t>resting</a:t>
+              <a:t>exploring</a:t>
             </a:r>
             <a:endParaRPr lang="en-US" sz="1400" dirty="0"/>
           </a:p>
@@ -6855,7 +6855,7 @@
                 <a:ea typeface="Trebuchet MS" pitchFamily="34" charset="-122"/>
                 <a:cs typeface="Trebuchet MS" pitchFamily="34" charset="-120"/>
               </a:rPr>
-              <a:t>overworking</a:t>
+              <a:t>discovering</a:t>
             </a:r>
             <a:endParaRPr lang="en-US" sz="2800" dirty="0"/>
           </a:p>
@@ -7682,7 +7682,7 @@
                 <a:ea typeface="Trebuchet MS" pitchFamily="34" charset="-122"/>
                 <a:cs typeface="Trebuchet MS" pitchFamily="34" charset="-120"/>
               </a:rPr>
-              <a:t>overworking</a:t>
+              <a:t>discovering</a:t>
             </a:r>
             <a:endParaRPr lang="en-US" sz="2800" dirty="0"/>
           </a:p>
@@ -7821,7 +7821,7 @@
                 <a:ea typeface="Trebuchet MS" pitchFamily="34" charset="-122"/>
                 <a:cs typeface="Trebuchet MS" pitchFamily="34" charset="-120"/>
               </a:rPr>
-              <a:t>over</a:t>
+              <a:t>dis</a:t>
             </a:r>
             <a:endParaRPr lang="en-US" sz="1300" dirty="0"/>
           </a:p>
@@ -7860,7 +7860,7 @@
                 <a:ea typeface="Calibri" pitchFamily="34" charset="-122"/>
                 <a:cs typeface="Calibri" pitchFamily="34" charset="-120"/>
               </a:rPr>
-              <a:t>too much</a:t>
+              <a:t>apart, away</a:t>
             </a:r>
             <a:endParaRPr lang="en-US" sz="850" dirty="0"/>
           </a:p>
@@ -7933,7 +7933,7 @@
                 <a:ea typeface="Trebuchet MS" pitchFamily="34" charset="-122"/>
                 <a:cs typeface="Trebuchet MS" pitchFamily="34" charset="-120"/>
               </a:rPr>
-              <a:t>work</a:t>
+              <a:t>cover</a:t>
             </a:r>
             <a:endParaRPr lang="en-US" sz="1300" dirty="0"/>
           </a:p>
@@ -7972,7 +7972,7 @@
                 <a:ea typeface="Calibri" pitchFamily="34" charset="-122"/>
                 <a:cs typeface="Calibri" pitchFamily="34" charset="-120"/>
               </a:rPr>
-              <a:t>to do a task</a:t>
+              <a:t>to find or uncover</a:t>
             </a:r>
             <a:endParaRPr lang="en-US" sz="850" dirty="0"/>
           </a:p>
@@ -8084,7 +8084,7 @@
                 <a:ea typeface="Calibri" pitchFamily="34" charset="-122"/>
                 <a:cs typeface="Calibri" pitchFamily="34" charset="-120"/>
               </a:rPr>
-              <a:t>ongoing action</a:t>
+              <a:t>action in progress</a:t>
             </a:r>
             <a:endParaRPr lang="en-US" sz="850" dirty="0"/>
           </a:p>
@@ -8779,7 +8779,7 @@
                 <a:ea typeface="Trebuchet MS" pitchFamily="34" charset="-122"/>
                 <a:cs typeface="Trebuchet MS" pitchFamily="34" charset="-120"/>
               </a:rPr>
-              <a:t>overworking</a:t>
+              <a:t>discovering</a:t>
             </a:r>
             <a:endParaRPr lang="en-US" sz="2800" dirty="0"/>
           </a:p>
@@ -8918,7 +8918,7 @@
                 <a:ea typeface="Trebuchet MS" pitchFamily="34" charset="-122"/>
                 <a:cs typeface="Trebuchet MS" pitchFamily="34" charset="-120"/>
               </a:rPr>
-              <a:t>over</a:t>
+              <a:t>dis</a:t>
             </a:r>
             <a:endParaRPr lang="en-US" sz="1300" dirty="0"/>
           </a:p>
@@ -8957,7 +8957,7 @@
                 <a:ea typeface="Calibri" pitchFamily="34" charset="-122"/>
                 <a:cs typeface="Calibri" pitchFamily="34" charset="-120"/>
               </a:rPr>
-              <a:t>too much</a:t>
+              <a:t>apart, away</a:t>
             </a:r>
             <a:endParaRPr lang="en-US" sz="850" dirty="0"/>
           </a:p>
@@ -9030,7 +9030,7 @@
                 <a:ea typeface="Trebuchet MS" pitchFamily="34" charset="-122"/>
                 <a:cs typeface="Trebuchet MS" pitchFamily="34" charset="-120"/>
               </a:rPr>
-              <a:t>work</a:t>
+              <a:t>cover</a:t>
             </a:r>
             <a:endParaRPr lang="en-US" sz="1300" dirty="0"/>
           </a:p>
@@ -9069,7 +9069,7 @@
                 <a:ea typeface="Calibri" pitchFamily="34" charset="-122"/>
                 <a:cs typeface="Calibri" pitchFamily="34" charset="-120"/>
               </a:rPr>
-              <a:t>to do a task</a:t>
+              <a:t>to find or uncover</a:t>
             </a:r>
             <a:endParaRPr lang="en-US" sz="850" dirty="0"/>
           </a:p>
@@ -9181,7 +9181,7 @@
                 <a:ea typeface="Calibri" pitchFamily="34" charset="-122"/>
                 <a:cs typeface="Calibri" pitchFamily="34" charset="-120"/>
               </a:rPr>
-              <a:t>ongoing action</a:t>
+              <a:t>action in progress</a:t>
             </a:r>
             <a:endParaRPr lang="en-US" sz="850" dirty="0"/>
           </a:p>
@@ -9340,7 +9340,7 @@
                 <a:ea typeface="Trebuchet MS" pitchFamily="34" charset="-122"/>
                 <a:cs typeface="Trebuchet MS" pitchFamily="34" charset="-120"/>
               </a:rPr>
-              <a:t>o</a:t>
+              <a:t>dis</a:t>
             </a:r>
             <a:endParaRPr lang="en-US" sz="1400" dirty="0"/>
           </a:p>
@@ -9445,7 +9445,7 @@
                 <a:ea typeface="Trebuchet MS" pitchFamily="34" charset="-122"/>
                 <a:cs typeface="Trebuchet MS" pitchFamily="34" charset="-120"/>
               </a:rPr>
-              <a:t>ver</a:t>
+              <a:t>cov</a:t>
             </a:r>
             <a:endParaRPr lang="en-US" sz="1400" dirty="0"/>
           </a:p>
@@ -9550,7 +9550,7 @@
                 <a:ea typeface="Trebuchet MS" pitchFamily="34" charset="-122"/>
                 <a:cs typeface="Trebuchet MS" pitchFamily="34" charset="-120"/>
               </a:rPr>
-              <a:t>work</a:t>
+              <a:t>er</a:t>
             </a:r>
             <a:endParaRPr lang="en-US" sz="1400" dirty="0"/>
           </a:p>
@@ -10218,7 +10218,7 @@
                 <a:ea typeface="Trebuchet MS" pitchFamily="34" charset="-122"/>
                 <a:cs typeface="Trebuchet MS" pitchFamily="34" charset="-120"/>
               </a:rPr>
-              <a:t>overworking</a:t>
+              <a:t>discovering</a:t>
             </a:r>
             <a:endParaRPr lang="en-US" sz="2800" dirty="0"/>
           </a:p>
@@ -10357,7 +10357,7 @@
                 <a:ea typeface="Trebuchet MS" pitchFamily="34" charset="-122"/>
                 <a:cs typeface="Trebuchet MS" pitchFamily="34" charset="-120"/>
               </a:rPr>
-              <a:t>over</a:t>
+              <a:t>dis</a:t>
             </a:r>
             <a:endParaRPr lang="en-US" sz="1300" dirty="0"/>
           </a:p>
@@ -10396,7 +10396,7 @@
                 <a:ea typeface="Calibri" pitchFamily="34" charset="-122"/>
                 <a:cs typeface="Calibri" pitchFamily="34" charset="-120"/>
               </a:rPr>
-              <a:t>too much</a:t>
+              <a:t>apart, away</a:t>
             </a:r>
             <a:endParaRPr lang="en-US" sz="850" dirty="0"/>
           </a:p>
@@ -10469,7 +10469,7 @@
                 <a:ea typeface="Trebuchet MS" pitchFamily="34" charset="-122"/>
                 <a:cs typeface="Trebuchet MS" pitchFamily="34" charset="-120"/>
               </a:rPr>
-              <a:t>work</a:t>
+              <a:t>cover</a:t>
             </a:r>
             <a:endParaRPr lang="en-US" sz="1300" dirty="0"/>
           </a:p>
@@ -10508,7 +10508,7 @@
                 <a:ea typeface="Calibri" pitchFamily="34" charset="-122"/>
                 <a:cs typeface="Calibri" pitchFamily="34" charset="-120"/>
               </a:rPr>
-              <a:t>to do a task</a:t>
+              <a:t>to find or uncover</a:t>
             </a:r>
             <a:endParaRPr lang="en-US" sz="850" dirty="0"/>
           </a:p>
@@ -10620,7 +10620,7 @@
                 <a:ea typeface="Calibri" pitchFamily="34" charset="-122"/>
                 <a:cs typeface="Calibri" pitchFamily="34" charset="-120"/>
               </a:rPr>
-              <a:t>ongoing action</a:t>
+              <a:t>action in progress</a:t>
             </a:r>
             <a:endParaRPr lang="en-US" sz="850" dirty="0"/>
           </a:p>
@@ -10779,7 +10779,7 @@
                 <a:ea typeface="Trebuchet MS" pitchFamily="34" charset="-122"/>
                 <a:cs typeface="Trebuchet MS" pitchFamily="34" charset="-120"/>
               </a:rPr>
-              <a:t>o</a:t>
+              <a:t>dis</a:t>
             </a:r>
             <a:endParaRPr lang="en-US" sz="1400" dirty="0"/>
           </a:p>
@@ -10884,7 +10884,7 @@
                 <a:ea typeface="Trebuchet MS" pitchFamily="34" charset="-122"/>
                 <a:cs typeface="Trebuchet MS" pitchFamily="34" charset="-120"/>
               </a:rPr>
-              <a:t>ver</a:t>
+              <a:t>cov</a:t>
             </a:r>
             <a:endParaRPr lang="en-US" sz="1400" dirty="0"/>
           </a:p>
@@ -10989,7 +10989,7 @@
                 <a:ea typeface="Trebuchet MS" pitchFamily="34" charset="-122"/>
                 <a:cs typeface="Trebuchet MS" pitchFamily="34" charset="-120"/>
               </a:rPr>
-              <a:t>work</a:t>
+              <a:t>er</a:t>
             </a:r>
             <a:endParaRPr lang="en-US" sz="1400" dirty="0"/>
           </a:p>
@@ -11175,11 +11175,11 @@
         <p:spPr>
           <a:xfrm>
             <a:off x="1874520" y="4096512"/>
-            <a:ext cx="6903720" cy="658368"/>
+            <a:ext cx="6903720" cy="804672"/>
           </a:xfrm>
           <a:prstGeom prst="rect">
             <a:avLst>
-              <a:gd name="adj" fmla="val 8333"/>
+              <a:gd name="adj" fmla="val 6818"/>
             </a:avLst>
           </a:prstGeom>
           <a:solidFill>
@@ -11201,12 +11201,12 @@
         </p:nvSpPr>
         <p:spPr>
           <a:xfrm>
-            <a:off x="2023872" y="4169664"/>
-            <a:ext cx="685800" cy="475488"/>
+            <a:off x="1951330" y="4169664"/>
+            <a:ext cx="676656" cy="384048"/>
           </a:xfrm>
           <a:prstGeom prst="rect">
             <a:avLst>
-              <a:gd name="adj" fmla="val 7692"/>
+              <a:gd name="adj" fmla="val 9524"/>
             </a:avLst>
           </a:prstGeom>
           <a:solidFill>
@@ -11228,8 +11228,8 @@
         </p:nvSpPr>
         <p:spPr>
           <a:xfrm>
-            <a:off x="2023872" y="4169664"/>
-            <a:ext cx="685800" cy="475488"/>
+            <a:off x="1951330" y="4169664"/>
+            <a:ext cx="676656" cy="384048"/>
           </a:xfrm>
           <a:prstGeom prst="rect">
             <a:avLst/>
@@ -11253,7 +11253,7 @@
                 <a:ea typeface="Trebuchet MS" pitchFamily="34" charset="-122"/>
                 <a:cs typeface="Trebuchet MS" pitchFamily="34" charset="-120"/>
               </a:rPr>
-              <a:t>o</a:t>
+              <a:t>d</a:t>
             </a:r>
             <a:endParaRPr lang="en-US" sz="900" dirty="0"/>
           </a:p>
@@ -11267,12 +11267,12 @@
         </p:nvSpPr>
         <p:spPr>
           <a:xfrm>
-            <a:off x="2831592" y="4169664"/>
-            <a:ext cx="685800" cy="475488"/>
+            <a:off x="2677363" y="4169664"/>
+            <a:ext cx="676656" cy="384048"/>
           </a:xfrm>
           <a:prstGeom prst="rect">
             <a:avLst>
-              <a:gd name="adj" fmla="val 7692"/>
+              <a:gd name="adj" fmla="val 9524"/>
             </a:avLst>
           </a:prstGeom>
           <a:solidFill>
@@ -11294,8 +11294,8 @@
         </p:nvSpPr>
         <p:spPr>
           <a:xfrm>
-            <a:off x="2831592" y="4169664"/>
-            <a:ext cx="685800" cy="475488"/>
+            <a:off x="2677363" y="4169664"/>
+            <a:ext cx="676656" cy="384048"/>
           </a:xfrm>
           <a:prstGeom prst="rect">
             <a:avLst/>
@@ -11319,7 +11319,7 @@
                 <a:ea typeface="Trebuchet MS" pitchFamily="34" charset="-122"/>
                 <a:cs typeface="Trebuchet MS" pitchFamily="34" charset="-120"/>
               </a:rPr>
-              <a:t>v</a:t>
+              <a:t>i</a:t>
             </a:r>
             <a:endParaRPr lang="en-US" sz="900" dirty="0"/>
           </a:p>
@@ -11333,12 +11333,12 @@
         </p:nvSpPr>
         <p:spPr>
           <a:xfrm>
-            <a:off x="3639312" y="4169664"/>
-            <a:ext cx="685800" cy="475488"/>
+            <a:off x="3403397" y="4169664"/>
+            <a:ext cx="676656" cy="384048"/>
           </a:xfrm>
           <a:prstGeom prst="rect">
             <a:avLst>
-              <a:gd name="adj" fmla="val 7692"/>
+              <a:gd name="adj" fmla="val 9524"/>
             </a:avLst>
           </a:prstGeom>
           <a:solidFill>
@@ -11360,8 +11360,8 @@
         </p:nvSpPr>
         <p:spPr>
           <a:xfrm>
-            <a:off x="3639312" y="4169664"/>
-            <a:ext cx="685800" cy="475488"/>
+            <a:off x="3403397" y="4169664"/>
+            <a:ext cx="676656" cy="384048"/>
           </a:xfrm>
           <a:prstGeom prst="rect">
             <a:avLst/>
@@ -11385,7 +11385,7 @@
                 <a:ea typeface="Trebuchet MS" pitchFamily="34" charset="-122"/>
                 <a:cs typeface="Trebuchet MS" pitchFamily="34" charset="-120"/>
               </a:rPr>
-              <a:t>er</a:t>
+              <a:t>s</a:t>
             </a:r>
             <a:endParaRPr lang="en-US" sz="900" dirty="0"/>
           </a:p>
@@ -11399,12 +11399,12 @@
         </p:nvSpPr>
         <p:spPr>
           <a:xfrm>
-            <a:off x="4447032" y="4169664"/>
-            <a:ext cx="685800" cy="475488"/>
+            <a:off x="4129430" y="4169664"/>
+            <a:ext cx="676656" cy="384048"/>
           </a:xfrm>
           <a:prstGeom prst="rect">
             <a:avLst>
-              <a:gd name="adj" fmla="val 7692"/>
+              <a:gd name="adj" fmla="val 9524"/>
             </a:avLst>
           </a:prstGeom>
           <a:solidFill>
@@ -11426,8 +11426,8 @@
         </p:nvSpPr>
         <p:spPr>
           <a:xfrm>
-            <a:off x="4447032" y="4169664"/>
-            <a:ext cx="685800" cy="475488"/>
+            <a:off x="4129430" y="4169664"/>
+            <a:ext cx="676656" cy="384048"/>
           </a:xfrm>
           <a:prstGeom prst="rect">
             <a:avLst/>
@@ -11451,7 +11451,7 @@
                 <a:ea typeface="Trebuchet MS" pitchFamily="34" charset="-122"/>
                 <a:cs typeface="Trebuchet MS" pitchFamily="34" charset="-120"/>
               </a:rPr>
-              <a:t>w</a:t>
+              <a:t>c</a:t>
             </a:r>
             <a:endParaRPr lang="en-US" sz="900" dirty="0"/>
           </a:p>
@@ -11459,18 +11459,57 @@
       </p:sp>
       <p:sp>
         <p:nvSpPr>
-          <p:cNvPr id="50" name="Shape 48"/>
-          <p:cNvSpPr/>
-          <p:nvPr/>
-        </p:nvSpPr>
-        <p:spPr>
-          <a:xfrm>
-            <a:off x="5254752" y="4169664"/>
-            <a:ext cx="685800" cy="475488"/>
+          <p:cNvPr id="50" name="Text 48"/>
+          <p:cNvSpPr/>
+          <p:nvPr/>
+        </p:nvSpPr>
+        <p:spPr>
+          <a:xfrm>
+            <a:off x="4129430" y="4572000"/>
+            <a:ext cx="676656" cy="219456"/>
+          </a:xfrm>
+          <a:prstGeom prst="rect">
+            <a:avLst/>
+          </a:prstGeom>
+          <a:noFill/>
+          <a:ln/>
+        </p:spPr>
+        <p:txBody>
+          <a:bodyPr wrap="square" lIns="0" tIns="0" rIns="0" bIns="0" rtlCol="0" anchor="t"/>
+          <a:lstStyle/>
+          <a:p>
+            <a:pPr algn="ctr" indent="0" marL="0">
+              <a:buNone/>
+            </a:pPr>
+            <a:r>
+              <a:rPr lang="en-US" sz="750" i="1" dirty="0">
+                <a:solidFill>
+                  <a:srgbClr val="94A3B8"/>
+                </a:solidFill>
+                <a:latin typeface="Calibri" pitchFamily="34" charset="0"/>
+                <a:ea typeface="Calibri" pitchFamily="34" charset="-122"/>
+                <a:cs typeface="Calibri" pitchFamily="34" charset="-120"/>
+              </a:rPr>
+              <a:t>/k/</a:t>
+            </a:r>
+            <a:endParaRPr lang="en-US" sz="750" dirty="0"/>
+          </a:p>
+        </p:txBody>
+      </p:sp>
+      <p:sp>
+        <p:nvSpPr>
+          <p:cNvPr id="51" name="Shape 49"/>
+          <p:cNvSpPr/>
+          <p:nvPr/>
+        </p:nvSpPr>
+        <p:spPr>
+          <a:xfrm>
+            <a:off x="4855464" y="4169664"/>
+            <a:ext cx="676656" cy="384048"/>
           </a:xfrm>
           <a:prstGeom prst="rect">
             <a:avLst>
-              <a:gd name="adj" fmla="val 7692"/>
+              <a:gd name="adj" fmla="val 9524"/>
             </a:avLst>
           </a:prstGeom>
           <a:solidFill>
@@ -11486,14 +11525,14 @@
       </p:sp>
       <p:sp>
         <p:nvSpPr>
-          <p:cNvPr id="51" name="Text 49"/>
-          <p:cNvSpPr/>
-          <p:nvPr/>
-        </p:nvSpPr>
-        <p:spPr>
-          <a:xfrm>
-            <a:off x="5254752" y="4169664"/>
-            <a:ext cx="685800" cy="475488"/>
+          <p:cNvPr id="52" name="Text 50"/>
+          <p:cNvSpPr/>
+          <p:nvPr/>
+        </p:nvSpPr>
+        <p:spPr>
+          <a:xfrm>
+            <a:off x="4855464" y="4169664"/>
+            <a:ext cx="676656" cy="384048"/>
           </a:xfrm>
           <a:prstGeom prst="rect">
             <a:avLst/>
@@ -11517,7 +11556,7 @@
                 <a:ea typeface="Trebuchet MS" pitchFamily="34" charset="-122"/>
                 <a:cs typeface="Trebuchet MS" pitchFamily="34" charset="-120"/>
               </a:rPr>
-              <a:t>or</a:t>
+              <a:t>o</a:t>
             </a:r>
             <a:endParaRPr lang="en-US" sz="900" dirty="0"/>
           </a:p>
@@ -11525,18 +11564,18 @@
       </p:sp>
       <p:sp>
         <p:nvSpPr>
-          <p:cNvPr id="52" name="Shape 50"/>
-          <p:cNvSpPr/>
-          <p:nvPr/>
-        </p:nvSpPr>
-        <p:spPr>
-          <a:xfrm>
-            <a:off x="6062472" y="4169664"/>
-            <a:ext cx="685800" cy="475488"/>
+          <p:cNvPr id="53" name="Shape 51"/>
+          <p:cNvSpPr/>
+          <p:nvPr/>
+        </p:nvSpPr>
+        <p:spPr>
+          <a:xfrm>
+            <a:off x="5581498" y="4169664"/>
+            <a:ext cx="676656" cy="384048"/>
           </a:xfrm>
           <a:prstGeom prst="rect">
             <a:avLst>
-              <a:gd name="adj" fmla="val 7692"/>
+              <a:gd name="adj" fmla="val 9524"/>
             </a:avLst>
           </a:prstGeom>
           <a:solidFill>
@@ -11552,14 +11591,14 @@
       </p:sp>
       <p:sp>
         <p:nvSpPr>
-          <p:cNvPr id="53" name="Text 51"/>
-          <p:cNvSpPr/>
-          <p:nvPr/>
-        </p:nvSpPr>
-        <p:spPr>
-          <a:xfrm>
-            <a:off x="6062472" y="4169664"/>
-            <a:ext cx="685800" cy="475488"/>
+          <p:cNvPr id="54" name="Text 52"/>
+          <p:cNvSpPr/>
+          <p:nvPr/>
+        </p:nvSpPr>
+        <p:spPr>
+          <a:xfrm>
+            <a:off x="5581498" y="4169664"/>
+            <a:ext cx="676656" cy="384048"/>
           </a:xfrm>
           <a:prstGeom prst="rect">
             <a:avLst/>
@@ -11583,7 +11622,7 @@
                 <a:ea typeface="Trebuchet MS" pitchFamily="34" charset="-122"/>
                 <a:cs typeface="Trebuchet MS" pitchFamily="34" charset="-120"/>
               </a:rPr>
-              <a:t>k</a:t>
+              <a:t>v</a:t>
             </a:r>
             <a:endParaRPr lang="en-US" sz="900" dirty="0"/>
           </a:p>
@@ -11591,18 +11630,18 @@
       </p:sp>
       <p:sp>
         <p:nvSpPr>
-          <p:cNvPr id="54" name="Shape 52"/>
-          <p:cNvSpPr/>
-          <p:nvPr/>
-        </p:nvSpPr>
-        <p:spPr>
-          <a:xfrm>
-            <a:off x="6870192" y="4169664"/>
-            <a:ext cx="685800" cy="475488"/>
+          <p:cNvPr id="55" name="Shape 53"/>
+          <p:cNvSpPr/>
+          <p:nvPr/>
+        </p:nvSpPr>
+        <p:spPr>
+          <a:xfrm>
+            <a:off x="6307531" y="4169664"/>
+            <a:ext cx="676656" cy="384048"/>
           </a:xfrm>
           <a:prstGeom prst="rect">
             <a:avLst>
-              <a:gd name="adj" fmla="val 7692"/>
+              <a:gd name="adj" fmla="val 9524"/>
             </a:avLst>
           </a:prstGeom>
           <a:solidFill>
@@ -11618,14 +11657,14 @@
       </p:sp>
       <p:sp>
         <p:nvSpPr>
-          <p:cNvPr id="55" name="Text 53"/>
-          <p:cNvSpPr/>
-          <p:nvPr/>
-        </p:nvSpPr>
-        <p:spPr>
-          <a:xfrm>
-            <a:off x="6870192" y="4169664"/>
-            <a:ext cx="685800" cy="475488"/>
+          <p:cNvPr id="56" name="Text 54"/>
+          <p:cNvSpPr/>
+          <p:nvPr/>
+        </p:nvSpPr>
+        <p:spPr>
+          <a:xfrm>
+            <a:off x="6307531" y="4169664"/>
+            <a:ext cx="676656" cy="384048"/>
           </a:xfrm>
           <a:prstGeom prst="rect">
             <a:avLst/>
@@ -11649,6 +11688,72 @@
                 <a:ea typeface="Trebuchet MS" pitchFamily="34" charset="-122"/>
                 <a:cs typeface="Trebuchet MS" pitchFamily="34" charset="-120"/>
               </a:rPr>
+              <a:t>er</a:t>
+            </a:r>
+            <a:endParaRPr lang="en-US" sz="900" dirty="0"/>
+          </a:p>
+        </p:txBody>
+      </p:sp>
+      <p:sp>
+        <p:nvSpPr>
+          <p:cNvPr id="57" name="Shape 55"/>
+          <p:cNvSpPr/>
+          <p:nvPr/>
+        </p:nvSpPr>
+        <p:spPr>
+          <a:xfrm>
+            <a:off x="7033565" y="4169664"/>
+            <a:ext cx="676656" cy="384048"/>
+          </a:xfrm>
+          <a:prstGeom prst="rect">
+            <a:avLst>
+              <a:gd name="adj" fmla="val 9524"/>
+            </a:avLst>
+          </a:prstGeom>
+          <a:solidFill>
+            <a:srgbClr val="FFFFFF"/>
+          </a:solidFill>
+          <a:ln w="12700">
+            <a:solidFill>
+              <a:srgbClr val="DB2777"/>
+            </a:solidFill>
+            <a:prstDash val="solid"/>
+          </a:ln>
+        </p:spPr>
+      </p:sp>
+      <p:sp>
+        <p:nvSpPr>
+          <p:cNvPr id="58" name="Text 56"/>
+          <p:cNvSpPr/>
+          <p:nvPr/>
+        </p:nvSpPr>
+        <p:spPr>
+          <a:xfrm>
+            <a:off x="7033565" y="4169664"/>
+            <a:ext cx="676656" cy="384048"/>
+          </a:xfrm>
+          <a:prstGeom prst="rect">
+            <a:avLst/>
+          </a:prstGeom>
+          <a:noFill/>
+          <a:ln/>
+        </p:spPr>
+        <p:txBody>
+          <a:bodyPr wrap="square" lIns="0" tIns="0" rIns="0" bIns="0" rtlCol="0" anchor="ctr"/>
+          <a:lstStyle/>
+          <a:p>
+            <a:pPr algn="ctr" indent="0" marL="0">
+              <a:buNone/>
+            </a:pPr>
+            <a:r>
+              <a:rPr lang="en-US" sz="900" b="1" dirty="0">
+                <a:solidFill>
+                  <a:srgbClr val="9D174D"/>
+                </a:solidFill>
+                <a:latin typeface="Trebuchet MS" pitchFamily="34" charset="0"/>
+                <a:ea typeface="Trebuchet MS" pitchFamily="34" charset="-122"/>
+                <a:cs typeface="Trebuchet MS" pitchFamily="34" charset="-120"/>
+              </a:rPr>
               <a:t>i</a:t>
             </a:r>
             <a:endParaRPr lang="en-US" sz="900" dirty="0"/>
@@ -11657,18 +11762,18 @@
       </p:sp>
       <p:sp>
         <p:nvSpPr>
-          <p:cNvPr id="56" name="Shape 54"/>
-          <p:cNvSpPr/>
-          <p:nvPr/>
-        </p:nvSpPr>
-        <p:spPr>
-          <a:xfrm>
-            <a:off x="7677912" y="4169664"/>
-            <a:ext cx="685800" cy="475488"/>
+          <p:cNvPr id="59" name="Shape 57"/>
+          <p:cNvSpPr/>
+          <p:nvPr/>
+        </p:nvSpPr>
+        <p:spPr>
+          <a:xfrm>
+            <a:off x="7759598" y="4169664"/>
+            <a:ext cx="676656" cy="384048"/>
           </a:xfrm>
           <a:prstGeom prst="rect">
             <a:avLst>
-              <a:gd name="adj" fmla="val 7692"/>
+              <a:gd name="adj" fmla="val 9524"/>
             </a:avLst>
           </a:prstGeom>
           <a:solidFill>
@@ -11684,14 +11789,14 @@
       </p:sp>
       <p:sp>
         <p:nvSpPr>
-          <p:cNvPr id="57" name="Text 55"/>
-          <p:cNvSpPr/>
-          <p:nvPr/>
-        </p:nvSpPr>
-        <p:spPr>
-          <a:xfrm>
-            <a:off x="7677912" y="4169664"/>
-            <a:ext cx="685800" cy="475488"/>
+          <p:cNvPr id="60" name="Text 58"/>
+          <p:cNvSpPr/>
+          <p:nvPr/>
+        </p:nvSpPr>
+        <p:spPr>
+          <a:xfrm>
+            <a:off x="7759598" y="4169664"/>
+            <a:ext cx="676656" cy="384048"/>
           </a:xfrm>
           <a:prstGeom prst="rect">
             <a:avLst/>
@@ -12146,7 +12251,7 @@
                 <a:ea typeface="Trebuchet MS" pitchFamily="34" charset="-122"/>
                 <a:cs typeface="Trebuchet MS" pitchFamily="34" charset="-120"/>
               </a:rPr>
-              <a:t>resting</a:t>
+              <a:t>exploring</a:t>
             </a:r>
             <a:endParaRPr lang="en-US" sz="2800" dirty="0"/>
           </a:p>
@@ -12973,7 +13078,7 @@
                 <a:ea typeface="Trebuchet MS" pitchFamily="34" charset="-122"/>
                 <a:cs typeface="Trebuchet MS" pitchFamily="34" charset="-120"/>
               </a:rPr>
-              <a:t>resting</a:t>
+              <a:t>exploring</a:t>
             </a:r>
             <a:endParaRPr lang="en-US" sz="2800" dirty="0"/>
           </a:p>
@@ -13053,7 +13158,7 @@
         </p:nvSpPr>
         <p:spPr>
           <a:xfrm>
-            <a:off x="2938272" y="2258568"/>
+            <a:off x="2221992" y="2258568"/>
             <a:ext cx="1828800" cy="292608"/>
           </a:xfrm>
           <a:prstGeom prst="rect">
@@ -13087,7 +13192,7 @@
         </p:nvSpPr>
         <p:spPr>
           <a:xfrm>
-            <a:off x="2938272" y="2258568"/>
+            <a:off x="2221992" y="2258568"/>
             <a:ext cx="1828800" cy="292608"/>
           </a:xfrm>
           <a:prstGeom prst="rect">
@@ -13112,7 +13217,7 @@
                 <a:ea typeface="Trebuchet MS" pitchFamily="34" charset="-122"/>
                 <a:cs typeface="Trebuchet MS" pitchFamily="34" charset="-120"/>
               </a:rPr>
-              <a:t>rest</a:t>
+              <a:t>ex</a:t>
             </a:r>
             <a:endParaRPr lang="en-US" sz="1300" dirty="0"/>
           </a:p>
@@ -13126,7 +13231,7 @@
         </p:nvSpPr>
         <p:spPr>
           <a:xfrm>
-            <a:off x="2938272" y="2569464"/>
+            <a:off x="2221992" y="2569464"/>
             <a:ext cx="1828800" cy="201168"/>
           </a:xfrm>
           <a:prstGeom prst="rect">
@@ -13151,7 +13256,7 @@
                 <a:ea typeface="Calibri" pitchFamily="34" charset="-122"/>
                 <a:cs typeface="Calibri" pitchFamily="34" charset="-120"/>
               </a:rPr>
-              <a:t>to relax or stop</a:t>
+              <a:t>out, beyond</a:t>
             </a:r>
             <a:endParaRPr lang="en-US" sz="850" dirty="0"/>
           </a:p>
@@ -13165,7 +13270,7 @@
         </p:nvSpPr>
         <p:spPr>
           <a:xfrm>
-            <a:off x="5803392" y="2258568"/>
+            <a:off x="4370832" y="2258568"/>
             <a:ext cx="1828800" cy="292608"/>
           </a:xfrm>
           <a:prstGeom prst="rect">
@@ -13174,11 +13279,11 @@
             </a:avLst>
           </a:prstGeom>
           <a:solidFill>
-            <a:srgbClr val="CCFBF1"/>
+            <a:srgbClr val="FCE7F3"/>
           </a:solidFill>
           <a:ln w="19050">
             <a:solidFill>
-              <a:srgbClr val="0D9488"/>
+              <a:srgbClr val="DB2777"/>
             </a:solidFill>
             <a:prstDash val="solid"/>
           </a:ln>
@@ -13199,7 +13304,7 @@
         </p:nvSpPr>
         <p:spPr>
           <a:xfrm>
-            <a:off x="5803392" y="2258568"/>
+            <a:off x="4370832" y="2258568"/>
             <a:ext cx="1828800" cy="292608"/>
           </a:xfrm>
           <a:prstGeom prst="rect">
@@ -13218,13 +13323,13 @@
             <a:r>
               <a:rPr lang="en-US" sz="1300" b="1" dirty="0">
                 <a:solidFill>
-                  <a:srgbClr val="0F766E"/>
+                  <a:srgbClr val="9D174D"/>
                 </a:solidFill>
                 <a:latin typeface="Trebuchet MS" pitchFamily="34" charset="0"/>
                 <a:ea typeface="Trebuchet MS" pitchFamily="34" charset="-122"/>
                 <a:cs typeface="Trebuchet MS" pitchFamily="34" charset="-120"/>
               </a:rPr>
-              <a:t>ing</a:t>
+              <a:t>plor</a:t>
             </a:r>
             <a:endParaRPr lang="en-US" sz="1300" dirty="0"/>
           </a:p>
@@ -13238,7 +13343,7 @@
         </p:nvSpPr>
         <p:spPr>
           <a:xfrm>
-            <a:off x="5803392" y="2569464"/>
+            <a:off x="4370832" y="2569464"/>
             <a:ext cx="1828800" cy="201168"/>
           </a:xfrm>
           <a:prstGeom prst="rect">
@@ -13263,7 +13368,7 @@
                 <a:ea typeface="Calibri" pitchFamily="34" charset="-122"/>
                 <a:cs typeface="Calibri" pitchFamily="34" charset="-120"/>
               </a:rPr>
-              <a:t>ongoing action</a:t>
+              <a:t>to search or travel</a:t>
             </a:r>
             <a:endParaRPr lang="en-US" sz="850" dirty="0"/>
           </a:p>
@@ -13272,6 +13377,157 @@
       <p:sp>
         <p:nvSpPr>
           <p:cNvPr id="22" name="Shape 20"/>
+          <p:cNvSpPr/>
+          <p:nvPr/>
+        </p:nvSpPr>
+        <p:spPr>
+          <a:xfrm>
+            <a:off x="6519672" y="2258568"/>
+            <a:ext cx="1828800" cy="292608"/>
+          </a:xfrm>
+          <a:prstGeom prst="rect">
+            <a:avLst>
+              <a:gd name="adj" fmla="val 25000"/>
+            </a:avLst>
+          </a:prstGeom>
+          <a:solidFill>
+            <a:srgbClr val="CCFBF1"/>
+          </a:solidFill>
+          <a:ln w="19050">
+            <a:solidFill>
+              <a:srgbClr val="0D9488"/>
+            </a:solidFill>
+            <a:prstDash val="solid"/>
+          </a:ln>
+          <a:effectLst>
+            <a:outerShdw sx="100000" sy="100000" kx="0" ky="0" algn="bl" rotWithShape="0" blurRad="101600" dist="38100" dir="8100000">
+              <a:srgbClr val="000000">
+                <a:alpha val="12000"/>
+              </a:srgbClr>
+            </a:outerShdw>
+          </a:effectLst>
+        </p:spPr>
+      </p:sp>
+      <p:sp>
+        <p:nvSpPr>
+          <p:cNvPr id="23" name="Text 21"/>
+          <p:cNvSpPr/>
+          <p:nvPr/>
+        </p:nvSpPr>
+        <p:spPr>
+          <a:xfrm>
+            <a:off x="6519672" y="2258568"/>
+            <a:ext cx="1828800" cy="292608"/>
+          </a:xfrm>
+          <a:prstGeom prst="rect">
+            <a:avLst/>
+          </a:prstGeom>
+          <a:noFill/>
+          <a:ln/>
+        </p:spPr>
+        <p:txBody>
+          <a:bodyPr wrap="square" lIns="0" tIns="0" rIns="0" bIns="0" rtlCol="0" anchor="ctr"/>
+          <a:lstStyle/>
+          <a:p>
+            <a:pPr algn="ctr" indent="0" marL="0">
+              <a:buNone/>
+            </a:pPr>
+            <a:r>
+              <a:rPr lang="en-US" sz="1300" b="1" dirty="0">
+                <a:solidFill>
+                  <a:srgbClr val="0F766E"/>
+                </a:solidFill>
+                <a:latin typeface="Trebuchet MS" pitchFamily="34" charset="0"/>
+                <a:ea typeface="Trebuchet MS" pitchFamily="34" charset="-122"/>
+                <a:cs typeface="Trebuchet MS" pitchFamily="34" charset="-120"/>
+              </a:rPr>
+              <a:t>ing</a:t>
+            </a:r>
+            <a:endParaRPr lang="en-US" sz="1300" dirty="0"/>
+          </a:p>
+        </p:txBody>
+      </p:sp>
+      <p:sp>
+        <p:nvSpPr>
+          <p:cNvPr id="24" name="Text 22"/>
+          <p:cNvSpPr/>
+          <p:nvPr/>
+        </p:nvSpPr>
+        <p:spPr>
+          <a:xfrm>
+            <a:off x="6519672" y="2569464"/>
+            <a:ext cx="1828800" cy="201168"/>
+          </a:xfrm>
+          <a:prstGeom prst="rect">
+            <a:avLst/>
+          </a:prstGeom>
+          <a:noFill/>
+          <a:ln/>
+        </p:spPr>
+        <p:txBody>
+          <a:bodyPr wrap="square" lIns="0" tIns="0" rIns="0" bIns="0" rtlCol="0" anchor="t"/>
+          <a:lstStyle/>
+          <a:p>
+            <a:pPr algn="ctr" indent="0" marL="0">
+              <a:buNone/>
+            </a:pPr>
+            <a:r>
+              <a:rPr lang="en-US" sz="850" dirty="0">
+                <a:solidFill>
+                  <a:srgbClr val="475569"/>
+                </a:solidFill>
+                <a:latin typeface="Calibri" pitchFamily="34" charset="0"/>
+                <a:ea typeface="Calibri" pitchFamily="34" charset="-122"/>
+                <a:cs typeface="Calibri" pitchFamily="34" charset="-120"/>
+              </a:rPr>
+              <a:t>action in progress</a:t>
+            </a:r>
+            <a:endParaRPr lang="en-US" sz="850" dirty="0"/>
+          </a:p>
+        </p:txBody>
+      </p:sp>
+      <p:sp>
+        <p:nvSpPr>
+          <p:cNvPr id="25" name="Text 23"/>
+          <p:cNvSpPr/>
+          <p:nvPr/>
+        </p:nvSpPr>
+        <p:spPr>
+          <a:xfrm>
+            <a:off x="6519672" y="2752344"/>
+            <a:ext cx="1828800" cy="182880"/>
+          </a:xfrm>
+          <a:prstGeom prst="rect">
+            <a:avLst/>
+          </a:prstGeom>
+          <a:noFill/>
+          <a:ln/>
+        </p:spPr>
+        <p:txBody>
+          <a:bodyPr wrap="square" lIns="0" tIns="0" rIns="0" bIns="0" rtlCol="0" anchor="t"/>
+          <a:lstStyle/>
+          <a:p>
+            <a:pPr algn="ctr" indent="0" marL="0">
+              <a:buNone/>
+            </a:pPr>
+            <a:r>
+              <a:rPr lang="en-US" sz="700" i="1" dirty="0">
+                <a:solidFill>
+                  <a:srgbClr val="94A3B8"/>
+                </a:solidFill>
+                <a:latin typeface="Calibri" pitchFamily="34" charset="0"/>
+                <a:ea typeface="Calibri" pitchFamily="34" charset="-122"/>
+                <a:cs typeface="Calibri" pitchFamily="34" charset="-120"/>
+              </a:rPr>
+              <a:t>'e' dropped before vowel suffix</a:t>
+            </a:r>
+            <a:endParaRPr lang="en-US" sz="700" dirty="0"/>
+          </a:p>
+        </p:txBody>
+      </p:sp>
+      <p:sp>
+        <p:nvSpPr>
+          <p:cNvPr id="26" name="Shape 24"/>
           <p:cNvSpPr/>
           <p:nvPr/>
         </p:nvSpPr>
@@ -13298,7 +13554,7 @@
       </p:sp>
       <p:sp>
         <p:nvSpPr>
-          <p:cNvPr id="23" name="Text 21"/>
+          <p:cNvPr id="27" name="Text 25"/>
           <p:cNvSpPr/>
           <p:nvPr/>
         </p:nvSpPr>
@@ -13337,7 +13593,7 @@
       </p:sp>
       <p:sp>
         <p:nvSpPr>
-          <p:cNvPr id="24" name="Shape 22"/>
+          <p:cNvPr id="28" name="Shape 26"/>
           <p:cNvSpPr/>
           <p:nvPr/>
         </p:nvSpPr>
@@ -13364,7 +13620,7 @@
       </p:sp>
       <p:sp>
         <p:nvSpPr>
-          <p:cNvPr id="25" name="Text 23"/>
+          <p:cNvPr id="29" name="Text 27"/>
           <p:cNvSpPr/>
           <p:nvPr/>
         </p:nvSpPr>
@@ -13403,7 +13659,7 @@
       </p:sp>
       <p:sp>
         <p:nvSpPr>
-          <p:cNvPr id="26" name="Shape 24"/>
+          <p:cNvPr id="30" name="Shape 28"/>
           <p:cNvSpPr/>
           <p:nvPr/>
         </p:nvSpPr>
@@ -13430,7 +13686,7 @@
       </p:sp>
       <p:sp>
         <p:nvSpPr>
-          <p:cNvPr id="27" name="Text 25"/>
+          <p:cNvPr id="31" name="Text 29"/>
           <p:cNvSpPr/>
           <p:nvPr/>
         </p:nvSpPr>
@@ -13469,7 +13725,7 @@
       </p:sp>
       <p:sp>
         <p:nvSpPr>
-          <p:cNvPr id="28" name="Shape 26"/>
+          <p:cNvPr id="32" name="Shape 30"/>
           <p:cNvSpPr/>
           <p:nvPr/>
         </p:nvSpPr>
@@ -13496,7 +13752,7 @@
       </p:sp>
       <p:sp>
         <p:nvSpPr>
-          <p:cNvPr id="29" name="Text 27"/>
+          <p:cNvPr id="33" name="Text 31"/>
           <p:cNvSpPr/>
           <p:nvPr/>
         </p:nvSpPr>
@@ -13958,7 +14214,7 @@
                 <a:ea typeface="Trebuchet MS" pitchFamily="34" charset="-122"/>
                 <a:cs typeface="Trebuchet MS" pitchFamily="34" charset="-120"/>
               </a:rPr>
-              <a:t>resting</a:t>
+              <a:t>exploring</a:t>
             </a:r>
             <a:endParaRPr lang="en-US" sz="2800" dirty="0"/>
           </a:p>
@@ -14038,7 +14294,7 @@
         </p:nvSpPr>
         <p:spPr>
           <a:xfrm>
-            <a:off x="2938272" y="2258568"/>
+            <a:off x="2221992" y="2258568"/>
             <a:ext cx="1828800" cy="292608"/>
           </a:xfrm>
           <a:prstGeom prst="rect">
@@ -14072,7 +14328,7 @@
         </p:nvSpPr>
         <p:spPr>
           <a:xfrm>
-            <a:off x="2938272" y="2258568"/>
+            <a:off x="2221992" y="2258568"/>
             <a:ext cx="1828800" cy="292608"/>
           </a:xfrm>
           <a:prstGeom prst="rect">
@@ -14097,7 +14353,7 @@
                 <a:ea typeface="Trebuchet MS" pitchFamily="34" charset="-122"/>
                 <a:cs typeface="Trebuchet MS" pitchFamily="34" charset="-120"/>
               </a:rPr>
-              <a:t>rest</a:t>
+              <a:t>ex</a:t>
             </a:r>
             <a:endParaRPr lang="en-US" sz="1300" dirty="0"/>
           </a:p>
@@ -14111,7 +14367,7 @@
         </p:nvSpPr>
         <p:spPr>
           <a:xfrm>
-            <a:off x="2938272" y="2569464"/>
+            <a:off x="2221992" y="2569464"/>
             <a:ext cx="1828800" cy="201168"/>
           </a:xfrm>
           <a:prstGeom prst="rect">
@@ -14136,7 +14392,7 @@
                 <a:ea typeface="Calibri" pitchFamily="34" charset="-122"/>
                 <a:cs typeface="Calibri" pitchFamily="34" charset="-120"/>
               </a:rPr>
-              <a:t>to relax or stop</a:t>
+              <a:t>out, beyond</a:t>
             </a:r>
             <a:endParaRPr lang="en-US" sz="850" dirty="0"/>
           </a:p>
@@ -14150,7 +14406,7 @@
         </p:nvSpPr>
         <p:spPr>
           <a:xfrm>
-            <a:off x="5803392" y="2258568"/>
+            <a:off x="4370832" y="2258568"/>
             <a:ext cx="1828800" cy="292608"/>
           </a:xfrm>
           <a:prstGeom prst="rect">
@@ -14159,11 +14415,11 @@
             </a:avLst>
           </a:prstGeom>
           <a:solidFill>
-            <a:srgbClr val="CCFBF1"/>
+            <a:srgbClr val="FCE7F3"/>
           </a:solidFill>
           <a:ln w="19050">
             <a:solidFill>
-              <a:srgbClr val="0D9488"/>
+              <a:srgbClr val="DB2777"/>
             </a:solidFill>
             <a:prstDash val="solid"/>
           </a:ln>
@@ -14184,7 +14440,7 @@
         </p:nvSpPr>
         <p:spPr>
           <a:xfrm>
-            <a:off x="5803392" y="2258568"/>
+            <a:off x="4370832" y="2258568"/>
             <a:ext cx="1828800" cy="292608"/>
           </a:xfrm>
           <a:prstGeom prst="rect">
@@ -14203,13 +14459,13 @@
             <a:r>
               <a:rPr lang="en-US" sz="1300" b="1" dirty="0">
                 <a:solidFill>
-                  <a:srgbClr val="0F766E"/>
+                  <a:srgbClr val="9D174D"/>
                 </a:solidFill>
                 <a:latin typeface="Trebuchet MS" pitchFamily="34" charset="0"/>
                 <a:ea typeface="Trebuchet MS" pitchFamily="34" charset="-122"/>
                 <a:cs typeface="Trebuchet MS" pitchFamily="34" charset="-120"/>
               </a:rPr>
-              <a:t>ing</a:t>
+              <a:t>plor</a:t>
             </a:r>
             <a:endParaRPr lang="en-US" sz="1300" dirty="0"/>
           </a:p>
@@ -14223,7 +14479,7 @@
         </p:nvSpPr>
         <p:spPr>
           <a:xfrm>
-            <a:off x="5803392" y="2569464"/>
+            <a:off x="4370832" y="2569464"/>
             <a:ext cx="1828800" cy="201168"/>
           </a:xfrm>
           <a:prstGeom prst="rect">
@@ -14248,7 +14504,7 @@
                 <a:ea typeface="Calibri" pitchFamily="34" charset="-122"/>
                 <a:cs typeface="Calibri" pitchFamily="34" charset="-120"/>
               </a:rPr>
-              <a:t>ongoing action</a:t>
+              <a:t>to search or travel</a:t>
             </a:r>
             <a:endParaRPr lang="en-US" sz="850" dirty="0"/>
           </a:p>
@@ -14257,6 +14513,157 @@
       <p:sp>
         <p:nvSpPr>
           <p:cNvPr id="22" name="Shape 20"/>
+          <p:cNvSpPr/>
+          <p:nvPr/>
+        </p:nvSpPr>
+        <p:spPr>
+          <a:xfrm>
+            <a:off x="6519672" y="2258568"/>
+            <a:ext cx="1828800" cy="292608"/>
+          </a:xfrm>
+          <a:prstGeom prst="rect">
+            <a:avLst>
+              <a:gd name="adj" fmla="val 25000"/>
+            </a:avLst>
+          </a:prstGeom>
+          <a:solidFill>
+            <a:srgbClr val="CCFBF1"/>
+          </a:solidFill>
+          <a:ln w="19050">
+            <a:solidFill>
+              <a:srgbClr val="0D9488"/>
+            </a:solidFill>
+            <a:prstDash val="solid"/>
+          </a:ln>
+          <a:effectLst>
+            <a:outerShdw sx="100000" sy="100000" kx="0" ky="0" algn="bl" rotWithShape="0" blurRad="101600" dist="38100" dir="8100000">
+              <a:srgbClr val="000000">
+                <a:alpha val="12000"/>
+              </a:srgbClr>
+            </a:outerShdw>
+          </a:effectLst>
+        </p:spPr>
+      </p:sp>
+      <p:sp>
+        <p:nvSpPr>
+          <p:cNvPr id="23" name="Text 21"/>
+          <p:cNvSpPr/>
+          <p:nvPr/>
+        </p:nvSpPr>
+        <p:spPr>
+          <a:xfrm>
+            <a:off x="6519672" y="2258568"/>
+            <a:ext cx="1828800" cy="292608"/>
+          </a:xfrm>
+          <a:prstGeom prst="rect">
+            <a:avLst/>
+          </a:prstGeom>
+          <a:noFill/>
+          <a:ln/>
+        </p:spPr>
+        <p:txBody>
+          <a:bodyPr wrap="square" lIns="0" tIns="0" rIns="0" bIns="0" rtlCol="0" anchor="ctr"/>
+          <a:lstStyle/>
+          <a:p>
+            <a:pPr algn="ctr" indent="0" marL="0">
+              <a:buNone/>
+            </a:pPr>
+            <a:r>
+              <a:rPr lang="en-US" sz="1300" b="1" dirty="0">
+                <a:solidFill>
+                  <a:srgbClr val="0F766E"/>
+                </a:solidFill>
+                <a:latin typeface="Trebuchet MS" pitchFamily="34" charset="0"/>
+                <a:ea typeface="Trebuchet MS" pitchFamily="34" charset="-122"/>
+                <a:cs typeface="Trebuchet MS" pitchFamily="34" charset="-120"/>
+              </a:rPr>
+              <a:t>ing</a:t>
+            </a:r>
+            <a:endParaRPr lang="en-US" sz="1300" dirty="0"/>
+          </a:p>
+        </p:txBody>
+      </p:sp>
+      <p:sp>
+        <p:nvSpPr>
+          <p:cNvPr id="24" name="Text 22"/>
+          <p:cNvSpPr/>
+          <p:nvPr/>
+        </p:nvSpPr>
+        <p:spPr>
+          <a:xfrm>
+            <a:off x="6519672" y="2569464"/>
+            <a:ext cx="1828800" cy="201168"/>
+          </a:xfrm>
+          <a:prstGeom prst="rect">
+            <a:avLst/>
+          </a:prstGeom>
+          <a:noFill/>
+          <a:ln/>
+        </p:spPr>
+        <p:txBody>
+          <a:bodyPr wrap="square" lIns="0" tIns="0" rIns="0" bIns="0" rtlCol="0" anchor="t"/>
+          <a:lstStyle/>
+          <a:p>
+            <a:pPr algn="ctr" indent="0" marL="0">
+              <a:buNone/>
+            </a:pPr>
+            <a:r>
+              <a:rPr lang="en-US" sz="850" dirty="0">
+                <a:solidFill>
+                  <a:srgbClr val="475569"/>
+                </a:solidFill>
+                <a:latin typeface="Calibri" pitchFamily="34" charset="0"/>
+                <a:ea typeface="Calibri" pitchFamily="34" charset="-122"/>
+                <a:cs typeface="Calibri" pitchFamily="34" charset="-120"/>
+              </a:rPr>
+              <a:t>action in progress</a:t>
+            </a:r>
+            <a:endParaRPr lang="en-US" sz="850" dirty="0"/>
+          </a:p>
+        </p:txBody>
+      </p:sp>
+      <p:sp>
+        <p:nvSpPr>
+          <p:cNvPr id="25" name="Text 23"/>
+          <p:cNvSpPr/>
+          <p:nvPr/>
+        </p:nvSpPr>
+        <p:spPr>
+          <a:xfrm>
+            <a:off x="6519672" y="2752344"/>
+            <a:ext cx="1828800" cy="182880"/>
+          </a:xfrm>
+          <a:prstGeom prst="rect">
+            <a:avLst/>
+          </a:prstGeom>
+          <a:noFill/>
+          <a:ln/>
+        </p:spPr>
+        <p:txBody>
+          <a:bodyPr wrap="square" lIns="0" tIns="0" rIns="0" bIns="0" rtlCol="0" anchor="t"/>
+          <a:lstStyle/>
+          <a:p>
+            <a:pPr algn="ctr" indent="0" marL="0">
+              <a:buNone/>
+            </a:pPr>
+            <a:r>
+              <a:rPr lang="en-US" sz="700" i="1" dirty="0">
+                <a:solidFill>
+                  <a:srgbClr val="94A3B8"/>
+                </a:solidFill>
+                <a:latin typeface="Calibri" pitchFamily="34" charset="0"/>
+                <a:ea typeface="Calibri" pitchFamily="34" charset="-122"/>
+                <a:cs typeface="Calibri" pitchFamily="34" charset="-120"/>
+              </a:rPr>
+              <a:t>'e' dropped before vowel suffix</a:t>
+            </a:r>
+            <a:endParaRPr lang="en-US" sz="700" dirty="0"/>
+          </a:p>
+        </p:txBody>
+      </p:sp>
+      <p:sp>
+        <p:nvSpPr>
+          <p:cNvPr id="26" name="Shape 24"/>
           <p:cNvSpPr/>
           <p:nvPr/>
         </p:nvSpPr>
@@ -14283,7 +14690,7 @@
       </p:sp>
       <p:sp>
         <p:nvSpPr>
-          <p:cNvPr id="23" name="Text 21"/>
+          <p:cNvPr id="27" name="Text 25"/>
           <p:cNvSpPr/>
           <p:nvPr/>
         </p:nvSpPr>
@@ -14322,7 +14729,7 @@
       </p:sp>
       <p:sp>
         <p:nvSpPr>
-          <p:cNvPr id="24" name="Shape 22"/>
+          <p:cNvPr id="28" name="Shape 26"/>
           <p:cNvSpPr/>
           <p:nvPr/>
         </p:nvSpPr>
@@ -14349,13 +14756,13 @@
       </p:sp>
       <p:sp>
         <p:nvSpPr>
-          <p:cNvPr id="25" name="Shape 23"/>
-          <p:cNvSpPr/>
-          <p:nvPr/>
-        </p:nvSpPr>
-        <p:spPr>
-          <a:xfrm>
-            <a:off x="2999232" y="3364992"/>
+          <p:cNvPr id="29" name="Shape 27"/>
+          <p:cNvSpPr/>
+          <p:nvPr/>
+        </p:nvSpPr>
+        <p:spPr>
+          <a:xfrm>
+            <a:off x="2313432" y="3364992"/>
             <a:ext cx="1645920" cy="475488"/>
           </a:xfrm>
           <a:prstGeom prst="rect">
@@ -14376,13 +14783,13 @@
       </p:sp>
       <p:sp>
         <p:nvSpPr>
-          <p:cNvPr id="26" name="Text 24"/>
-          <p:cNvSpPr/>
-          <p:nvPr/>
-        </p:nvSpPr>
-        <p:spPr>
-          <a:xfrm>
-            <a:off x="2999232" y="3364992"/>
+          <p:cNvPr id="30" name="Text 28"/>
+          <p:cNvSpPr/>
+          <p:nvPr/>
+        </p:nvSpPr>
+        <p:spPr>
+          <a:xfrm>
+            <a:off x="2313432" y="3364992"/>
             <a:ext cx="1645920" cy="475488"/>
           </a:xfrm>
           <a:prstGeom prst="rect">
@@ -14407,7 +14814,7 @@
                 <a:ea typeface="Trebuchet MS" pitchFamily="34" charset="-122"/>
                 <a:cs typeface="Trebuchet MS" pitchFamily="34" charset="-120"/>
               </a:rPr>
-              <a:t>rest</a:t>
+              <a:t>ex</a:t>
             </a:r>
             <a:endParaRPr lang="en-US" sz="1400" dirty="0"/>
           </a:p>
@@ -14415,14 +14822,14 @@
       </p:sp>
       <p:sp>
         <p:nvSpPr>
-          <p:cNvPr id="27" name="Text 25"/>
-          <p:cNvSpPr/>
-          <p:nvPr/>
-        </p:nvSpPr>
-        <p:spPr>
-          <a:xfrm>
-            <a:off x="4645152" y="3364992"/>
-            <a:ext cx="1097280" cy="475488"/>
+          <p:cNvPr id="31" name="Text 29"/>
+          <p:cNvSpPr/>
+          <p:nvPr/>
+        </p:nvSpPr>
+        <p:spPr>
+          <a:xfrm>
+            <a:off x="3959352" y="3364992"/>
+            <a:ext cx="411480" cy="475488"/>
           </a:xfrm>
           <a:prstGeom prst="rect">
             <a:avLst/>
@@ -14454,13 +14861,13 @@
       </p:sp>
       <p:sp>
         <p:nvSpPr>
-          <p:cNvPr id="28" name="Shape 26"/>
-          <p:cNvSpPr/>
-          <p:nvPr/>
-        </p:nvSpPr>
-        <p:spPr>
-          <a:xfrm>
-            <a:off x="5742432" y="3364992"/>
+          <p:cNvPr id="32" name="Shape 30"/>
+          <p:cNvSpPr/>
+          <p:nvPr/>
+        </p:nvSpPr>
+        <p:spPr>
+          <a:xfrm>
+            <a:off x="4370832" y="3364992"/>
             <a:ext cx="1645920" cy="475488"/>
           </a:xfrm>
           <a:prstGeom prst="rect">
@@ -14481,13 +14888,13 @@
       </p:sp>
       <p:sp>
         <p:nvSpPr>
-          <p:cNvPr id="29" name="Text 27"/>
-          <p:cNvSpPr/>
-          <p:nvPr/>
-        </p:nvSpPr>
-        <p:spPr>
-          <a:xfrm>
-            <a:off x="5742432" y="3364992"/>
+          <p:cNvPr id="33" name="Text 31"/>
+          <p:cNvSpPr/>
+          <p:nvPr/>
+        </p:nvSpPr>
+        <p:spPr>
+          <a:xfrm>
+            <a:off x="4370832" y="3364992"/>
             <a:ext cx="1645920" cy="475488"/>
           </a:xfrm>
           <a:prstGeom prst="rect">
@@ -14512,6 +14919,111 @@
                 <a:ea typeface="Trebuchet MS" pitchFamily="34" charset="-122"/>
                 <a:cs typeface="Trebuchet MS" pitchFamily="34" charset="-120"/>
               </a:rPr>
+              <a:t>plor</a:t>
+            </a:r>
+            <a:endParaRPr lang="en-US" sz="1400" dirty="0"/>
+          </a:p>
+        </p:txBody>
+      </p:sp>
+      <p:sp>
+        <p:nvSpPr>
+          <p:cNvPr id="34" name="Text 32"/>
+          <p:cNvSpPr/>
+          <p:nvPr/>
+        </p:nvSpPr>
+        <p:spPr>
+          <a:xfrm>
+            <a:off x="6016752" y="3364992"/>
+            <a:ext cx="411480" cy="475488"/>
+          </a:xfrm>
+          <a:prstGeom prst="rect">
+            <a:avLst/>
+          </a:prstGeom>
+          <a:noFill/>
+          <a:ln/>
+        </p:spPr>
+        <p:txBody>
+          <a:bodyPr wrap="square" lIns="0" tIns="0" rIns="0" bIns="0" rtlCol="0" anchor="ctr"/>
+          <a:lstStyle/>
+          <a:p>
+            <a:pPr algn="ctr" indent="0" marL="0">
+              <a:buNone/>
+            </a:pPr>
+            <a:r>
+              <a:rPr lang="en-US" sz="1600" b="1" dirty="0">
+                <a:solidFill>
+                  <a:srgbClr val="0D9488"/>
+                </a:solidFill>
+                <a:latin typeface="Trebuchet MS" pitchFamily="34" charset="0"/>
+                <a:ea typeface="Trebuchet MS" pitchFamily="34" charset="-122"/>
+                <a:cs typeface="Trebuchet MS" pitchFamily="34" charset="-120"/>
+              </a:rPr>
+              <a:t>·</a:t>
+            </a:r>
+            <a:endParaRPr lang="en-US" sz="1600" dirty="0"/>
+          </a:p>
+        </p:txBody>
+      </p:sp>
+      <p:sp>
+        <p:nvSpPr>
+          <p:cNvPr id="35" name="Shape 33"/>
+          <p:cNvSpPr/>
+          <p:nvPr/>
+        </p:nvSpPr>
+        <p:spPr>
+          <a:xfrm>
+            <a:off x="6428232" y="3364992"/>
+            <a:ext cx="1645920" cy="475488"/>
+          </a:xfrm>
+          <a:prstGeom prst="rect">
+            <a:avLst>
+              <a:gd name="adj" fmla="val 9615"/>
+            </a:avLst>
+          </a:prstGeom>
+          <a:solidFill>
+            <a:srgbClr val="FFFFFF"/>
+          </a:solidFill>
+          <a:ln w="12700">
+            <a:solidFill>
+              <a:srgbClr val="0D9488"/>
+            </a:solidFill>
+            <a:prstDash val="solid"/>
+          </a:ln>
+        </p:spPr>
+      </p:sp>
+      <p:sp>
+        <p:nvSpPr>
+          <p:cNvPr id="36" name="Text 34"/>
+          <p:cNvSpPr/>
+          <p:nvPr/>
+        </p:nvSpPr>
+        <p:spPr>
+          <a:xfrm>
+            <a:off x="6428232" y="3364992"/>
+            <a:ext cx="1645920" cy="475488"/>
+          </a:xfrm>
+          <a:prstGeom prst="rect">
+            <a:avLst/>
+          </a:prstGeom>
+          <a:noFill/>
+          <a:ln/>
+        </p:spPr>
+        <p:txBody>
+          <a:bodyPr wrap="square" lIns="0" tIns="0" rIns="0" bIns="0" rtlCol="0" anchor="ctr"/>
+          <a:lstStyle/>
+          <a:p>
+            <a:pPr algn="ctr" indent="0" marL="0">
+              <a:buNone/>
+            </a:pPr>
+            <a:r>
+              <a:rPr lang="en-US" sz="1400" b="1" dirty="0">
+                <a:solidFill>
+                  <a:srgbClr val="0D9488"/>
+                </a:solidFill>
+                <a:latin typeface="Trebuchet MS" pitchFamily="34" charset="0"/>
+                <a:ea typeface="Trebuchet MS" pitchFamily="34" charset="-122"/>
+                <a:cs typeface="Trebuchet MS" pitchFamily="34" charset="-120"/>
+              </a:rPr>
               <a:t>ing</a:t>
             </a:r>
             <a:endParaRPr lang="en-US" sz="1400" dirty="0"/>
@@ -14520,7 +15032,7 @@
       </p:sp>
       <p:sp>
         <p:nvSpPr>
-          <p:cNvPr id="30" name="Shape 28"/>
+          <p:cNvPr id="37" name="Shape 35"/>
           <p:cNvSpPr/>
           <p:nvPr/>
         </p:nvSpPr>
@@ -14547,7 +15059,7 @@
       </p:sp>
       <p:sp>
         <p:nvSpPr>
-          <p:cNvPr id="31" name="Text 29"/>
+          <p:cNvPr id="38" name="Text 36"/>
           <p:cNvSpPr/>
           <p:nvPr/>
         </p:nvSpPr>
@@ -14586,7 +15098,7 @@
       </p:sp>
       <p:sp>
         <p:nvSpPr>
-          <p:cNvPr id="32" name="Shape 30"/>
+          <p:cNvPr id="39" name="Shape 37"/>
           <p:cNvSpPr/>
           <p:nvPr/>
         </p:nvSpPr>
@@ -14613,7 +15125,7 @@
       </p:sp>
       <p:sp>
         <p:nvSpPr>
-          <p:cNvPr id="33" name="Text 31"/>
+          <p:cNvPr id="40" name="Text 38"/>
           <p:cNvSpPr/>
           <p:nvPr/>
         </p:nvSpPr>
@@ -15340,7 +15852,7 @@
                 <a:ea typeface="Trebuchet MS" pitchFamily="34" charset="-122"/>
                 <a:cs typeface="Trebuchet MS" pitchFamily="34" charset="-120"/>
               </a:rPr>
-              <a:t>resting</a:t>
+              <a:t>exploring</a:t>
             </a:r>
             <a:endParaRPr lang="en-US" sz="2800" dirty="0"/>
           </a:p>
@@ -15420,7 +15932,7 @@
         </p:nvSpPr>
         <p:spPr>
           <a:xfrm>
-            <a:off x="2938272" y="2258568"/>
+            <a:off x="2221992" y="2258568"/>
             <a:ext cx="1828800" cy="292608"/>
           </a:xfrm>
           <a:prstGeom prst="rect">
@@ -15454,7 +15966,7 @@
         </p:nvSpPr>
         <p:spPr>
           <a:xfrm>
-            <a:off x="2938272" y="2258568"/>
+            <a:off x="2221992" y="2258568"/>
             <a:ext cx="1828800" cy="292608"/>
           </a:xfrm>
           <a:prstGeom prst="rect">
@@ -15479,7 +15991,7 @@
                 <a:ea typeface="Trebuchet MS" pitchFamily="34" charset="-122"/>
                 <a:cs typeface="Trebuchet MS" pitchFamily="34" charset="-120"/>
               </a:rPr>
-              <a:t>rest</a:t>
+              <a:t>ex</a:t>
             </a:r>
             <a:endParaRPr lang="en-US" sz="1300" dirty="0"/>
           </a:p>
@@ -15493,7 +16005,7 @@
         </p:nvSpPr>
         <p:spPr>
           <a:xfrm>
-            <a:off x="2938272" y="2569464"/>
+            <a:off x="2221992" y="2569464"/>
             <a:ext cx="1828800" cy="201168"/>
           </a:xfrm>
           <a:prstGeom prst="rect">
@@ -15518,7 +16030,7 @@
                 <a:ea typeface="Calibri" pitchFamily="34" charset="-122"/>
                 <a:cs typeface="Calibri" pitchFamily="34" charset="-120"/>
               </a:rPr>
-              <a:t>to relax or stop</a:t>
+              <a:t>out, beyond</a:t>
             </a:r>
             <a:endParaRPr lang="en-US" sz="850" dirty="0"/>
           </a:p>
@@ -15532,7 +16044,7 @@
         </p:nvSpPr>
         <p:spPr>
           <a:xfrm>
-            <a:off x="5803392" y="2258568"/>
+            <a:off x="4370832" y="2258568"/>
             <a:ext cx="1828800" cy="292608"/>
           </a:xfrm>
           <a:prstGeom prst="rect">
@@ -15541,11 +16053,11 @@
             </a:avLst>
           </a:prstGeom>
           <a:solidFill>
-            <a:srgbClr val="CCFBF1"/>
+            <a:srgbClr val="FCE7F3"/>
           </a:solidFill>
           <a:ln w="19050">
             <a:solidFill>
-              <a:srgbClr val="0D9488"/>
+              <a:srgbClr val="DB2777"/>
             </a:solidFill>
             <a:prstDash val="solid"/>
           </a:ln>
@@ -15566,7 +16078,7 @@
         </p:nvSpPr>
         <p:spPr>
           <a:xfrm>
-            <a:off x="5803392" y="2258568"/>
+            <a:off x="4370832" y="2258568"/>
             <a:ext cx="1828800" cy="292608"/>
           </a:xfrm>
           <a:prstGeom prst="rect">
@@ -15585,13 +16097,13 @@
             <a:r>
               <a:rPr lang="en-US" sz="1300" b="1" dirty="0">
                 <a:solidFill>
-                  <a:srgbClr val="0F766E"/>
+                  <a:srgbClr val="9D174D"/>
                 </a:solidFill>
                 <a:latin typeface="Trebuchet MS" pitchFamily="34" charset="0"/>
                 <a:ea typeface="Trebuchet MS" pitchFamily="34" charset="-122"/>
                 <a:cs typeface="Trebuchet MS" pitchFamily="34" charset="-120"/>
               </a:rPr>
-              <a:t>ing</a:t>
+              <a:t>plor</a:t>
             </a:r>
             <a:endParaRPr lang="en-US" sz="1300" dirty="0"/>
           </a:p>
@@ -15605,7 +16117,7 @@
         </p:nvSpPr>
         <p:spPr>
           <a:xfrm>
-            <a:off x="5803392" y="2569464"/>
+            <a:off x="4370832" y="2569464"/>
             <a:ext cx="1828800" cy="201168"/>
           </a:xfrm>
           <a:prstGeom prst="rect">
@@ -15630,7 +16142,7 @@
                 <a:ea typeface="Calibri" pitchFamily="34" charset="-122"/>
                 <a:cs typeface="Calibri" pitchFamily="34" charset="-120"/>
               </a:rPr>
-              <a:t>ongoing action</a:t>
+              <a:t>to search or travel</a:t>
             </a:r>
             <a:endParaRPr lang="en-US" sz="850" dirty="0"/>
           </a:p>
@@ -15639,6 +16151,157 @@
       <p:sp>
         <p:nvSpPr>
           <p:cNvPr id="22" name="Shape 20"/>
+          <p:cNvSpPr/>
+          <p:nvPr/>
+        </p:nvSpPr>
+        <p:spPr>
+          <a:xfrm>
+            <a:off x="6519672" y="2258568"/>
+            <a:ext cx="1828800" cy="292608"/>
+          </a:xfrm>
+          <a:prstGeom prst="rect">
+            <a:avLst>
+              <a:gd name="adj" fmla="val 25000"/>
+            </a:avLst>
+          </a:prstGeom>
+          <a:solidFill>
+            <a:srgbClr val="CCFBF1"/>
+          </a:solidFill>
+          <a:ln w="19050">
+            <a:solidFill>
+              <a:srgbClr val="0D9488"/>
+            </a:solidFill>
+            <a:prstDash val="solid"/>
+          </a:ln>
+          <a:effectLst>
+            <a:outerShdw sx="100000" sy="100000" kx="0" ky="0" algn="bl" rotWithShape="0" blurRad="101600" dist="38100" dir="8100000">
+              <a:srgbClr val="000000">
+                <a:alpha val="12000"/>
+              </a:srgbClr>
+            </a:outerShdw>
+          </a:effectLst>
+        </p:spPr>
+      </p:sp>
+      <p:sp>
+        <p:nvSpPr>
+          <p:cNvPr id="23" name="Text 21"/>
+          <p:cNvSpPr/>
+          <p:nvPr/>
+        </p:nvSpPr>
+        <p:spPr>
+          <a:xfrm>
+            <a:off x="6519672" y="2258568"/>
+            <a:ext cx="1828800" cy="292608"/>
+          </a:xfrm>
+          <a:prstGeom prst="rect">
+            <a:avLst/>
+          </a:prstGeom>
+          <a:noFill/>
+          <a:ln/>
+        </p:spPr>
+        <p:txBody>
+          <a:bodyPr wrap="square" lIns="0" tIns="0" rIns="0" bIns="0" rtlCol="0" anchor="ctr"/>
+          <a:lstStyle/>
+          <a:p>
+            <a:pPr algn="ctr" indent="0" marL="0">
+              <a:buNone/>
+            </a:pPr>
+            <a:r>
+              <a:rPr lang="en-US" sz="1300" b="1" dirty="0">
+                <a:solidFill>
+                  <a:srgbClr val="0F766E"/>
+                </a:solidFill>
+                <a:latin typeface="Trebuchet MS" pitchFamily="34" charset="0"/>
+                <a:ea typeface="Trebuchet MS" pitchFamily="34" charset="-122"/>
+                <a:cs typeface="Trebuchet MS" pitchFamily="34" charset="-120"/>
+              </a:rPr>
+              <a:t>ing</a:t>
+            </a:r>
+            <a:endParaRPr lang="en-US" sz="1300" dirty="0"/>
+          </a:p>
+        </p:txBody>
+      </p:sp>
+      <p:sp>
+        <p:nvSpPr>
+          <p:cNvPr id="24" name="Text 22"/>
+          <p:cNvSpPr/>
+          <p:nvPr/>
+        </p:nvSpPr>
+        <p:spPr>
+          <a:xfrm>
+            <a:off x="6519672" y="2569464"/>
+            <a:ext cx="1828800" cy="201168"/>
+          </a:xfrm>
+          <a:prstGeom prst="rect">
+            <a:avLst/>
+          </a:prstGeom>
+          <a:noFill/>
+          <a:ln/>
+        </p:spPr>
+        <p:txBody>
+          <a:bodyPr wrap="square" lIns="0" tIns="0" rIns="0" bIns="0" rtlCol="0" anchor="t"/>
+          <a:lstStyle/>
+          <a:p>
+            <a:pPr algn="ctr" indent="0" marL="0">
+              <a:buNone/>
+            </a:pPr>
+            <a:r>
+              <a:rPr lang="en-US" sz="850" dirty="0">
+                <a:solidFill>
+                  <a:srgbClr val="475569"/>
+                </a:solidFill>
+                <a:latin typeface="Calibri" pitchFamily="34" charset="0"/>
+                <a:ea typeface="Calibri" pitchFamily="34" charset="-122"/>
+                <a:cs typeface="Calibri" pitchFamily="34" charset="-120"/>
+              </a:rPr>
+              <a:t>action in progress</a:t>
+            </a:r>
+            <a:endParaRPr lang="en-US" sz="850" dirty="0"/>
+          </a:p>
+        </p:txBody>
+      </p:sp>
+      <p:sp>
+        <p:nvSpPr>
+          <p:cNvPr id="25" name="Text 23"/>
+          <p:cNvSpPr/>
+          <p:nvPr/>
+        </p:nvSpPr>
+        <p:spPr>
+          <a:xfrm>
+            <a:off x="6519672" y="2752344"/>
+            <a:ext cx="1828800" cy="182880"/>
+          </a:xfrm>
+          <a:prstGeom prst="rect">
+            <a:avLst/>
+          </a:prstGeom>
+          <a:noFill/>
+          <a:ln/>
+        </p:spPr>
+        <p:txBody>
+          <a:bodyPr wrap="square" lIns="0" tIns="0" rIns="0" bIns="0" rtlCol="0" anchor="t"/>
+          <a:lstStyle/>
+          <a:p>
+            <a:pPr algn="ctr" indent="0" marL="0">
+              <a:buNone/>
+            </a:pPr>
+            <a:r>
+              <a:rPr lang="en-US" sz="700" i="1" dirty="0">
+                <a:solidFill>
+                  <a:srgbClr val="94A3B8"/>
+                </a:solidFill>
+                <a:latin typeface="Calibri" pitchFamily="34" charset="0"/>
+                <a:ea typeface="Calibri" pitchFamily="34" charset="-122"/>
+                <a:cs typeface="Calibri" pitchFamily="34" charset="-120"/>
+              </a:rPr>
+              <a:t>'e' dropped before vowel suffix</a:t>
+            </a:r>
+            <a:endParaRPr lang="en-US" sz="700" dirty="0"/>
+          </a:p>
+        </p:txBody>
+      </p:sp>
+      <p:sp>
+        <p:nvSpPr>
+          <p:cNvPr id="26" name="Shape 24"/>
           <p:cNvSpPr/>
           <p:nvPr/>
         </p:nvSpPr>
@@ -15665,7 +16328,7 @@
       </p:sp>
       <p:sp>
         <p:nvSpPr>
-          <p:cNvPr id="23" name="Text 21"/>
+          <p:cNvPr id="27" name="Text 25"/>
           <p:cNvSpPr/>
           <p:nvPr/>
         </p:nvSpPr>
@@ -15704,7 +16367,7 @@
       </p:sp>
       <p:sp>
         <p:nvSpPr>
-          <p:cNvPr id="24" name="Shape 22"/>
+          <p:cNvPr id="28" name="Shape 26"/>
           <p:cNvSpPr/>
           <p:nvPr/>
         </p:nvSpPr>
@@ -15731,13 +16394,13 @@
       </p:sp>
       <p:sp>
         <p:nvSpPr>
-          <p:cNvPr id="25" name="Shape 23"/>
-          <p:cNvSpPr/>
-          <p:nvPr/>
-        </p:nvSpPr>
-        <p:spPr>
-          <a:xfrm>
-            <a:off x="2999232" y="3364992"/>
+          <p:cNvPr id="29" name="Shape 27"/>
+          <p:cNvSpPr/>
+          <p:nvPr/>
+        </p:nvSpPr>
+        <p:spPr>
+          <a:xfrm>
+            <a:off x="2313432" y="3364992"/>
             <a:ext cx="1645920" cy="475488"/>
           </a:xfrm>
           <a:prstGeom prst="rect">
@@ -15758,13 +16421,13 @@
       </p:sp>
       <p:sp>
         <p:nvSpPr>
-          <p:cNvPr id="26" name="Text 24"/>
-          <p:cNvSpPr/>
-          <p:nvPr/>
-        </p:nvSpPr>
-        <p:spPr>
-          <a:xfrm>
-            <a:off x="2999232" y="3364992"/>
+          <p:cNvPr id="30" name="Text 28"/>
+          <p:cNvSpPr/>
+          <p:nvPr/>
+        </p:nvSpPr>
+        <p:spPr>
+          <a:xfrm>
+            <a:off x="2313432" y="3364992"/>
             <a:ext cx="1645920" cy="475488"/>
           </a:xfrm>
           <a:prstGeom prst="rect">
@@ -15789,7 +16452,7 @@
                 <a:ea typeface="Trebuchet MS" pitchFamily="34" charset="-122"/>
                 <a:cs typeface="Trebuchet MS" pitchFamily="34" charset="-120"/>
               </a:rPr>
-              <a:t>rest</a:t>
+              <a:t>ex</a:t>
             </a:r>
             <a:endParaRPr lang="en-US" sz="1400" dirty="0"/>
           </a:p>
@@ -15797,14 +16460,14 @@
       </p:sp>
       <p:sp>
         <p:nvSpPr>
-          <p:cNvPr id="27" name="Text 25"/>
-          <p:cNvSpPr/>
-          <p:nvPr/>
-        </p:nvSpPr>
-        <p:spPr>
-          <a:xfrm>
-            <a:off x="4645152" y="3364992"/>
-            <a:ext cx="1097280" cy="475488"/>
+          <p:cNvPr id="31" name="Text 29"/>
+          <p:cNvSpPr/>
+          <p:nvPr/>
+        </p:nvSpPr>
+        <p:spPr>
+          <a:xfrm>
+            <a:off x="3959352" y="3364992"/>
+            <a:ext cx="411480" cy="475488"/>
           </a:xfrm>
           <a:prstGeom prst="rect">
             <a:avLst/>
@@ -15836,13 +16499,13 @@
       </p:sp>
       <p:sp>
         <p:nvSpPr>
-          <p:cNvPr id="28" name="Shape 26"/>
-          <p:cNvSpPr/>
-          <p:nvPr/>
-        </p:nvSpPr>
-        <p:spPr>
-          <a:xfrm>
-            <a:off x="5742432" y="3364992"/>
+          <p:cNvPr id="32" name="Shape 30"/>
+          <p:cNvSpPr/>
+          <p:nvPr/>
+        </p:nvSpPr>
+        <p:spPr>
+          <a:xfrm>
+            <a:off x="4370832" y="3364992"/>
             <a:ext cx="1645920" cy="475488"/>
           </a:xfrm>
           <a:prstGeom prst="rect">
@@ -15863,13 +16526,13 @@
       </p:sp>
       <p:sp>
         <p:nvSpPr>
-          <p:cNvPr id="29" name="Text 27"/>
-          <p:cNvSpPr/>
-          <p:nvPr/>
-        </p:nvSpPr>
-        <p:spPr>
-          <a:xfrm>
-            <a:off x="5742432" y="3364992"/>
+          <p:cNvPr id="33" name="Text 31"/>
+          <p:cNvSpPr/>
+          <p:nvPr/>
+        </p:nvSpPr>
+        <p:spPr>
+          <a:xfrm>
+            <a:off x="4370832" y="3364992"/>
             <a:ext cx="1645920" cy="475488"/>
           </a:xfrm>
           <a:prstGeom prst="rect">
@@ -15894,6 +16557,111 @@
                 <a:ea typeface="Trebuchet MS" pitchFamily="34" charset="-122"/>
                 <a:cs typeface="Trebuchet MS" pitchFamily="34" charset="-120"/>
               </a:rPr>
+              <a:t>plor</a:t>
+            </a:r>
+            <a:endParaRPr lang="en-US" sz="1400" dirty="0"/>
+          </a:p>
+        </p:txBody>
+      </p:sp>
+      <p:sp>
+        <p:nvSpPr>
+          <p:cNvPr id="34" name="Text 32"/>
+          <p:cNvSpPr/>
+          <p:nvPr/>
+        </p:nvSpPr>
+        <p:spPr>
+          <a:xfrm>
+            <a:off x="6016752" y="3364992"/>
+            <a:ext cx="411480" cy="475488"/>
+          </a:xfrm>
+          <a:prstGeom prst="rect">
+            <a:avLst/>
+          </a:prstGeom>
+          <a:noFill/>
+          <a:ln/>
+        </p:spPr>
+        <p:txBody>
+          <a:bodyPr wrap="square" lIns="0" tIns="0" rIns="0" bIns="0" rtlCol="0" anchor="ctr"/>
+          <a:lstStyle/>
+          <a:p>
+            <a:pPr algn="ctr" indent="0" marL="0">
+              <a:buNone/>
+            </a:pPr>
+            <a:r>
+              <a:rPr lang="en-US" sz="1600" b="1" dirty="0">
+                <a:solidFill>
+                  <a:srgbClr val="0D9488"/>
+                </a:solidFill>
+                <a:latin typeface="Trebuchet MS" pitchFamily="34" charset="0"/>
+                <a:ea typeface="Trebuchet MS" pitchFamily="34" charset="-122"/>
+                <a:cs typeface="Trebuchet MS" pitchFamily="34" charset="-120"/>
+              </a:rPr>
+              <a:t>·</a:t>
+            </a:r>
+            <a:endParaRPr lang="en-US" sz="1600" dirty="0"/>
+          </a:p>
+        </p:txBody>
+      </p:sp>
+      <p:sp>
+        <p:nvSpPr>
+          <p:cNvPr id="35" name="Shape 33"/>
+          <p:cNvSpPr/>
+          <p:nvPr/>
+        </p:nvSpPr>
+        <p:spPr>
+          <a:xfrm>
+            <a:off x="6428232" y="3364992"/>
+            <a:ext cx="1645920" cy="475488"/>
+          </a:xfrm>
+          <a:prstGeom prst="rect">
+            <a:avLst>
+              <a:gd name="adj" fmla="val 9615"/>
+            </a:avLst>
+          </a:prstGeom>
+          <a:solidFill>
+            <a:srgbClr val="FFFFFF"/>
+          </a:solidFill>
+          <a:ln w="12700">
+            <a:solidFill>
+              <a:srgbClr val="0D9488"/>
+            </a:solidFill>
+            <a:prstDash val="solid"/>
+          </a:ln>
+        </p:spPr>
+      </p:sp>
+      <p:sp>
+        <p:nvSpPr>
+          <p:cNvPr id="36" name="Text 34"/>
+          <p:cNvSpPr/>
+          <p:nvPr/>
+        </p:nvSpPr>
+        <p:spPr>
+          <a:xfrm>
+            <a:off x="6428232" y="3364992"/>
+            <a:ext cx="1645920" cy="475488"/>
+          </a:xfrm>
+          <a:prstGeom prst="rect">
+            <a:avLst/>
+          </a:prstGeom>
+          <a:noFill/>
+          <a:ln/>
+        </p:spPr>
+        <p:txBody>
+          <a:bodyPr wrap="square" lIns="0" tIns="0" rIns="0" bIns="0" rtlCol="0" anchor="ctr"/>
+          <a:lstStyle/>
+          <a:p>
+            <a:pPr algn="ctr" indent="0" marL="0">
+              <a:buNone/>
+            </a:pPr>
+            <a:r>
+              <a:rPr lang="en-US" sz="1400" b="1" dirty="0">
+                <a:solidFill>
+                  <a:srgbClr val="0D9488"/>
+                </a:solidFill>
+                <a:latin typeface="Trebuchet MS" pitchFamily="34" charset="0"/>
+                <a:ea typeface="Trebuchet MS" pitchFamily="34" charset="-122"/>
+                <a:cs typeface="Trebuchet MS" pitchFamily="34" charset="-120"/>
+              </a:rPr>
               <a:t>ing</a:t>
             </a:r>
             <a:endParaRPr lang="en-US" sz="1400" dirty="0"/>
@@ -15902,7 +16670,7 @@
       </p:sp>
       <p:sp>
         <p:nvSpPr>
-          <p:cNvPr id="30" name="Shape 28"/>
+          <p:cNvPr id="37" name="Shape 35"/>
           <p:cNvSpPr/>
           <p:nvPr/>
         </p:nvSpPr>
@@ -15929,7 +16697,7 @@
       </p:sp>
       <p:sp>
         <p:nvSpPr>
-          <p:cNvPr id="31" name="Text 29"/>
+          <p:cNvPr id="38" name="Text 36"/>
           <p:cNvSpPr/>
           <p:nvPr/>
         </p:nvSpPr>
@@ -15968,18 +16736,18 @@
       </p:sp>
       <p:sp>
         <p:nvSpPr>
-          <p:cNvPr id="32" name="Shape 30"/>
+          <p:cNvPr id="39" name="Shape 37"/>
           <p:cNvSpPr/>
           <p:nvPr/>
         </p:nvSpPr>
         <p:spPr>
           <a:xfrm>
             <a:off x="1874520" y="4096512"/>
-            <a:ext cx="6903720" cy="658368"/>
+            <a:ext cx="6903720" cy="804672"/>
           </a:xfrm>
           <a:prstGeom prst="rect">
             <a:avLst>
-              <a:gd name="adj" fmla="val 8333"/>
+              <a:gd name="adj" fmla="val 6818"/>
             </a:avLst>
           </a:prstGeom>
           <a:solidFill>
@@ -15995,18 +16763,18 @@
       </p:sp>
       <p:sp>
         <p:nvSpPr>
-          <p:cNvPr id="33" name="Shape 31"/>
-          <p:cNvSpPr/>
-          <p:nvPr/>
-        </p:nvSpPr>
-        <p:spPr>
-          <a:xfrm>
-            <a:off x="2254649" y="4169664"/>
-            <a:ext cx="685800" cy="475488"/>
+          <p:cNvPr id="40" name="Shape 38"/>
+          <p:cNvSpPr/>
+          <p:nvPr/>
+        </p:nvSpPr>
+        <p:spPr>
+          <a:xfrm>
+            <a:off x="2124837" y="4169664"/>
+            <a:ext cx="685800" cy="384048"/>
           </a:xfrm>
           <a:prstGeom prst="rect">
             <a:avLst>
-              <a:gd name="adj" fmla="val 7692"/>
+              <a:gd name="adj" fmla="val 9524"/>
             </a:avLst>
           </a:prstGeom>
           <a:solidFill>
@@ -16022,14 +16790,14 @@
       </p:sp>
       <p:sp>
         <p:nvSpPr>
-          <p:cNvPr id="34" name="Text 32"/>
-          <p:cNvSpPr/>
-          <p:nvPr/>
-        </p:nvSpPr>
-        <p:spPr>
-          <a:xfrm>
-            <a:off x="2254649" y="4169664"/>
-            <a:ext cx="685800" cy="475488"/>
+          <p:cNvPr id="41" name="Text 39"/>
+          <p:cNvSpPr/>
+          <p:nvPr/>
+        </p:nvSpPr>
+        <p:spPr>
+          <a:xfrm>
+            <a:off x="2124837" y="4169664"/>
+            <a:ext cx="685800" cy="384048"/>
           </a:xfrm>
           <a:prstGeom prst="rect">
             <a:avLst/>
@@ -16053,7 +16821,7 @@
                 <a:ea typeface="Trebuchet MS" pitchFamily="34" charset="-122"/>
                 <a:cs typeface="Trebuchet MS" pitchFamily="34" charset="-120"/>
               </a:rPr>
-              <a:t>r</a:t>
+              <a:t>e</a:t>
             </a:r>
             <a:endParaRPr lang="en-US" sz="900" dirty="0"/>
           </a:p>
@@ -16061,18 +16829,18 @@
       </p:sp>
       <p:sp>
         <p:nvSpPr>
-          <p:cNvPr id="35" name="Shape 33"/>
-          <p:cNvSpPr/>
-          <p:nvPr/>
-        </p:nvSpPr>
-        <p:spPr>
-          <a:xfrm>
-            <a:off x="3293146" y="4169664"/>
-            <a:ext cx="685800" cy="475488"/>
+          <p:cNvPr id="42" name="Shape 40"/>
+          <p:cNvSpPr/>
+          <p:nvPr/>
+        </p:nvSpPr>
+        <p:spPr>
+          <a:xfrm>
+            <a:off x="3033522" y="4169664"/>
+            <a:ext cx="685800" cy="384048"/>
           </a:xfrm>
           <a:prstGeom prst="rect">
             <a:avLst>
-              <a:gd name="adj" fmla="val 7692"/>
+              <a:gd name="adj" fmla="val 9524"/>
             </a:avLst>
           </a:prstGeom>
           <a:solidFill>
@@ -16088,14 +16856,14 @@
       </p:sp>
       <p:sp>
         <p:nvSpPr>
-          <p:cNvPr id="36" name="Text 34"/>
-          <p:cNvSpPr/>
-          <p:nvPr/>
-        </p:nvSpPr>
-        <p:spPr>
-          <a:xfrm>
-            <a:off x="3293146" y="4169664"/>
-            <a:ext cx="685800" cy="475488"/>
+          <p:cNvPr id="43" name="Text 41"/>
+          <p:cNvSpPr/>
+          <p:nvPr/>
+        </p:nvSpPr>
+        <p:spPr>
+          <a:xfrm>
+            <a:off x="3033522" y="4169664"/>
+            <a:ext cx="685800" cy="384048"/>
           </a:xfrm>
           <a:prstGeom prst="rect">
             <a:avLst/>
@@ -16119,7 +16887,7 @@
                 <a:ea typeface="Trebuchet MS" pitchFamily="34" charset="-122"/>
                 <a:cs typeface="Trebuchet MS" pitchFamily="34" charset="-120"/>
               </a:rPr>
-              <a:t>e</a:t>
+              <a:t>x</a:t>
             </a:r>
             <a:endParaRPr lang="en-US" sz="900" dirty="0"/>
           </a:p>
@@ -16127,18 +16895,57 @@
       </p:sp>
       <p:sp>
         <p:nvSpPr>
-          <p:cNvPr id="37" name="Shape 35"/>
-          <p:cNvSpPr/>
-          <p:nvPr/>
-        </p:nvSpPr>
-        <p:spPr>
-          <a:xfrm>
-            <a:off x="4331643" y="4169664"/>
-            <a:ext cx="685800" cy="475488"/>
+          <p:cNvPr id="44" name="Text 42"/>
+          <p:cNvSpPr/>
+          <p:nvPr/>
+        </p:nvSpPr>
+        <p:spPr>
+          <a:xfrm>
+            <a:off x="3033522" y="4572000"/>
+            <a:ext cx="685800" cy="219456"/>
+          </a:xfrm>
+          <a:prstGeom prst="rect">
+            <a:avLst/>
+          </a:prstGeom>
+          <a:noFill/>
+          <a:ln/>
+        </p:spPr>
+        <p:txBody>
+          <a:bodyPr wrap="square" lIns="0" tIns="0" rIns="0" bIns="0" rtlCol="0" anchor="t"/>
+          <a:lstStyle/>
+          <a:p>
+            <a:pPr algn="ctr" indent="0" marL="0">
+              <a:buNone/>
+            </a:pPr>
+            <a:r>
+              <a:rPr lang="en-US" sz="750" i="1" dirty="0">
+                <a:solidFill>
+                  <a:srgbClr val="94A3B8"/>
+                </a:solidFill>
+                <a:latin typeface="Calibri" pitchFamily="34" charset="0"/>
+                <a:ea typeface="Calibri" pitchFamily="34" charset="-122"/>
+                <a:cs typeface="Calibri" pitchFamily="34" charset="-120"/>
+              </a:rPr>
+              <a:t>/ks/</a:t>
+            </a:r>
+            <a:endParaRPr lang="en-US" sz="750" dirty="0"/>
+          </a:p>
+        </p:txBody>
+      </p:sp>
+      <p:sp>
+        <p:nvSpPr>
+          <p:cNvPr id="45" name="Shape 43"/>
+          <p:cNvSpPr/>
+          <p:nvPr/>
+        </p:nvSpPr>
+        <p:spPr>
+          <a:xfrm>
+            <a:off x="3942207" y="4169664"/>
+            <a:ext cx="685800" cy="384048"/>
           </a:xfrm>
           <a:prstGeom prst="rect">
             <a:avLst>
-              <a:gd name="adj" fmla="val 7692"/>
+              <a:gd name="adj" fmla="val 9524"/>
             </a:avLst>
           </a:prstGeom>
           <a:solidFill>
@@ -16154,14 +16961,14 @@
       </p:sp>
       <p:sp>
         <p:nvSpPr>
-          <p:cNvPr id="38" name="Text 36"/>
-          <p:cNvSpPr/>
-          <p:nvPr/>
-        </p:nvSpPr>
-        <p:spPr>
-          <a:xfrm>
-            <a:off x="4331643" y="4169664"/>
-            <a:ext cx="685800" cy="475488"/>
+          <p:cNvPr id="46" name="Text 44"/>
+          <p:cNvSpPr/>
+          <p:nvPr/>
+        </p:nvSpPr>
+        <p:spPr>
+          <a:xfrm>
+            <a:off x="3942207" y="4169664"/>
+            <a:ext cx="685800" cy="384048"/>
           </a:xfrm>
           <a:prstGeom prst="rect">
             <a:avLst/>
@@ -16185,7 +16992,7 @@
                 <a:ea typeface="Trebuchet MS" pitchFamily="34" charset="-122"/>
                 <a:cs typeface="Trebuchet MS" pitchFamily="34" charset="-120"/>
               </a:rPr>
-              <a:t>s</a:t>
+              <a:t>p</a:t>
             </a:r>
             <a:endParaRPr lang="en-US" sz="900" dirty="0"/>
           </a:p>
@@ -16193,18 +17000,18 @@
       </p:sp>
       <p:sp>
         <p:nvSpPr>
-          <p:cNvPr id="39" name="Shape 37"/>
-          <p:cNvSpPr/>
-          <p:nvPr/>
-        </p:nvSpPr>
-        <p:spPr>
-          <a:xfrm>
-            <a:off x="5370141" y="4169664"/>
-            <a:ext cx="685800" cy="475488"/>
+          <p:cNvPr id="47" name="Shape 45"/>
+          <p:cNvSpPr/>
+          <p:nvPr/>
+        </p:nvSpPr>
+        <p:spPr>
+          <a:xfrm>
+            <a:off x="4850892" y="4169664"/>
+            <a:ext cx="685800" cy="384048"/>
           </a:xfrm>
           <a:prstGeom prst="rect">
             <a:avLst>
-              <a:gd name="adj" fmla="val 7692"/>
+              <a:gd name="adj" fmla="val 9524"/>
             </a:avLst>
           </a:prstGeom>
           <a:solidFill>
@@ -16220,14 +17027,14 @@
       </p:sp>
       <p:sp>
         <p:nvSpPr>
-          <p:cNvPr id="40" name="Text 38"/>
-          <p:cNvSpPr/>
-          <p:nvPr/>
-        </p:nvSpPr>
-        <p:spPr>
-          <a:xfrm>
-            <a:off x="5370141" y="4169664"/>
-            <a:ext cx="685800" cy="475488"/>
+          <p:cNvPr id="48" name="Text 46"/>
+          <p:cNvSpPr/>
+          <p:nvPr/>
+        </p:nvSpPr>
+        <p:spPr>
+          <a:xfrm>
+            <a:off x="4850892" y="4169664"/>
+            <a:ext cx="685800" cy="384048"/>
           </a:xfrm>
           <a:prstGeom prst="rect">
             <a:avLst/>
@@ -16251,7 +17058,7 @@
                 <a:ea typeface="Trebuchet MS" pitchFamily="34" charset="-122"/>
                 <a:cs typeface="Trebuchet MS" pitchFamily="34" charset="-120"/>
               </a:rPr>
-              <a:t>t</a:t>
+              <a:t>l</a:t>
             </a:r>
             <a:endParaRPr lang="en-US" sz="900" dirty="0"/>
           </a:p>
@@ -16259,18 +17066,18 @@
       </p:sp>
       <p:sp>
         <p:nvSpPr>
-          <p:cNvPr id="41" name="Shape 39"/>
-          <p:cNvSpPr/>
-          <p:nvPr/>
-        </p:nvSpPr>
-        <p:spPr>
-          <a:xfrm>
-            <a:off x="6408638" y="4169664"/>
-            <a:ext cx="685800" cy="475488"/>
+          <p:cNvPr id="49" name="Shape 47"/>
+          <p:cNvSpPr/>
+          <p:nvPr/>
+        </p:nvSpPr>
+        <p:spPr>
+          <a:xfrm>
+            <a:off x="5759577" y="4169664"/>
+            <a:ext cx="685800" cy="384048"/>
           </a:xfrm>
           <a:prstGeom prst="rect">
             <a:avLst>
-              <a:gd name="adj" fmla="val 7692"/>
+              <a:gd name="adj" fmla="val 9524"/>
             </a:avLst>
           </a:prstGeom>
           <a:solidFill>
@@ -16286,14 +17093,14 @@
       </p:sp>
       <p:sp>
         <p:nvSpPr>
-          <p:cNvPr id="42" name="Text 40"/>
-          <p:cNvSpPr/>
-          <p:nvPr/>
-        </p:nvSpPr>
-        <p:spPr>
-          <a:xfrm>
-            <a:off x="6408638" y="4169664"/>
-            <a:ext cx="685800" cy="475488"/>
+          <p:cNvPr id="50" name="Text 48"/>
+          <p:cNvSpPr/>
+          <p:nvPr/>
+        </p:nvSpPr>
+        <p:spPr>
+          <a:xfrm>
+            <a:off x="5759577" y="4169664"/>
+            <a:ext cx="685800" cy="384048"/>
           </a:xfrm>
           <a:prstGeom prst="rect">
             <a:avLst/>
@@ -16317,6 +17124,72 @@
                 <a:ea typeface="Trebuchet MS" pitchFamily="34" charset="-122"/>
                 <a:cs typeface="Trebuchet MS" pitchFamily="34" charset="-120"/>
               </a:rPr>
+              <a:t>or</a:t>
+            </a:r>
+            <a:endParaRPr lang="en-US" sz="900" dirty="0"/>
+          </a:p>
+        </p:txBody>
+      </p:sp>
+      <p:sp>
+        <p:nvSpPr>
+          <p:cNvPr id="51" name="Shape 49"/>
+          <p:cNvSpPr/>
+          <p:nvPr/>
+        </p:nvSpPr>
+        <p:spPr>
+          <a:xfrm>
+            <a:off x="6668262" y="4169664"/>
+            <a:ext cx="685800" cy="384048"/>
+          </a:xfrm>
+          <a:prstGeom prst="rect">
+            <a:avLst>
+              <a:gd name="adj" fmla="val 9524"/>
+            </a:avLst>
+          </a:prstGeom>
+          <a:solidFill>
+            <a:srgbClr val="FFFFFF"/>
+          </a:solidFill>
+          <a:ln w="12700">
+            <a:solidFill>
+              <a:srgbClr val="DB2777"/>
+            </a:solidFill>
+            <a:prstDash val="solid"/>
+          </a:ln>
+        </p:spPr>
+      </p:sp>
+      <p:sp>
+        <p:nvSpPr>
+          <p:cNvPr id="52" name="Text 50"/>
+          <p:cNvSpPr/>
+          <p:nvPr/>
+        </p:nvSpPr>
+        <p:spPr>
+          <a:xfrm>
+            <a:off x="6668262" y="4169664"/>
+            <a:ext cx="685800" cy="384048"/>
+          </a:xfrm>
+          <a:prstGeom prst="rect">
+            <a:avLst/>
+          </a:prstGeom>
+          <a:noFill/>
+          <a:ln/>
+        </p:spPr>
+        <p:txBody>
+          <a:bodyPr wrap="square" lIns="0" tIns="0" rIns="0" bIns="0" rtlCol="0" anchor="ctr"/>
+          <a:lstStyle/>
+          <a:p>
+            <a:pPr algn="ctr" indent="0" marL="0">
+              <a:buNone/>
+            </a:pPr>
+            <a:r>
+              <a:rPr lang="en-US" sz="900" b="1" dirty="0">
+                <a:solidFill>
+                  <a:srgbClr val="9D174D"/>
+                </a:solidFill>
+                <a:latin typeface="Trebuchet MS" pitchFamily="34" charset="0"/>
+                <a:ea typeface="Trebuchet MS" pitchFamily="34" charset="-122"/>
+                <a:cs typeface="Trebuchet MS" pitchFamily="34" charset="-120"/>
+              </a:rPr>
               <a:t>i</a:t>
             </a:r>
             <a:endParaRPr lang="en-US" sz="900" dirty="0"/>
@@ -16325,18 +17198,18 @@
       </p:sp>
       <p:sp>
         <p:nvSpPr>
-          <p:cNvPr id="43" name="Shape 41"/>
-          <p:cNvSpPr/>
-          <p:nvPr/>
-        </p:nvSpPr>
-        <p:spPr>
-          <a:xfrm>
-            <a:off x="7447135" y="4169664"/>
-            <a:ext cx="685800" cy="475488"/>
+          <p:cNvPr id="53" name="Shape 51"/>
+          <p:cNvSpPr/>
+          <p:nvPr/>
+        </p:nvSpPr>
+        <p:spPr>
+          <a:xfrm>
+            <a:off x="7576947" y="4169664"/>
+            <a:ext cx="685800" cy="384048"/>
           </a:xfrm>
           <a:prstGeom prst="rect">
             <a:avLst>
-              <a:gd name="adj" fmla="val 7692"/>
+              <a:gd name="adj" fmla="val 9524"/>
             </a:avLst>
           </a:prstGeom>
           <a:solidFill>
@@ -16352,14 +17225,14 @@
       </p:sp>
       <p:sp>
         <p:nvSpPr>
-          <p:cNvPr id="44" name="Text 42"/>
-          <p:cNvSpPr/>
-          <p:nvPr/>
-        </p:nvSpPr>
-        <p:spPr>
-          <a:xfrm>
-            <a:off x="7447135" y="4169664"/>
-            <a:ext cx="685800" cy="475488"/>
+          <p:cNvPr id="54" name="Text 52"/>
+          <p:cNvSpPr/>
+          <p:nvPr/>
+        </p:nvSpPr>
+        <p:spPr>
+          <a:xfrm>
+            <a:off x="7576947" y="4169664"/>
+            <a:ext cx="685800" cy="384048"/>
           </a:xfrm>
           <a:prstGeom prst="rect">
             <a:avLst/>
@@ -17726,7 +18599,7 @@
                 <a:ea typeface="Calibri" pitchFamily="34" charset="-122"/>
                 <a:cs typeface="Calibri" pitchFamily="34" charset="-120"/>
               </a:rPr>
-              <a:t>rereading</a:t>
+              <a:t>overflowing</a:t>
             </a:r>
             <a:pPr algn="l" indent="0" marL="0">
               <a:buNone/>
@@ -17740,7 +18613,7 @@
                 <a:ea typeface="Calibri" pitchFamily="34" charset="-122"/>
                 <a:cs typeface="Calibri" pitchFamily="34" charset="-120"/>
               </a:rPr>
-              <a:t> the instructions, </a:t>
+              <a:t> with excitement, </a:t>
             </a:r>
             <a:pPr algn="l" indent="0" marL="0">
               <a:buNone/>
@@ -17757,7 +18630,7 @@
                 <a:ea typeface="Calibri" pitchFamily="34" charset="-122"/>
                 <a:cs typeface="Calibri" pitchFamily="34" charset="-120"/>
               </a:rPr>
-              <a:t>underlining</a:t>
+              <a:t>rethinking</a:t>
             </a:r>
             <a:pPr algn="l" indent="0" marL="0">
               <a:buNone/>
@@ -17771,7 +18644,7 @@
                 <a:ea typeface="Calibri" pitchFamily="34" charset="-122"/>
                 <a:cs typeface="Calibri" pitchFamily="34" charset="-120"/>
               </a:rPr>
-              <a:t> key words, and </a:t>
+              <a:t> her plan and </a:t>
             </a:r>
             <a:pPr algn="l" indent="0" marL="0">
               <a:buNone/>
@@ -17788,7 +18661,7 @@
                 <a:ea typeface="Calibri" pitchFamily="34" charset="-122"/>
                 <a:cs typeface="Calibri" pitchFamily="34" charset="-120"/>
               </a:rPr>
-              <a:t>rethinking</a:t>
+              <a:t>rebuilding</a:t>
             </a:r>
             <a:pPr algn="l" indent="0" marL="0">
               <a:buNone/>
@@ -17802,7 +18675,7 @@
                 <a:ea typeface="Calibri" pitchFamily="34" charset="-122"/>
                 <a:cs typeface="Calibri" pitchFamily="34" charset="-120"/>
               </a:rPr>
-              <a:t> her answer.</a:t>
+              <a:t> her project from scratch.</a:t>
             </a:r>
             <a:endParaRPr lang="en-US" sz="1800" dirty="0"/>
           </a:p>
@@ -17957,7 +18830,7 @@
                 <a:ea typeface="Trebuchet MS" pitchFamily="34" charset="-122"/>
                 <a:cs typeface="Trebuchet MS" pitchFamily="34" charset="-120"/>
               </a:rPr>
-              <a:t>rereading</a:t>
+              <a:t>overflowing</a:t>
             </a:r>
             <a:endParaRPr lang="en-US" sz="1400" dirty="0"/>
           </a:p>
@@ -18085,7 +18958,7 @@
                 <a:ea typeface="Trebuchet MS" pitchFamily="34" charset="-122"/>
                 <a:cs typeface="Trebuchet MS" pitchFamily="34" charset="-120"/>
               </a:rPr>
-              <a:t>underlining</a:t>
+              <a:t>rethinking</a:t>
             </a:r>
             <a:endParaRPr lang="en-US" sz="1400" dirty="0"/>
           </a:p>
@@ -18213,7 +19086,7 @@
                 <a:ea typeface="Trebuchet MS" pitchFamily="34" charset="-122"/>
                 <a:cs typeface="Trebuchet MS" pitchFamily="34" charset="-120"/>
               </a:rPr>
-              <a:t>rethinking</a:t>
+              <a:t>rebuilding</a:t>
             </a:r>
             <a:endParaRPr lang="en-US" sz="1400" dirty="0"/>
           </a:p>
@@ -18683,7 +19556,7 @@
                 <a:ea typeface="Trebuchet MS" pitchFamily="34" charset="-122"/>
                 <a:cs typeface="Trebuchet MS" pitchFamily="34" charset="-120"/>
               </a:rPr>
-              <a:t>rereading</a:t>
+              <a:t>overflowing</a:t>
             </a:r>
             <a:endParaRPr lang="en-US" sz="2800" dirty="0"/>
           </a:p>
@@ -19510,7 +20383,7 @@
                 <a:ea typeface="Trebuchet MS" pitchFamily="34" charset="-122"/>
                 <a:cs typeface="Trebuchet MS" pitchFamily="34" charset="-120"/>
               </a:rPr>
-              <a:t>rereading</a:t>
+              <a:t>overflowing</a:t>
             </a:r>
             <a:endParaRPr lang="en-US" sz="2800" dirty="0"/>
           </a:p>
@@ -19649,7 +20522,7 @@
                 <a:ea typeface="Trebuchet MS" pitchFamily="34" charset="-122"/>
                 <a:cs typeface="Trebuchet MS" pitchFamily="34" charset="-120"/>
               </a:rPr>
-              <a:t>re</a:t>
+              <a:t>over</a:t>
             </a:r>
             <a:endParaRPr lang="en-US" sz="1300" dirty="0"/>
           </a:p>
@@ -19688,7 +20561,7 @@
                 <a:ea typeface="Calibri" pitchFamily="34" charset="-122"/>
                 <a:cs typeface="Calibri" pitchFamily="34" charset="-120"/>
               </a:rPr>
-              <a:t>again</a:t>
+              <a:t>too much, above</a:t>
             </a:r>
             <a:endParaRPr lang="en-US" sz="850" dirty="0"/>
           </a:p>
@@ -19761,7 +20634,7 @@
                 <a:ea typeface="Trebuchet MS" pitchFamily="34" charset="-122"/>
                 <a:cs typeface="Trebuchet MS" pitchFamily="34" charset="-120"/>
               </a:rPr>
-              <a:t>read</a:t>
+              <a:t>flow</a:t>
             </a:r>
             <a:endParaRPr lang="en-US" sz="1300" dirty="0"/>
           </a:p>
@@ -19800,7 +20673,7 @@
                 <a:ea typeface="Calibri" pitchFamily="34" charset="-122"/>
                 <a:cs typeface="Calibri" pitchFamily="34" charset="-120"/>
               </a:rPr>
-              <a:t>to look at and understand words</a:t>
+              <a:t>to move steadily like liquid</a:t>
             </a:r>
             <a:endParaRPr lang="en-US" sz="850" dirty="0"/>
           </a:p>
@@ -19912,7 +20785,7 @@
                 <a:ea typeface="Calibri" pitchFamily="34" charset="-122"/>
                 <a:cs typeface="Calibri" pitchFamily="34" charset="-120"/>
               </a:rPr>
-              <a:t>ongoing action</a:t>
+              <a:t>action in progress</a:t>
             </a:r>
             <a:endParaRPr lang="en-US" sz="850" dirty="0"/>
           </a:p>
@@ -19920,57 +20793,150 @@
       </p:sp>
       <p:sp>
         <p:nvSpPr>
-          <p:cNvPr id="25" name="Text 23"/>
-          <p:cNvSpPr/>
-          <p:nvPr/>
-        </p:nvSpPr>
-        <p:spPr>
-          <a:xfrm>
-            <a:off x="6519672" y="2752344"/>
-            <a:ext cx="1828800" cy="182880"/>
-          </a:xfrm>
-          <a:prstGeom prst="rect">
-            <a:avLst/>
-          </a:prstGeom>
-          <a:noFill/>
-          <a:ln/>
-        </p:spPr>
-        <p:txBody>
-          <a:bodyPr wrap="square" lIns="0" tIns="0" rIns="0" bIns="0" rtlCol="0" anchor="t"/>
-          <a:lstStyle/>
-          <a:p>
-            <a:pPr algn="ctr" indent="0" marL="0">
-              <a:buNone/>
-            </a:pPr>
-            <a:r>
-              <a:rPr lang="en-US" sz="700" i="1" dirty="0">
-                <a:solidFill>
-                  <a:srgbClr val="94A3B8"/>
+          <p:cNvPr id="25" name="Shape 23"/>
+          <p:cNvSpPr/>
+          <p:nvPr/>
+        </p:nvSpPr>
+        <p:spPr>
+          <a:xfrm>
+            <a:off x="365760" y="3273552"/>
+            <a:ext cx="1371600" cy="658368"/>
+          </a:xfrm>
+          <a:prstGeom prst="rect">
+            <a:avLst>
+              <a:gd name="adj" fmla="val 8333"/>
+            </a:avLst>
+          </a:prstGeom>
+          <a:solidFill>
+            <a:srgbClr val="E2E8F0"/>
+          </a:solidFill>
+          <a:ln w="12700">
+            <a:solidFill>
+              <a:srgbClr val="E2E8F0"/>
+            </a:solidFill>
+            <a:prstDash val="solid"/>
+          </a:ln>
+        </p:spPr>
+      </p:sp>
+      <p:sp>
+        <p:nvSpPr>
+          <p:cNvPr id="26" name="Text 24"/>
+          <p:cNvSpPr/>
+          <p:nvPr/>
+        </p:nvSpPr>
+        <p:spPr>
+          <a:xfrm>
+            <a:off x="365760" y="3273552"/>
+            <a:ext cx="1371600" cy="658368"/>
+          </a:xfrm>
+          <a:prstGeom prst="rect">
+            <a:avLst/>
+          </a:prstGeom>
+          <a:noFill/>
+          <a:ln/>
+        </p:spPr>
+        <p:txBody>
+          <a:bodyPr wrap="square" lIns="0" tIns="0" rIns="0" bIns="0" rtlCol="0" anchor="ctr"/>
+          <a:lstStyle/>
+          <a:p>
+            <a:pPr algn="ctr" indent="0" marL="0">
+              <a:buNone/>
+            </a:pPr>
+            <a:r>
+              <a:rPr lang="en-US" sz="1100" b="1" dirty="0">
+                <a:solidFill>
+                  <a:srgbClr val="475569"/>
+                </a:solidFill>
+                <a:latin typeface="Trebuchet MS" pitchFamily="34" charset="0"/>
+                <a:ea typeface="Trebuchet MS" pitchFamily="34" charset="-122"/>
+                <a:cs typeface="Trebuchet MS" pitchFamily="34" charset="-120"/>
+              </a:rPr>
+              <a:t>Syllables</a:t>
+            </a:r>
+            <a:endParaRPr lang="en-US" sz="1100" dirty="0"/>
+          </a:p>
+        </p:txBody>
+      </p:sp>
+      <p:sp>
+        <p:nvSpPr>
+          <p:cNvPr id="27" name="Shape 25"/>
+          <p:cNvSpPr/>
+          <p:nvPr/>
+        </p:nvSpPr>
+        <p:spPr>
+          <a:xfrm>
+            <a:off x="1874520" y="3273552"/>
+            <a:ext cx="6903720" cy="658368"/>
+          </a:xfrm>
+          <a:prstGeom prst="rect">
+            <a:avLst>
+              <a:gd name="adj" fmla="val 8333"/>
+            </a:avLst>
+          </a:prstGeom>
+          <a:solidFill>
+            <a:srgbClr val="F8FAFC"/>
+          </a:solidFill>
+          <a:ln w="12700">
+            <a:solidFill>
+              <a:srgbClr val="E2E8F0"/>
+            </a:solidFill>
+            <a:prstDash val="dash"/>
+          </a:ln>
+        </p:spPr>
+      </p:sp>
+      <p:sp>
+        <p:nvSpPr>
+          <p:cNvPr id="28" name="Text 26"/>
+          <p:cNvSpPr/>
+          <p:nvPr/>
+        </p:nvSpPr>
+        <p:spPr>
+          <a:xfrm>
+            <a:off x="1874520" y="3273552"/>
+            <a:ext cx="6903720" cy="658368"/>
+          </a:xfrm>
+          <a:prstGeom prst="rect">
+            <a:avLst/>
+          </a:prstGeom>
+          <a:noFill/>
+          <a:ln/>
+        </p:spPr>
+        <p:txBody>
+          <a:bodyPr wrap="square" rtlCol="0" anchor="ctr"/>
+          <a:lstStyle/>
+          <a:p>
+            <a:pPr algn="ctr" indent="0" marL="0">
+              <a:buNone/>
+            </a:pPr>
+            <a:r>
+              <a:rPr lang="en-US" sz="1100" i="1" dirty="0">
+                <a:solidFill>
+                  <a:srgbClr val="CBD5E1"/>
                 </a:solidFill>
                 <a:latin typeface="Calibri" pitchFamily="34" charset="0"/>
                 <a:ea typeface="Calibri" pitchFamily="34" charset="-122"/>
                 <a:cs typeface="Calibri" pitchFamily="34" charset="-120"/>
               </a:rPr>
-              <a:t>'e' dropped before vowel suffix</a:t>
-            </a:r>
-            <a:endParaRPr lang="en-US" sz="700" dirty="0"/>
-          </a:p>
-        </p:txBody>
-      </p:sp>
-      <p:sp>
-        <p:nvSpPr>
-          <p:cNvPr id="26" name="Shape 24"/>
-          <p:cNvSpPr/>
-          <p:nvPr/>
-        </p:nvSpPr>
-        <p:spPr>
-          <a:xfrm>
-            <a:off x="365760" y="3273552"/>
-            <a:ext cx="1371600" cy="658368"/>
+              <a:t>Write here...</a:t>
+            </a:r>
+            <a:endParaRPr lang="en-US" sz="1100" dirty="0"/>
+          </a:p>
+        </p:txBody>
+      </p:sp>
+      <p:sp>
+        <p:nvSpPr>
+          <p:cNvPr id="29" name="Shape 27"/>
+          <p:cNvSpPr/>
+          <p:nvPr/>
+        </p:nvSpPr>
+        <p:spPr>
+          <a:xfrm>
+            <a:off x="365760" y="4096512"/>
+            <a:ext cx="1371600" cy="804672"/>
           </a:xfrm>
           <a:prstGeom prst="rect">
             <a:avLst>
-              <a:gd name="adj" fmla="val 8333"/>
+              <a:gd name="adj" fmla="val 6818"/>
             </a:avLst>
           </a:prstGeom>
           <a:solidFill>
@@ -19986,14 +20952,14 @@
       </p:sp>
       <p:sp>
         <p:nvSpPr>
-          <p:cNvPr id="27" name="Text 25"/>
-          <p:cNvSpPr/>
-          <p:nvPr/>
-        </p:nvSpPr>
-        <p:spPr>
-          <a:xfrm>
-            <a:off x="365760" y="3273552"/>
-            <a:ext cx="1371600" cy="658368"/>
+          <p:cNvPr id="30" name="Text 28"/>
+          <p:cNvSpPr/>
+          <p:nvPr/>
+        </p:nvSpPr>
+        <p:spPr>
+          <a:xfrm>
+            <a:off x="365760" y="4096512"/>
+            <a:ext cx="1371600" cy="804672"/>
           </a:xfrm>
           <a:prstGeom prst="rect">
             <a:avLst/>
@@ -20017,7 +20983,7 @@
                 <a:ea typeface="Trebuchet MS" pitchFamily="34" charset="-122"/>
                 <a:cs typeface="Trebuchet MS" pitchFamily="34" charset="-120"/>
               </a:rPr>
-              <a:t>Syllables</a:t>
+              <a:t>Phonemes</a:t>
             </a:r>
             <a:endParaRPr lang="en-US" sz="1100" dirty="0"/>
           </a:p>
@@ -20025,80 +20991,14 @@
       </p:sp>
       <p:sp>
         <p:nvSpPr>
-          <p:cNvPr id="28" name="Shape 26"/>
-          <p:cNvSpPr/>
-          <p:nvPr/>
-        </p:nvSpPr>
-        <p:spPr>
-          <a:xfrm>
-            <a:off x="1874520" y="3273552"/>
-            <a:ext cx="6903720" cy="658368"/>
-          </a:xfrm>
-          <a:prstGeom prst="rect">
-            <a:avLst>
-              <a:gd name="adj" fmla="val 8333"/>
-            </a:avLst>
-          </a:prstGeom>
-          <a:solidFill>
-            <a:srgbClr val="F8FAFC"/>
-          </a:solidFill>
-          <a:ln w="12700">
-            <a:solidFill>
-              <a:srgbClr val="E2E8F0"/>
-            </a:solidFill>
-            <a:prstDash val="dash"/>
-          </a:ln>
-        </p:spPr>
-      </p:sp>
-      <p:sp>
-        <p:nvSpPr>
-          <p:cNvPr id="29" name="Text 27"/>
-          <p:cNvSpPr/>
-          <p:nvPr/>
-        </p:nvSpPr>
-        <p:spPr>
-          <a:xfrm>
-            <a:off x="1874520" y="3273552"/>
-            <a:ext cx="6903720" cy="658368"/>
-          </a:xfrm>
-          <a:prstGeom prst="rect">
-            <a:avLst/>
-          </a:prstGeom>
-          <a:noFill/>
-          <a:ln/>
-        </p:spPr>
-        <p:txBody>
-          <a:bodyPr wrap="square" rtlCol="0" anchor="ctr"/>
-          <a:lstStyle/>
-          <a:p>
-            <a:pPr algn="ctr" indent="0" marL="0">
-              <a:buNone/>
-            </a:pPr>
-            <a:r>
-              <a:rPr lang="en-US" sz="1100" i="1" dirty="0">
-                <a:solidFill>
-                  <a:srgbClr val="CBD5E1"/>
-                </a:solidFill>
-                <a:latin typeface="Calibri" pitchFamily="34" charset="0"/>
-                <a:ea typeface="Calibri" pitchFamily="34" charset="-122"/>
-                <a:cs typeface="Calibri" pitchFamily="34" charset="-120"/>
-              </a:rPr>
-              <a:t>Write here...</a:t>
-            </a:r>
-            <a:endParaRPr lang="en-US" sz="1100" dirty="0"/>
-          </a:p>
-        </p:txBody>
-      </p:sp>
-      <p:sp>
-        <p:nvSpPr>
-          <p:cNvPr id="30" name="Shape 28"/>
-          <p:cNvSpPr/>
-          <p:nvPr/>
-        </p:nvSpPr>
-        <p:spPr>
-          <a:xfrm>
-            <a:off x="365760" y="4096512"/>
-            <a:ext cx="1371600" cy="804672"/>
+          <p:cNvPr id="31" name="Shape 29"/>
+          <p:cNvSpPr/>
+          <p:nvPr/>
+        </p:nvSpPr>
+        <p:spPr>
+          <a:xfrm>
+            <a:off x="1874520" y="4096512"/>
+            <a:ext cx="6903720" cy="804672"/>
           </a:xfrm>
           <a:prstGeom prst="rect">
             <a:avLst>
@@ -20106,85 +21006,19 @@
             </a:avLst>
           </a:prstGeom>
           <a:solidFill>
-            <a:srgbClr val="E2E8F0"/>
+            <a:srgbClr val="F8FAFC"/>
           </a:solidFill>
           <a:ln w="12700">
             <a:solidFill>
               <a:srgbClr val="E2E8F0"/>
             </a:solidFill>
-            <a:prstDash val="solid"/>
-          </a:ln>
-        </p:spPr>
-      </p:sp>
-      <p:sp>
-        <p:nvSpPr>
-          <p:cNvPr id="31" name="Text 29"/>
-          <p:cNvSpPr/>
-          <p:nvPr/>
-        </p:nvSpPr>
-        <p:spPr>
-          <a:xfrm>
-            <a:off x="365760" y="4096512"/>
-            <a:ext cx="1371600" cy="804672"/>
-          </a:xfrm>
-          <a:prstGeom prst="rect">
-            <a:avLst/>
-          </a:prstGeom>
-          <a:noFill/>
-          <a:ln/>
-        </p:spPr>
-        <p:txBody>
-          <a:bodyPr wrap="square" lIns="0" tIns="0" rIns="0" bIns="0" rtlCol="0" anchor="ctr"/>
-          <a:lstStyle/>
-          <a:p>
-            <a:pPr algn="ctr" indent="0" marL="0">
-              <a:buNone/>
-            </a:pPr>
-            <a:r>
-              <a:rPr lang="en-US" sz="1100" b="1" dirty="0">
-                <a:solidFill>
-                  <a:srgbClr val="475569"/>
-                </a:solidFill>
-                <a:latin typeface="Trebuchet MS" pitchFamily="34" charset="0"/>
-                <a:ea typeface="Trebuchet MS" pitchFamily="34" charset="-122"/>
-                <a:cs typeface="Trebuchet MS" pitchFamily="34" charset="-120"/>
-              </a:rPr>
-              <a:t>Phonemes</a:t>
-            </a:r>
-            <a:endParaRPr lang="en-US" sz="1100" dirty="0"/>
-          </a:p>
-        </p:txBody>
-      </p:sp>
-      <p:sp>
-        <p:nvSpPr>
-          <p:cNvPr id="32" name="Shape 30"/>
-          <p:cNvSpPr/>
-          <p:nvPr/>
-        </p:nvSpPr>
-        <p:spPr>
-          <a:xfrm>
-            <a:off x="1874520" y="4096512"/>
-            <a:ext cx="6903720" cy="804672"/>
-          </a:xfrm>
-          <a:prstGeom prst="rect">
-            <a:avLst>
-              <a:gd name="adj" fmla="val 6818"/>
-            </a:avLst>
-          </a:prstGeom>
-          <a:solidFill>
-            <a:srgbClr val="F8FAFC"/>
-          </a:solidFill>
-          <a:ln w="12700">
-            <a:solidFill>
-              <a:srgbClr val="E2E8F0"/>
-            </a:solidFill>
             <a:prstDash val="dash"/>
           </a:ln>
         </p:spPr>
       </p:sp>
       <p:sp>
         <p:nvSpPr>
-          <p:cNvPr id="33" name="Text 31"/>
+          <p:cNvPr id="32" name="Text 30"/>
           <p:cNvSpPr/>
           <p:nvPr/>
         </p:nvSpPr>
@@ -20646,7 +21480,7 @@
                 <a:ea typeface="Trebuchet MS" pitchFamily="34" charset="-122"/>
                 <a:cs typeface="Trebuchet MS" pitchFamily="34" charset="-120"/>
               </a:rPr>
-              <a:t>rereading</a:t>
+              <a:t>overflowing</a:t>
             </a:r>
             <a:endParaRPr lang="en-US" sz="2800" dirty="0"/>
           </a:p>
@@ -20785,7 +21619,7 @@
                 <a:ea typeface="Trebuchet MS" pitchFamily="34" charset="-122"/>
                 <a:cs typeface="Trebuchet MS" pitchFamily="34" charset="-120"/>
               </a:rPr>
-              <a:t>re</a:t>
+              <a:t>over</a:t>
             </a:r>
             <a:endParaRPr lang="en-US" sz="1300" dirty="0"/>
           </a:p>
@@ -20824,7 +21658,7 @@
                 <a:ea typeface="Calibri" pitchFamily="34" charset="-122"/>
                 <a:cs typeface="Calibri" pitchFamily="34" charset="-120"/>
               </a:rPr>
-              <a:t>again</a:t>
+              <a:t>too much, above</a:t>
             </a:r>
             <a:endParaRPr lang="en-US" sz="850" dirty="0"/>
           </a:p>
@@ -20897,7 +21731,7 @@
                 <a:ea typeface="Trebuchet MS" pitchFamily="34" charset="-122"/>
                 <a:cs typeface="Trebuchet MS" pitchFamily="34" charset="-120"/>
               </a:rPr>
-              <a:t>read</a:t>
+              <a:t>flow</a:t>
             </a:r>
             <a:endParaRPr lang="en-US" sz="1300" dirty="0"/>
           </a:p>
@@ -20936,7 +21770,7 @@
                 <a:ea typeface="Calibri" pitchFamily="34" charset="-122"/>
                 <a:cs typeface="Calibri" pitchFamily="34" charset="-120"/>
               </a:rPr>
-              <a:t>to look at and understand words</a:t>
+              <a:t>to move steadily like liquid</a:t>
             </a:r>
             <a:endParaRPr lang="en-US" sz="850" dirty="0"/>
           </a:p>
@@ -21048,7 +21882,7 @@
                 <a:ea typeface="Calibri" pitchFamily="34" charset="-122"/>
                 <a:cs typeface="Calibri" pitchFamily="34" charset="-120"/>
               </a:rPr>
-              <a:t>ongoing action</a:t>
+              <a:t>action in progress</a:t>
             </a:r>
             <a:endParaRPr lang="en-US" sz="850" dirty="0"/>
           </a:p>
@@ -21056,46 +21890,7 @@
       </p:sp>
       <p:sp>
         <p:nvSpPr>
-          <p:cNvPr id="25" name="Text 23"/>
-          <p:cNvSpPr/>
-          <p:nvPr/>
-        </p:nvSpPr>
-        <p:spPr>
-          <a:xfrm>
-            <a:off x="6519672" y="2752344"/>
-            <a:ext cx="1828800" cy="182880"/>
-          </a:xfrm>
-          <a:prstGeom prst="rect">
-            <a:avLst/>
-          </a:prstGeom>
-          <a:noFill/>
-          <a:ln/>
-        </p:spPr>
-        <p:txBody>
-          <a:bodyPr wrap="square" lIns="0" tIns="0" rIns="0" bIns="0" rtlCol="0" anchor="t"/>
-          <a:lstStyle/>
-          <a:p>
-            <a:pPr algn="ctr" indent="0" marL="0">
-              <a:buNone/>
-            </a:pPr>
-            <a:r>
-              <a:rPr lang="en-US" sz="700" i="1" dirty="0">
-                <a:solidFill>
-                  <a:srgbClr val="94A3B8"/>
-                </a:solidFill>
-                <a:latin typeface="Calibri" pitchFamily="34" charset="0"/>
-                <a:ea typeface="Calibri" pitchFamily="34" charset="-122"/>
-                <a:cs typeface="Calibri" pitchFamily="34" charset="-120"/>
-              </a:rPr>
-              <a:t>'e' dropped before vowel suffix</a:t>
-            </a:r>
-            <a:endParaRPr lang="en-US" sz="700" dirty="0"/>
-          </a:p>
-        </p:txBody>
-      </p:sp>
-      <p:sp>
-        <p:nvSpPr>
-          <p:cNvPr id="26" name="Shape 24"/>
+          <p:cNvPr id="25" name="Shape 23"/>
           <p:cNvSpPr/>
           <p:nvPr/>
         </p:nvSpPr>
@@ -21122,7 +21917,7 @@
       </p:sp>
       <p:sp>
         <p:nvSpPr>
-          <p:cNvPr id="27" name="Text 25"/>
+          <p:cNvPr id="26" name="Text 24"/>
           <p:cNvSpPr/>
           <p:nvPr/>
         </p:nvSpPr>
@@ -21161,7 +21956,7 @@
       </p:sp>
       <p:sp>
         <p:nvSpPr>
-          <p:cNvPr id="28" name="Shape 26"/>
+          <p:cNvPr id="27" name="Shape 25"/>
           <p:cNvSpPr/>
           <p:nvPr/>
         </p:nvSpPr>
@@ -21188,14 +21983,14 @@
       </p:sp>
       <p:sp>
         <p:nvSpPr>
-          <p:cNvPr id="29" name="Shape 27"/>
-          <p:cNvSpPr/>
-          <p:nvPr/>
-        </p:nvSpPr>
-        <p:spPr>
-          <a:xfrm>
-            <a:off x="2313432" y="3364992"/>
-            <a:ext cx="1645920" cy="475488"/>
+          <p:cNvPr id="28" name="Shape 26"/>
+          <p:cNvSpPr/>
+          <p:nvPr/>
+        </p:nvSpPr>
+        <p:spPr>
+          <a:xfrm>
+            <a:off x="1975104" y="3364992"/>
+            <a:ext cx="1554480" cy="475488"/>
           </a:xfrm>
           <a:prstGeom prst="rect">
             <a:avLst>
@@ -21215,14 +22010,14 @@
       </p:sp>
       <p:sp>
         <p:nvSpPr>
-          <p:cNvPr id="30" name="Text 28"/>
-          <p:cNvSpPr/>
-          <p:nvPr/>
-        </p:nvSpPr>
-        <p:spPr>
-          <a:xfrm>
-            <a:off x="2313432" y="3364992"/>
-            <a:ext cx="1645920" cy="475488"/>
+          <p:cNvPr id="29" name="Text 27"/>
+          <p:cNvSpPr/>
+          <p:nvPr/>
+        </p:nvSpPr>
+        <p:spPr>
+          <a:xfrm>
+            <a:off x="1975104" y="3364992"/>
+            <a:ext cx="1554480" cy="475488"/>
           </a:xfrm>
           <a:prstGeom prst="rect">
             <a:avLst/>
@@ -21246,7 +22041,7 @@
                 <a:ea typeface="Trebuchet MS" pitchFamily="34" charset="-122"/>
                 <a:cs typeface="Trebuchet MS" pitchFamily="34" charset="-120"/>
               </a:rPr>
-              <a:t>re</a:t>
+              <a:t>o</a:t>
             </a:r>
             <a:endParaRPr lang="en-US" sz="1400" dirty="0"/>
           </a:p>
@@ -21254,14 +22049,14 @@
       </p:sp>
       <p:sp>
         <p:nvSpPr>
-          <p:cNvPr id="31" name="Text 29"/>
-          <p:cNvSpPr/>
-          <p:nvPr/>
-        </p:nvSpPr>
-        <p:spPr>
-          <a:xfrm>
-            <a:off x="3959352" y="3364992"/>
-            <a:ext cx="411480" cy="475488"/>
+          <p:cNvPr id="30" name="Text 28"/>
+          <p:cNvSpPr/>
+          <p:nvPr/>
+        </p:nvSpPr>
+        <p:spPr>
+          <a:xfrm>
+            <a:off x="3529584" y="3364992"/>
+            <a:ext cx="73152" cy="475488"/>
           </a:xfrm>
           <a:prstGeom prst="rect">
             <a:avLst/>
@@ -21293,14 +22088,14 @@
       </p:sp>
       <p:sp>
         <p:nvSpPr>
-          <p:cNvPr id="32" name="Shape 30"/>
-          <p:cNvSpPr/>
-          <p:nvPr/>
-        </p:nvSpPr>
-        <p:spPr>
-          <a:xfrm>
-            <a:off x="4370832" y="3364992"/>
-            <a:ext cx="1645920" cy="475488"/>
+          <p:cNvPr id="31" name="Shape 29"/>
+          <p:cNvSpPr/>
+          <p:nvPr/>
+        </p:nvSpPr>
+        <p:spPr>
+          <a:xfrm>
+            <a:off x="3602736" y="3364992"/>
+            <a:ext cx="1554480" cy="475488"/>
           </a:xfrm>
           <a:prstGeom prst="rect">
             <a:avLst>
@@ -21320,14 +22115,14 @@
       </p:sp>
       <p:sp>
         <p:nvSpPr>
-          <p:cNvPr id="33" name="Text 31"/>
-          <p:cNvSpPr/>
-          <p:nvPr/>
-        </p:nvSpPr>
-        <p:spPr>
-          <a:xfrm>
-            <a:off x="4370832" y="3364992"/>
-            <a:ext cx="1645920" cy="475488"/>
+          <p:cNvPr id="32" name="Text 30"/>
+          <p:cNvSpPr/>
+          <p:nvPr/>
+        </p:nvSpPr>
+        <p:spPr>
+          <a:xfrm>
+            <a:off x="3602736" y="3364992"/>
+            <a:ext cx="1554480" cy="475488"/>
           </a:xfrm>
           <a:prstGeom prst="rect">
             <a:avLst/>
@@ -21351,7 +22146,7 @@
                 <a:ea typeface="Trebuchet MS" pitchFamily="34" charset="-122"/>
                 <a:cs typeface="Trebuchet MS" pitchFamily="34" charset="-120"/>
               </a:rPr>
-              <a:t>read</a:t>
+              <a:t>ver</a:t>
             </a:r>
             <a:endParaRPr lang="en-US" sz="1400" dirty="0"/>
           </a:p>
@@ -21359,14 +22154,14 @@
       </p:sp>
       <p:sp>
         <p:nvSpPr>
-          <p:cNvPr id="34" name="Text 32"/>
-          <p:cNvSpPr/>
-          <p:nvPr/>
-        </p:nvSpPr>
-        <p:spPr>
-          <a:xfrm>
-            <a:off x="6016752" y="3364992"/>
-            <a:ext cx="411480" cy="475488"/>
+          <p:cNvPr id="33" name="Text 31"/>
+          <p:cNvSpPr/>
+          <p:nvPr/>
+        </p:nvSpPr>
+        <p:spPr>
+          <a:xfrm>
+            <a:off x="5157216" y="3364992"/>
+            <a:ext cx="73152" cy="475488"/>
           </a:xfrm>
           <a:prstGeom prst="rect">
             <a:avLst/>
@@ -21398,14 +22193,14 @@
       </p:sp>
       <p:sp>
         <p:nvSpPr>
-          <p:cNvPr id="35" name="Shape 33"/>
-          <p:cNvSpPr/>
-          <p:nvPr/>
-        </p:nvSpPr>
-        <p:spPr>
-          <a:xfrm>
-            <a:off x="6428232" y="3364992"/>
-            <a:ext cx="1645920" cy="475488"/>
+          <p:cNvPr id="34" name="Shape 32"/>
+          <p:cNvSpPr/>
+          <p:nvPr/>
+        </p:nvSpPr>
+        <p:spPr>
+          <a:xfrm>
+            <a:off x="5230368" y="3364992"/>
+            <a:ext cx="1554480" cy="475488"/>
           </a:xfrm>
           <a:prstGeom prst="rect">
             <a:avLst>
@@ -21425,14 +22220,14 @@
       </p:sp>
       <p:sp>
         <p:nvSpPr>
-          <p:cNvPr id="36" name="Text 34"/>
-          <p:cNvSpPr/>
-          <p:nvPr/>
-        </p:nvSpPr>
-        <p:spPr>
-          <a:xfrm>
-            <a:off x="6428232" y="3364992"/>
-            <a:ext cx="1645920" cy="475488"/>
+          <p:cNvPr id="35" name="Text 33"/>
+          <p:cNvSpPr/>
+          <p:nvPr/>
+        </p:nvSpPr>
+        <p:spPr>
+          <a:xfrm>
+            <a:off x="5230368" y="3364992"/>
+            <a:ext cx="1554480" cy="475488"/>
           </a:xfrm>
           <a:prstGeom prst="rect">
             <a:avLst/>
@@ -21456,6 +22251,111 @@
                 <a:ea typeface="Trebuchet MS" pitchFamily="34" charset="-122"/>
                 <a:cs typeface="Trebuchet MS" pitchFamily="34" charset="-120"/>
               </a:rPr>
+              <a:t>flow</a:t>
+            </a:r>
+            <a:endParaRPr lang="en-US" sz="1400" dirty="0"/>
+          </a:p>
+        </p:txBody>
+      </p:sp>
+      <p:sp>
+        <p:nvSpPr>
+          <p:cNvPr id="36" name="Text 34"/>
+          <p:cNvSpPr/>
+          <p:nvPr/>
+        </p:nvSpPr>
+        <p:spPr>
+          <a:xfrm>
+            <a:off x="6784848" y="3364992"/>
+            <a:ext cx="73152" cy="475488"/>
+          </a:xfrm>
+          <a:prstGeom prst="rect">
+            <a:avLst/>
+          </a:prstGeom>
+          <a:noFill/>
+          <a:ln/>
+        </p:spPr>
+        <p:txBody>
+          <a:bodyPr wrap="square" lIns="0" tIns="0" rIns="0" bIns="0" rtlCol="0" anchor="ctr"/>
+          <a:lstStyle/>
+          <a:p>
+            <a:pPr algn="ctr" indent="0" marL="0">
+              <a:buNone/>
+            </a:pPr>
+            <a:r>
+              <a:rPr lang="en-US" sz="1600" b="1" dirty="0">
+                <a:solidFill>
+                  <a:srgbClr val="0D9488"/>
+                </a:solidFill>
+                <a:latin typeface="Trebuchet MS" pitchFamily="34" charset="0"/>
+                <a:ea typeface="Trebuchet MS" pitchFamily="34" charset="-122"/>
+                <a:cs typeface="Trebuchet MS" pitchFamily="34" charset="-120"/>
+              </a:rPr>
+              <a:t>·</a:t>
+            </a:r>
+            <a:endParaRPr lang="en-US" sz="1600" dirty="0"/>
+          </a:p>
+        </p:txBody>
+      </p:sp>
+      <p:sp>
+        <p:nvSpPr>
+          <p:cNvPr id="37" name="Shape 35"/>
+          <p:cNvSpPr/>
+          <p:nvPr/>
+        </p:nvSpPr>
+        <p:spPr>
+          <a:xfrm>
+            <a:off x="6858000" y="3364992"/>
+            <a:ext cx="1554480" cy="475488"/>
+          </a:xfrm>
+          <a:prstGeom prst="rect">
+            <a:avLst>
+              <a:gd name="adj" fmla="val 9615"/>
+            </a:avLst>
+          </a:prstGeom>
+          <a:solidFill>
+            <a:srgbClr val="FFFFFF"/>
+          </a:solidFill>
+          <a:ln w="12700">
+            <a:solidFill>
+              <a:srgbClr val="0D9488"/>
+            </a:solidFill>
+            <a:prstDash val="solid"/>
+          </a:ln>
+        </p:spPr>
+      </p:sp>
+      <p:sp>
+        <p:nvSpPr>
+          <p:cNvPr id="38" name="Text 36"/>
+          <p:cNvSpPr/>
+          <p:nvPr/>
+        </p:nvSpPr>
+        <p:spPr>
+          <a:xfrm>
+            <a:off x="6858000" y="3364992"/>
+            <a:ext cx="1554480" cy="475488"/>
+          </a:xfrm>
+          <a:prstGeom prst="rect">
+            <a:avLst/>
+          </a:prstGeom>
+          <a:noFill/>
+          <a:ln/>
+        </p:spPr>
+        <p:txBody>
+          <a:bodyPr wrap="square" lIns="0" tIns="0" rIns="0" bIns="0" rtlCol="0" anchor="ctr"/>
+          <a:lstStyle/>
+          <a:p>
+            <a:pPr algn="ctr" indent="0" marL="0">
+              <a:buNone/>
+            </a:pPr>
+            <a:r>
+              <a:rPr lang="en-US" sz="1400" b="1" dirty="0">
+                <a:solidFill>
+                  <a:srgbClr val="0D9488"/>
+                </a:solidFill>
+                <a:latin typeface="Trebuchet MS" pitchFamily="34" charset="0"/>
+                <a:ea typeface="Trebuchet MS" pitchFamily="34" charset="-122"/>
+                <a:cs typeface="Trebuchet MS" pitchFamily="34" charset="-120"/>
+              </a:rPr>
               <a:t>ing</a:t>
             </a:r>
             <a:endParaRPr lang="en-US" sz="1400" dirty="0"/>
@@ -21464,7 +22364,7 @@
       </p:sp>
       <p:sp>
         <p:nvSpPr>
-          <p:cNvPr id="37" name="Shape 35"/>
+          <p:cNvPr id="39" name="Shape 37"/>
           <p:cNvSpPr/>
           <p:nvPr/>
         </p:nvSpPr>
@@ -21491,7 +22391,7 @@
       </p:sp>
       <p:sp>
         <p:nvSpPr>
-          <p:cNvPr id="38" name="Text 36"/>
+          <p:cNvPr id="40" name="Text 38"/>
           <p:cNvSpPr/>
           <p:nvPr/>
         </p:nvSpPr>
@@ -21530,7 +22430,7 @@
       </p:sp>
       <p:sp>
         <p:nvSpPr>
-          <p:cNvPr id="39" name="Shape 37"/>
+          <p:cNvPr id="41" name="Shape 39"/>
           <p:cNvSpPr/>
           <p:nvPr/>
         </p:nvSpPr>
@@ -21557,7 +22457,7 @@
       </p:sp>
       <p:sp>
         <p:nvSpPr>
-          <p:cNvPr id="40" name="Text 38"/>
+          <p:cNvPr id="42" name="Text 40"/>
           <p:cNvSpPr/>
           <p:nvPr/>
         </p:nvSpPr>
@@ -22019,7 +22919,7 @@
                 <a:ea typeface="Trebuchet MS" pitchFamily="34" charset="-122"/>
                 <a:cs typeface="Trebuchet MS" pitchFamily="34" charset="-120"/>
               </a:rPr>
-              <a:t>rereading</a:t>
+              <a:t>overflowing</a:t>
             </a:r>
             <a:endParaRPr lang="en-US" sz="2800" dirty="0"/>
           </a:p>
@@ -22158,7 +23058,7 @@
                 <a:ea typeface="Trebuchet MS" pitchFamily="34" charset="-122"/>
                 <a:cs typeface="Trebuchet MS" pitchFamily="34" charset="-120"/>
               </a:rPr>
-              <a:t>re</a:t>
+              <a:t>over</a:t>
             </a:r>
             <a:endParaRPr lang="en-US" sz="1300" dirty="0"/>
           </a:p>
@@ -22197,7 +23097,7 @@
                 <a:ea typeface="Calibri" pitchFamily="34" charset="-122"/>
                 <a:cs typeface="Calibri" pitchFamily="34" charset="-120"/>
               </a:rPr>
-              <a:t>again</a:t>
+              <a:t>too much, above</a:t>
             </a:r>
             <a:endParaRPr lang="en-US" sz="850" dirty="0"/>
           </a:p>
@@ -22270,7 +23170,7 @@
                 <a:ea typeface="Trebuchet MS" pitchFamily="34" charset="-122"/>
                 <a:cs typeface="Trebuchet MS" pitchFamily="34" charset="-120"/>
               </a:rPr>
-              <a:t>read</a:t>
+              <a:t>flow</a:t>
             </a:r>
             <a:endParaRPr lang="en-US" sz="1300" dirty="0"/>
           </a:p>
@@ -22309,7 +23209,7 @@
                 <a:ea typeface="Calibri" pitchFamily="34" charset="-122"/>
                 <a:cs typeface="Calibri" pitchFamily="34" charset="-120"/>
               </a:rPr>
-              <a:t>to look at and understand words</a:t>
+              <a:t>to move steadily like liquid</a:t>
             </a:r>
             <a:endParaRPr lang="en-US" sz="850" dirty="0"/>
           </a:p>
@@ -22421,7 +23321,7 @@
                 <a:ea typeface="Calibri" pitchFamily="34" charset="-122"/>
                 <a:cs typeface="Calibri" pitchFamily="34" charset="-120"/>
               </a:rPr>
-              <a:t>ongoing action</a:t>
+              <a:t>action in progress</a:t>
             </a:r>
             <a:endParaRPr lang="en-US" sz="850" dirty="0"/>
           </a:p>
@@ -22429,46 +23329,7 @@
       </p:sp>
       <p:sp>
         <p:nvSpPr>
-          <p:cNvPr id="25" name="Text 23"/>
-          <p:cNvSpPr/>
-          <p:nvPr/>
-        </p:nvSpPr>
-        <p:spPr>
-          <a:xfrm>
-            <a:off x="6519672" y="2752344"/>
-            <a:ext cx="1828800" cy="182880"/>
-          </a:xfrm>
-          <a:prstGeom prst="rect">
-            <a:avLst/>
-          </a:prstGeom>
-          <a:noFill/>
-          <a:ln/>
-        </p:spPr>
-        <p:txBody>
-          <a:bodyPr wrap="square" lIns="0" tIns="0" rIns="0" bIns="0" rtlCol="0" anchor="t"/>
-          <a:lstStyle/>
-          <a:p>
-            <a:pPr algn="ctr" indent="0" marL="0">
-              <a:buNone/>
-            </a:pPr>
-            <a:r>
-              <a:rPr lang="en-US" sz="700" i="1" dirty="0">
-                <a:solidFill>
-                  <a:srgbClr val="94A3B8"/>
-                </a:solidFill>
-                <a:latin typeface="Calibri" pitchFamily="34" charset="0"/>
-                <a:ea typeface="Calibri" pitchFamily="34" charset="-122"/>
-                <a:cs typeface="Calibri" pitchFamily="34" charset="-120"/>
-              </a:rPr>
-              <a:t>'e' dropped before vowel suffix</a:t>
-            </a:r>
-            <a:endParaRPr lang="en-US" sz="700" dirty="0"/>
-          </a:p>
-        </p:txBody>
-      </p:sp>
-      <p:sp>
-        <p:nvSpPr>
-          <p:cNvPr id="26" name="Shape 24"/>
+          <p:cNvPr id="25" name="Shape 23"/>
           <p:cNvSpPr/>
           <p:nvPr/>
         </p:nvSpPr>
@@ -22495,7 +23356,7 @@
       </p:sp>
       <p:sp>
         <p:nvSpPr>
-          <p:cNvPr id="27" name="Text 25"/>
+          <p:cNvPr id="26" name="Text 24"/>
           <p:cNvSpPr/>
           <p:nvPr/>
         </p:nvSpPr>
@@ -22534,7 +23395,7 @@
       </p:sp>
       <p:sp>
         <p:nvSpPr>
-          <p:cNvPr id="28" name="Shape 26"/>
+          <p:cNvPr id="27" name="Shape 25"/>
           <p:cNvSpPr/>
           <p:nvPr/>
         </p:nvSpPr>
@@ -22561,14 +23422,14 @@
       </p:sp>
       <p:sp>
         <p:nvSpPr>
-          <p:cNvPr id="29" name="Shape 27"/>
-          <p:cNvSpPr/>
-          <p:nvPr/>
-        </p:nvSpPr>
-        <p:spPr>
-          <a:xfrm>
-            <a:off x="2313432" y="3364992"/>
-            <a:ext cx="1645920" cy="475488"/>
+          <p:cNvPr id="28" name="Shape 26"/>
+          <p:cNvSpPr/>
+          <p:nvPr/>
+        </p:nvSpPr>
+        <p:spPr>
+          <a:xfrm>
+            <a:off x="1975104" y="3364992"/>
+            <a:ext cx="1554480" cy="475488"/>
           </a:xfrm>
           <a:prstGeom prst="rect">
             <a:avLst>
@@ -22588,14 +23449,14 @@
       </p:sp>
       <p:sp>
         <p:nvSpPr>
-          <p:cNvPr id="30" name="Text 28"/>
-          <p:cNvSpPr/>
-          <p:nvPr/>
-        </p:nvSpPr>
-        <p:spPr>
-          <a:xfrm>
-            <a:off x="2313432" y="3364992"/>
-            <a:ext cx="1645920" cy="475488"/>
+          <p:cNvPr id="29" name="Text 27"/>
+          <p:cNvSpPr/>
+          <p:nvPr/>
+        </p:nvSpPr>
+        <p:spPr>
+          <a:xfrm>
+            <a:off x="1975104" y="3364992"/>
+            <a:ext cx="1554480" cy="475488"/>
           </a:xfrm>
           <a:prstGeom prst="rect">
             <a:avLst/>
@@ -22619,7 +23480,7 @@
                 <a:ea typeface="Trebuchet MS" pitchFamily="34" charset="-122"/>
                 <a:cs typeface="Trebuchet MS" pitchFamily="34" charset="-120"/>
               </a:rPr>
-              <a:t>re</a:t>
+              <a:t>o</a:t>
             </a:r>
             <a:endParaRPr lang="en-US" sz="1400" dirty="0"/>
           </a:p>
@@ -22627,14 +23488,14 @@
       </p:sp>
       <p:sp>
         <p:nvSpPr>
-          <p:cNvPr id="31" name="Text 29"/>
-          <p:cNvSpPr/>
-          <p:nvPr/>
-        </p:nvSpPr>
-        <p:spPr>
-          <a:xfrm>
-            <a:off x="3959352" y="3364992"/>
-            <a:ext cx="411480" cy="475488"/>
+          <p:cNvPr id="30" name="Text 28"/>
+          <p:cNvSpPr/>
+          <p:nvPr/>
+        </p:nvSpPr>
+        <p:spPr>
+          <a:xfrm>
+            <a:off x="3529584" y="3364992"/>
+            <a:ext cx="73152" cy="475488"/>
           </a:xfrm>
           <a:prstGeom prst="rect">
             <a:avLst/>
@@ -22666,14 +23527,14 @@
       </p:sp>
       <p:sp>
         <p:nvSpPr>
-          <p:cNvPr id="32" name="Shape 30"/>
-          <p:cNvSpPr/>
-          <p:nvPr/>
-        </p:nvSpPr>
-        <p:spPr>
-          <a:xfrm>
-            <a:off x="4370832" y="3364992"/>
-            <a:ext cx="1645920" cy="475488"/>
+          <p:cNvPr id="31" name="Shape 29"/>
+          <p:cNvSpPr/>
+          <p:nvPr/>
+        </p:nvSpPr>
+        <p:spPr>
+          <a:xfrm>
+            <a:off x="3602736" y="3364992"/>
+            <a:ext cx="1554480" cy="475488"/>
           </a:xfrm>
           <a:prstGeom prst="rect">
             <a:avLst>
@@ -22693,14 +23554,14 @@
       </p:sp>
       <p:sp>
         <p:nvSpPr>
-          <p:cNvPr id="33" name="Text 31"/>
-          <p:cNvSpPr/>
-          <p:nvPr/>
-        </p:nvSpPr>
-        <p:spPr>
-          <a:xfrm>
-            <a:off x="4370832" y="3364992"/>
-            <a:ext cx="1645920" cy="475488"/>
+          <p:cNvPr id="32" name="Text 30"/>
+          <p:cNvSpPr/>
+          <p:nvPr/>
+        </p:nvSpPr>
+        <p:spPr>
+          <a:xfrm>
+            <a:off x="3602736" y="3364992"/>
+            <a:ext cx="1554480" cy="475488"/>
           </a:xfrm>
           <a:prstGeom prst="rect">
             <a:avLst/>
@@ -22724,7 +23585,7 @@
                 <a:ea typeface="Trebuchet MS" pitchFamily="34" charset="-122"/>
                 <a:cs typeface="Trebuchet MS" pitchFamily="34" charset="-120"/>
               </a:rPr>
-              <a:t>read</a:t>
+              <a:t>ver</a:t>
             </a:r>
             <a:endParaRPr lang="en-US" sz="1400" dirty="0"/>
           </a:p>
@@ -22732,14 +23593,14 @@
       </p:sp>
       <p:sp>
         <p:nvSpPr>
-          <p:cNvPr id="34" name="Text 32"/>
-          <p:cNvSpPr/>
-          <p:nvPr/>
-        </p:nvSpPr>
-        <p:spPr>
-          <a:xfrm>
-            <a:off x="6016752" y="3364992"/>
-            <a:ext cx="411480" cy="475488"/>
+          <p:cNvPr id="33" name="Text 31"/>
+          <p:cNvSpPr/>
+          <p:nvPr/>
+        </p:nvSpPr>
+        <p:spPr>
+          <a:xfrm>
+            <a:off x="5157216" y="3364992"/>
+            <a:ext cx="73152" cy="475488"/>
           </a:xfrm>
           <a:prstGeom prst="rect">
             <a:avLst/>
@@ -22771,14 +23632,14 @@
       </p:sp>
       <p:sp>
         <p:nvSpPr>
-          <p:cNvPr id="35" name="Shape 33"/>
-          <p:cNvSpPr/>
-          <p:nvPr/>
-        </p:nvSpPr>
-        <p:spPr>
-          <a:xfrm>
-            <a:off x="6428232" y="3364992"/>
-            <a:ext cx="1645920" cy="475488"/>
+          <p:cNvPr id="34" name="Shape 32"/>
+          <p:cNvSpPr/>
+          <p:nvPr/>
+        </p:nvSpPr>
+        <p:spPr>
+          <a:xfrm>
+            <a:off x="5230368" y="3364992"/>
+            <a:ext cx="1554480" cy="475488"/>
           </a:xfrm>
           <a:prstGeom prst="rect">
             <a:avLst>
@@ -22798,14 +23659,14 @@
       </p:sp>
       <p:sp>
         <p:nvSpPr>
-          <p:cNvPr id="36" name="Text 34"/>
-          <p:cNvSpPr/>
-          <p:nvPr/>
-        </p:nvSpPr>
-        <p:spPr>
-          <a:xfrm>
-            <a:off x="6428232" y="3364992"/>
-            <a:ext cx="1645920" cy="475488"/>
+          <p:cNvPr id="35" name="Text 33"/>
+          <p:cNvSpPr/>
+          <p:nvPr/>
+        </p:nvSpPr>
+        <p:spPr>
+          <a:xfrm>
+            <a:off x="5230368" y="3364992"/>
+            <a:ext cx="1554480" cy="475488"/>
           </a:xfrm>
           <a:prstGeom prst="rect">
             <a:avLst/>
@@ -22829,6 +23690,111 @@
                 <a:ea typeface="Trebuchet MS" pitchFamily="34" charset="-122"/>
                 <a:cs typeface="Trebuchet MS" pitchFamily="34" charset="-120"/>
               </a:rPr>
+              <a:t>flow</a:t>
+            </a:r>
+            <a:endParaRPr lang="en-US" sz="1400" dirty="0"/>
+          </a:p>
+        </p:txBody>
+      </p:sp>
+      <p:sp>
+        <p:nvSpPr>
+          <p:cNvPr id="36" name="Text 34"/>
+          <p:cNvSpPr/>
+          <p:nvPr/>
+        </p:nvSpPr>
+        <p:spPr>
+          <a:xfrm>
+            <a:off x="6784848" y="3364992"/>
+            <a:ext cx="73152" cy="475488"/>
+          </a:xfrm>
+          <a:prstGeom prst="rect">
+            <a:avLst/>
+          </a:prstGeom>
+          <a:noFill/>
+          <a:ln/>
+        </p:spPr>
+        <p:txBody>
+          <a:bodyPr wrap="square" lIns="0" tIns="0" rIns="0" bIns="0" rtlCol="0" anchor="ctr"/>
+          <a:lstStyle/>
+          <a:p>
+            <a:pPr algn="ctr" indent="0" marL="0">
+              <a:buNone/>
+            </a:pPr>
+            <a:r>
+              <a:rPr lang="en-US" sz="1600" b="1" dirty="0">
+                <a:solidFill>
+                  <a:srgbClr val="0D9488"/>
+                </a:solidFill>
+                <a:latin typeface="Trebuchet MS" pitchFamily="34" charset="0"/>
+                <a:ea typeface="Trebuchet MS" pitchFamily="34" charset="-122"/>
+                <a:cs typeface="Trebuchet MS" pitchFamily="34" charset="-120"/>
+              </a:rPr>
+              <a:t>·</a:t>
+            </a:r>
+            <a:endParaRPr lang="en-US" sz="1600" dirty="0"/>
+          </a:p>
+        </p:txBody>
+      </p:sp>
+      <p:sp>
+        <p:nvSpPr>
+          <p:cNvPr id="37" name="Shape 35"/>
+          <p:cNvSpPr/>
+          <p:nvPr/>
+        </p:nvSpPr>
+        <p:spPr>
+          <a:xfrm>
+            <a:off x="6858000" y="3364992"/>
+            <a:ext cx="1554480" cy="475488"/>
+          </a:xfrm>
+          <a:prstGeom prst="rect">
+            <a:avLst>
+              <a:gd name="adj" fmla="val 9615"/>
+            </a:avLst>
+          </a:prstGeom>
+          <a:solidFill>
+            <a:srgbClr val="FFFFFF"/>
+          </a:solidFill>
+          <a:ln w="12700">
+            <a:solidFill>
+              <a:srgbClr val="0D9488"/>
+            </a:solidFill>
+            <a:prstDash val="solid"/>
+          </a:ln>
+        </p:spPr>
+      </p:sp>
+      <p:sp>
+        <p:nvSpPr>
+          <p:cNvPr id="38" name="Text 36"/>
+          <p:cNvSpPr/>
+          <p:nvPr/>
+        </p:nvSpPr>
+        <p:spPr>
+          <a:xfrm>
+            <a:off x="6858000" y="3364992"/>
+            <a:ext cx="1554480" cy="475488"/>
+          </a:xfrm>
+          <a:prstGeom prst="rect">
+            <a:avLst/>
+          </a:prstGeom>
+          <a:noFill/>
+          <a:ln/>
+        </p:spPr>
+        <p:txBody>
+          <a:bodyPr wrap="square" lIns="0" tIns="0" rIns="0" bIns="0" rtlCol="0" anchor="ctr"/>
+          <a:lstStyle/>
+          <a:p>
+            <a:pPr algn="ctr" indent="0" marL="0">
+              <a:buNone/>
+            </a:pPr>
+            <a:r>
+              <a:rPr lang="en-US" sz="1400" b="1" dirty="0">
+                <a:solidFill>
+                  <a:srgbClr val="0D9488"/>
+                </a:solidFill>
+                <a:latin typeface="Trebuchet MS" pitchFamily="34" charset="0"/>
+                <a:ea typeface="Trebuchet MS" pitchFamily="34" charset="-122"/>
+                <a:cs typeface="Trebuchet MS" pitchFamily="34" charset="-120"/>
+              </a:rPr>
               <a:t>ing</a:t>
             </a:r>
             <a:endParaRPr lang="en-US" sz="1400" dirty="0"/>
@@ -22837,7 +23803,7 @@
       </p:sp>
       <p:sp>
         <p:nvSpPr>
-          <p:cNvPr id="37" name="Shape 35"/>
+          <p:cNvPr id="39" name="Shape 37"/>
           <p:cNvSpPr/>
           <p:nvPr/>
         </p:nvSpPr>
@@ -22864,7 +23830,7 @@
       </p:sp>
       <p:sp>
         <p:nvSpPr>
-          <p:cNvPr id="38" name="Text 36"/>
+          <p:cNvPr id="40" name="Text 38"/>
           <p:cNvSpPr/>
           <p:nvPr/>
         </p:nvSpPr>
@@ -22903,7 +23869,7 @@
       </p:sp>
       <p:sp>
         <p:nvSpPr>
-          <p:cNvPr id="39" name="Shape 37"/>
+          <p:cNvPr id="41" name="Shape 39"/>
           <p:cNvSpPr/>
           <p:nvPr/>
         </p:nvSpPr>
@@ -22930,13 +23896,13 @@
       </p:sp>
       <p:sp>
         <p:nvSpPr>
-          <p:cNvPr id="40" name="Shape 38"/>
-          <p:cNvSpPr/>
-          <p:nvPr/>
-        </p:nvSpPr>
-        <p:spPr>
-          <a:xfrm>
-            <a:off x="2124837" y="4169664"/>
+          <p:cNvPr id="42" name="Shape 40"/>
+          <p:cNvSpPr/>
+          <p:nvPr/>
+        </p:nvSpPr>
+        <p:spPr>
+          <a:xfrm>
+            <a:off x="2023872" y="4169664"/>
             <a:ext cx="685800" cy="475488"/>
           </a:xfrm>
           <a:prstGeom prst="rect">
@@ -22957,13 +23923,13 @@
       </p:sp>
       <p:sp>
         <p:nvSpPr>
-          <p:cNvPr id="41" name="Text 39"/>
-          <p:cNvSpPr/>
-          <p:nvPr/>
-        </p:nvSpPr>
-        <p:spPr>
-          <a:xfrm>
-            <a:off x="2124837" y="4169664"/>
+          <p:cNvPr id="43" name="Text 41"/>
+          <p:cNvSpPr/>
+          <p:nvPr/>
+        </p:nvSpPr>
+        <p:spPr>
+          <a:xfrm>
+            <a:off x="2023872" y="4169664"/>
             <a:ext cx="685800" cy="475488"/>
           </a:xfrm>
           <a:prstGeom prst="rect">
@@ -22988,7 +23954,7 @@
                 <a:ea typeface="Trebuchet MS" pitchFamily="34" charset="-122"/>
                 <a:cs typeface="Trebuchet MS" pitchFamily="34" charset="-120"/>
               </a:rPr>
-              <a:t>r</a:t>
+              <a:t>o</a:t>
             </a:r>
             <a:endParaRPr lang="en-US" sz="900" dirty="0"/>
           </a:p>
@@ -22996,13 +23962,13 @@
       </p:sp>
       <p:sp>
         <p:nvSpPr>
-          <p:cNvPr id="42" name="Shape 40"/>
-          <p:cNvSpPr/>
-          <p:nvPr/>
-        </p:nvSpPr>
-        <p:spPr>
-          <a:xfrm>
-            <a:off x="3033522" y="4169664"/>
+          <p:cNvPr id="44" name="Shape 42"/>
+          <p:cNvSpPr/>
+          <p:nvPr/>
+        </p:nvSpPr>
+        <p:spPr>
+          <a:xfrm>
+            <a:off x="2831592" y="4169664"/>
             <a:ext cx="685800" cy="475488"/>
           </a:xfrm>
           <a:prstGeom prst="rect">
@@ -23023,13 +23989,13 @@
       </p:sp>
       <p:sp>
         <p:nvSpPr>
-          <p:cNvPr id="43" name="Text 41"/>
-          <p:cNvSpPr/>
-          <p:nvPr/>
-        </p:nvSpPr>
-        <p:spPr>
-          <a:xfrm>
-            <a:off x="3033522" y="4169664"/>
+          <p:cNvPr id="45" name="Text 43"/>
+          <p:cNvSpPr/>
+          <p:nvPr/>
+        </p:nvSpPr>
+        <p:spPr>
+          <a:xfrm>
+            <a:off x="2831592" y="4169664"/>
             <a:ext cx="685800" cy="475488"/>
           </a:xfrm>
           <a:prstGeom prst="rect">
@@ -23054,7 +24020,7 @@
                 <a:ea typeface="Trebuchet MS" pitchFamily="34" charset="-122"/>
                 <a:cs typeface="Trebuchet MS" pitchFamily="34" charset="-120"/>
               </a:rPr>
-              <a:t>e</a:t>
+              <a:t>v</a:t>
             </a:r>
             <a:endParaRPr lang="en-US" sz="900" dirty="0"/>
           </a:p>
@@ -23062,13 +24028,13 @@
       </p:sp>
       <p:sp>
         <p:nvSpPr>
-          <p:cNvPr id="44" name="Shape 42"/>
-          <p:cNvSpPr/>
-          <p:nvPr/>
-        </p:nvSpPr>
-        <p:spPr>
-          <a:xfrm>
-            <a:off x="3942207" y="4169664"/>
+          <p:cNvPr id="46" name="Shape 44"/>
+          <p:cNvSpPr/>
+          <p:nvPr/>
+        </p:nvSpPr>
+        <p:spPr>
+          <a:xfrm>
+            <a:off x="3639312" y="4169664"/>
             <a:ext cx="685800" cy="475488"/>
           </a:xfrm>
           <a:prstGeom prst="rect">
@@ -23089,13 +24055,13 @@
       </p:sp>
       <p:sp>
         <p:nvSpPr>
-          <p:cNvPr id="45" name="Text 43"/>
-          <p:cNvSpPr/>
-          <p:nvPr/>
-        </p:nvSpPr>
-        <p:spPr>
-          <a:xfrm>
-            <a:off x="3942207" y="4169664"/>
+          <p:cNvPr id="47" name="Text 45"/>
+          <p:cNvSpPr/>
+          <p:nvPr/>
+        </p:nvSpPr>
+        <p:spPr>
+          <a:xfrm>
+            <a:off x="3639312" y="4169664"/>
             <a:ext cx="685800" cy="475488"/>
           </a:xfrm>
           <a:prstGeom prst="rect">
@@ -23120,7 +24086,7 @@
                 <a:ea typeface="Trebuchet MS" pitchFamily="34" charset="-122"/>
                 <a:cs typeface="Trebuchet MS" pitchFamily="34" charset="-120"/>
               </a:rPr>
-              <a:t>r</a:t>
+              <a:t>er</a:t>
             </a:r>
             <a:endParaRPr lang="en-US" sz="900" dirty="0"/>
           </a:p>
@@ -23128,13 +24094,13 @@
       </p:sp>
       <p:sp>
         <p:nvSpPr>
-          <p:cNvPr id="46" name="Shape 44"/>
-          <p:cNvSpPr/>
-          <p:nvPr/>
-        </p:nvSpPr>
-        <p:spPr>
-          <a:xfrm>
-            <a:off x="4850892" y="4169664"/>
+          <p:cNvPr id="48" name="Shape 46"/>
+          <p:cNvSpPr/>
+          <p:nvPr/>
+        </p:nvSpPr>
+        <p:spPr>
+          <a:xfrm>
+            <a:off x="4447032" y="4169664"/>
             <a:ext cx="685800" cy="475488"/>
           </a:xfrm>
           <a:prstGeom prst="rect">
@@ -23155,13 +24121,13 @@
       </p:sp>
       <p:sp>
         <p:nvSpPr>
-          <p:cNvPr id="47" name="Text 45"/>
-          <p:cNvSpPr/>
-          <p:nvPr/>
-        </p:nvSpPr>
-        <p:spPr>
-          <a:xfrm>
-            <a:off x="4850892" y="4169664"/>
+          <p:cNvPr id="49" name="Text 47"/>
+          <p:cNvSpPr/>
+          <p:nvPr/>
+        </p:nvSpPr>
+        <p:spPr>
+          <a:xfrm>
+            <a:off x="4447032" y="4169664"/>
             <a:ext cx="685800" cy="475488"/>
           </a:xfrm>
           <a:prstGeom prst="rect">
@@ -23186,7 +24152,7 @@
                 <a:ea typeface="Trebuchet MS" pitchFamily="34" charset="-122"/>
                 <a:cs typeface="Trebuchet MS" pitchFamily="34" charset="-120"/>
               </a:rPr>
-              <a:t>ea</a:t>
+              <a:t>f</a:t>
             </a:r>
             <a:endParaRPr lang="en-US" sz="900" dirty="0"/>
           </a:p>
@@ -23194,13 +24160,13 @@
       </p:sp>
       <p:sp>
         <p:nvSpPr>
-          <p:cNvPr id="48" name="Shape 46"/>
-          <p:cNvSpPr/>
-          <p:nvPr/>
-        </p:nvSpPr>
-        <p:spPr>
-          <a:xfrm>
-            <a:off x="5759577" y="4169664"/>
+          <p:cNvPr id="50" name="Shape 48"/>
+          <p:cNvSpPr/>
+          <p:nvPr/>
+        </p:nvSpPr>
+        <p:spPr>
+          <a:xfrm>
+            <a:off x="5254752" y="4169664"/>
             <a:ext cx="685800" cy="475488"/>
           </a:xfrm>
           <a:prstGeom prst="rect">
@@ -23221,13 +24187,13 @@
       </p:sp>
       <p:sp>
         <p:nvSpPr>
-          <p:cNvPr id="49" name="Text 47"/>
-          <p:cNvSpPr/>
-          <p:nvPr/>
-        </p:nvSpPr>
-        <p:spPr>
-          <a:xfrm>
-            <a:off x="5759577" y="4169664"/>
+          <p:cNvPr id="51" name="Text 49"/>
+          <p:cNvSpPr/>
+          <p:nvPr/>
+        </p:nvSpPr>
+        <p:spPr>
+          <a:xfrm>
+            <a:off x="5254752" y="4169664"/>
             <a:ext cx="685800" cy="475488"/>
           </a:xfrm>
           <a:prstGeom prst="rect">
@@ -23252,7 +24218,7 @@
                 <a:ea typeface="Trebuchet MS" pitchFamily="34" charset="-122"/>
                 <a:cs typeface="Trebuchet MS" pitchFamily="34" charset="-120"/>
               </a:rPr>
-              <a:t>d</a:t>
+              <a:t>l</a:t>
             </a:r>
             <a:endParaRPr lang="en-US" sz="900" dirty="0"/>
           </a:p>
@@ -23260,13 +24226,13 @@
       </p:sp>
       <p:sp>
         <p:nvSpPr>
-          <p:cNvPr id="50" name="Shape 48"/>
-          <p:cNvSpPr/>
-          <p:nvPr/>
-        </p:nvSpPr>
-        <p:spPr>
-          <a:xfrm>
-            <a:off x="6668262" y="4169664"/>
+          <p:cNvPr id="52" name="Shape 50"/>
+          <p:cNvSpPr/>
+          <p:nvPr/>
+        </p:nvSpPr>
+        <p:spPr>
+          <a:xfrm>
+            <a:off x="6062472" y="4169664"/>
             <a:ext cx="685800" cy="475488"/>
           </a:xfrm>
           <a:prstGeom prst="rect">
@@ -23287,13 +24253,13 @@
       </p:sp>
       <p:sp>
         <p:nvSpPr>
-          <p:cNvPr id="51" name="Text 49"/>
-          <p:cNvSpPr/>
-          <p:nvPr/>
-        </p:nvSpPr>
-        <p:spPr>
-          <a:xfrm>
-            <a:off x="6668262" y="4169664"/>
+          <p:cNvPr id="53" name="Text 51"/>
+          <p:cNvSpPr/>
+          <p:nvPr/>
+        </p:nvSpPr>
+        <p:spPr>
+          <a:xfrm>
+            <a:off x="6062472" y="4169664"/>
             <a:ext cx="685800" cy="475488"/>
           </a:xfrm>
           <a:prstGeom prst="rect">
@@ -23318,7 +24284,7 @@
                 <a:ea typeface="Trebuchet MS" pitchFamily="34" charset="-122"/>
                 <a:cs typeface="Trebuchet MS" pitchFamily="34" charset="-120"/>
               </a:rPr>
-              <a:t>i</a:t>
+              <a:t>ow</a:t>
             </a:r>
             <a:endParaRPr lang="en-US" sz="900" dirty="0"/>
           </a:p>
@@ -23326,13 +24292,13 @@
       </p:sp>
       <p:sp>
         <p:nvSpPr>
-          <p:cNvPr id="52" name="Shape 50"/>
-          <p:cNvSpPr/>
-          <p:nvPr/>
-        </p:nvSpPr>
-        <p:spPr>
-          <a:xfrm>
-            <a:off x="7576947" y="4169664"/>
+          <p:cNvPr id="54" name="Shape 52"/>
+          <p:cNvSpPr/>
+          <p:nvPr/>
+        </p:nvSpPr>
+        <p:spPr>
+          <a:xfrm>
+            <a:off x="6870192" y="4169664"/>
             <a:ext cx="685800" cy="475488"/>
           </a:xfrm>
           <a:prstGeom prst="rect">
@@ -23353,13 +24319,79 @@
       </p:sp>
       <p:sp>
         <p:nvSpPr>
-          <p:cNvPr id="53" name="Text 51"/>
-          <p:cNvSpPr/>
-          <p:nvPr/>
-        </p:nvSpPr>
-        <p:spPr>
-          <a:xfrm>
-            <a:off x="7576947" y="4169664"/>
+          <p:cNvPr id="55" name="Text 53"/>
+          <p:cNvSpPr/>
+          <p:nvPr/>
+        </p:nvSpPr>
+        <p:spPr>
+          <a:xfrm>
+            <a:off x="6870192" y="4169664"/>
+            <a:ext cx="685800" cy="475488"/>
+          </a:xfrm>
+          <a:prstGeom prst="rect">
+            <a:avLst/>
+          </a:prstGeom>
+          <a:noFill/>
+          <a:ln/>
+        </p:spPr>
+        <p:txBody>
+          <a:bodyPr wrap="square" lIns="0" tIns="0" rIns="0" bIns="0" rtlCol="0" anchor="ctr"/>
+          <a:lstStyle/>
+          <a:p>
+            <a:pPr algn="ctr" indent="0" marL="0">
+              <a:buNone/>
+            </a:pPr>
+            <a:r>
+              <a:rPr lang="en-US" sz="900" b="1" dirty="0">
+                <a:solidFill>
+                  <a:srgbClr val="9D174D"/>
+                </a:solidFill>
+                <a:latin typeface="Trebuchet MS" pitchFamily="34" charset="0"/>
+                <a:ea typeface="Trebuchet MS" pitchFamily="34" charset="-122"/>
+                <a:cs typeface="Trebuchet MS" pitchFamily="34" charset="-120"/>
+              </a:rPr>
+              <a:t>i</a:t>
+            </a:r>
+            <a:endParaRPr lang="en-US" sz="900" dirty="0"/>
+          </a:p>
+        </p:txBody>
+      </p:sp>
+      <p:sp>
+        <p:nvSpPr>
+          <p:cNvPr id="56" name="Shape 54"/>
+          <p:cNvSpPr/>
+          <p:nvPr/>
+        </p:nvSpPr>
+        <p:spPr>
+          <a:xfrm>
+            <a:off x="7677912" y="4169664"/>
+            <a:ext cx="685800" cy="475488"/>
+          </a:xfrm>
+          <a:prstGeom prst="rect">
+            <a:avLst>
+              <a:gd name="adj" fmla="val 7692"/>
+            </a:avLst>
+          </a:prstGeom>
+          <a:solidFill>
+            <a:srgbClr val="FFFFFF"/>
+          </a:solidFill>
+          <a:ln w="12700">
+            <a:solidFill>
+              <a:srgbClr val="DB2777"/>
+            </a:solidFill>
+            <a:prstDash val="solid"/>
+          </a:ln>
+        </p:spPr>
+      </p:sp>
+      <p:sp>
+        <p:nvSpPr>
+          <p:cNvPr id="57" name="Text 55"/>
+          <p:cNvSpPr/>
+          <p:nvPr/>
+        </p:nvSpPr>
+        <p:spPr>
+          <a:xfrm>
+            <a:off x="7677912" y="4169664"/>
             <a:ext cx="685800" cy="475488"/>
           </a:xfrm>
           <a:prstGeom prst="rect">
@@ -23815,7 +24847,7 @@
                 <a:ea typeface="Trebuchet MS" pitchFamily="34" charset="-122"/>
                 <a:cs typeface="Trebuchet MS" pitchFamily="34" charset="-120"/>
               </a:rPr>
-              <a:t>underlining</a:t>
+              <a:t>rethinking</a:t>
             </a:r>
             <a:endParaRPr lang="en-US" sz="2800" dirty="0"/>
           </a:p>
@@ -24642,7 +25674,7 @@
                 <a:ea typeface="Trebuchet MS" pitchFamily="34" charset="-122"/>
                 <a:cs typeface="Trebuchet MS" pitchFamily="34" charset="-120"/>
               </a:rPr>
-              <a:t>underlining</a:t>
+              <a:t>rethinking</a:t>
             </a:r>
             <a:endParaRPr lang="en-US" sz="2800" dirty="0"/>
           </a:p>
@@ -24781,7 +25813,7 @@
                 <a:ea typeface="Trebuchet MS" pitchFamily="34" charset="-122"/>
                 <a:cs typeface="Trebuchet MS" pitchFamily="34" charset="-120"/>
               </a:rPr>
-              <a:t>under</a:t>
+              <a:t>re</a:t>
             </a:r>
             <a:endParaRPr lang="en-US" sz="1300" dirty="0"/>
           </a:p>
@@ -24820,7 +25852,7 @@
                 <a:ea typeface="Calibri" pitchFamily="34" charset="-122"/>
                 <a:cs typeface="Calibri" pitchFamily="34" charset="-120"/>
               </a:rPr>
-              <a:t>below</a:t>
+              <a:t>again</a:t>
             </a:r>
             <a:endParaRPr lang="en-US" sz="850" dirty="0"/>
           </a:p>
@@ -24893,7 +25925,7 @@
                 <a:ea typeface="Trebuchet MS" pitchFamily="34" charset="-122"/>
                 <a:cs typeface="Trebuchet MS" pitchFamily="34" charset="-120"/>
               </a:rPr>
-              <a:t>line</a:t>
+              <a:t>think</a:t>
             </a:r>
             <a:endParaRPr lang="en-US" sz="1300" dirty="0"/>
           </a:p>
@@ -24932,7 +25964,7 @@
                 <a:ea typeface="Calibri" pitchFamily="34" charset="-122"/>
                 <a:cs typeface="Calibri" pitchFamily="34" charset="-120"/>
               </a:rPr>
-              <a:t>a straight mark</a:t>
+              <a:t>to use the mind</a:t>
             </a:r>
             <a:endParaRPr lang="en-US" sz="850" dirty="0"/>
           </a:p>
@@ -25044,7 +26076,7 @@
                 <a:ea typeface="Calibri" pitchFamily="34" charset="-122"/>
                 <a:cs typeface="Calibri" pitchFamily="34" charset="-120"/>
               </a:rPr>
-              <a:t>ongoing action</a:t>
+              <a:t>action in progress</a:t>
             </a:r>
             <a:endParaRPr lang="en-US" sz="850" dirty="0"/>
           </a:p>
@@ -25052,57 +26084,150 @@
       </p:sp>
       <p:sp>
         <p:nvSpPr>
-          <p:cNvPr id="25" name="Text 23"/>
-          <p:cNvSpPr/>
-          <p:nvPr/>
-        </p:nvSpPr>
-        <p:spPr>
-          <a:xfrm>
-            <a:off x="6519672" y="2752344"/>
-            <a:ext cx="1828800" cy="182880"/>
-          </a:xfrm>
-          <a:prstGeom prst="rect">
-            <a:avLst/>
-          </a:prstGeom>
-          <a:noFill/>
-          <a:ln/>
-        </p:spPr>
-        <p:txBody>
-          <a:bodyPr wrap="square" lIns="0" tIns="0" rIns="0" bIns="0" rtlCol="0" anchor="t"/>
-          <a:lstStyle/>
-          <a:p>
-            <a:pPr algn="ctr" indent="0" marL="0">
-              <a:buNone/>
-            </a:pPr>
-            <a:r>
-              <a:rPr lang="en-US" sz="700" i="1" dirty="0">
-                <a:solidFill>
-                  <a:srgbClr val="94A3B8"/>
+          <p:cNvPr id="25" name="Shape 23"/>
+          <p:cNvSpPr/>
+          <p:nvPr/>
+        </p:nvSpPr>
+        <p:spPr>
+          <a:xfrm>
+            <a:off x="365760" y="3273552"/>
+            <a:ext cx="1371600" cy="658368"/>
+          </a:xfrm>
+          <a:prstGeom prst="rect">
+            <a:avLst>
+              <a:gd name="adj" fmla="val 8333"/>
+            </a:avLst>
+          </a:prstGeom>
+          <a:solidFill>
+            <a:srgbClr val="E2E8F0"/>
+          </a:solidFill>
+          <a:ln w="12700">
+            <a:solidFill>
+              <a:srgbClr val="E2E8F0"/>
+            </a:solidFill>
+            <a:prstDash val="solid"/>
+          </a:ln>
+        </p:spPr>
+      </p:sp>
+      <p:sp>
+        <p:nvSpPr>
+          <p:cNvPr id="26" name="Text 24"/>
+          <p:cNvSpPr/>
+          <p:nvPr/>
+        </p:nvSpPr>
+        <p:spPr>
+          <a:xfrm>
+            <a:off x="365760" y="3273552"/>
+            <a:ext cx="1371600" cy="658368"/>
+          </a:xfrm>
+          <a:prstGeom prst="rect">
+            <a:avLst/>
+          </a:prstGeom>
+          <a:noFill/>
+          <a:ln/>
+        </p:spPr>
+        <p:txBody>
+          <a:bodyPr wrap="square" lIns="0" tIns="0" rIns="0" bIns="0" rtlCol="0" anchor="ctr"/>
+          <a:lstStyle/>
+          <a:p>
+            <a:pPr algn="ctr" indent="0" marL="0">
+              <a:buNone/>
+            </a:pPr>
+            <a:r>
+              <a:rPr lang="en-US" sz="1100" b="1" dirty="0">
+                <a:solidFill>
+                  <a:srgbClr val="475569"/>
+                </a:solidFill>
+                <a:latin typeface="Trebuchet MS" pitchFamily="34" charset="0"/>
+                <a:ea typeface="Trebuchet MS" pitchFamily="34" charset="-122"/>
+                <a:cs typeface="Trebuchet MS" pitchFamily="34" charset="-120"/>
+              </a:rPr>
+              <a:t>Syllables</a:t>
+            </a:r>
+            <a:endParaRPr lang="en-US" sz="1100" dirty="0"/>
+          </a:p>
+        </p:txBody>
+      </p:sp>
+      <p:sp>
+        <p:nvSpPr>
+          <p:cNvPr id="27" name="Shape 25"/>
+          <p:cNvSpPr/>
+          <p:nvPr/>
+        </p:nvSpPr>
+        <p:spPr>
+          <a:xfrm>
+            <a:off x="1874520" y="3273552"/>
+            <a:ext cx="6903720" cy="658368"/>
+          </a:xfrm>
+          <a:prstGeom prst="rect">
+            <a:avLst>
+              <a:gd name="adj" fmla="val 8333"/>
+            </a:avLst>
+          </a:prstGeom>
+          <a:solidFill>
+            <a:srgbClr val="F8FAFC"/>
+          </a:solidFill>
+          <a:ln w="12700">
+            <a:solidFill>
+              <a:srgbClr val="E2E8F0"/>
+            </a:solidFill>
+            <a:prstDash val="dash"/>
+          </a:ln>
+        </p:spPr>
+      </p:sp>
+      <p:sp>
+        <p:nvSpPr>
+          <p:cNvPr id="28" name="Text 26"/>
+          <p:cNvSpPr/>
+          <p:nvPr/>
+        </p:nvSpPr>
+        <p:spPr>
+          <a:xfrm>
+            <a:off x="1874520" y="3273552"/>
+            <a:ext cx="6903720" cy="658368"/>
+          </a:xfrm>
+          <a:prstGeom prst="rect">
+            <a:avLst/>
+          </a:prstGeom>
+          <a:noFill/>
+          <a:ln/>
+        </p:spPr>
+        <p:txBody>
+          <a:bodyPr wrap="square" rtlCol="0" anchor="ctr"/>
+          <a:lstStyle/>
+          <a:p>
+            <a:pPr algn="ctr" indent="0" marL="0">
+              <a:buNone/>
+            </a:pPr>
+            <a:r>
+              <a:rPr lang="en-US" sz="1100" i="1" dirty="0">
+                <a:solidFill>
+                  <a:srgbClr val="CBD5E1"/>
                 </a:solidFill>
                 <a:latin typeface="Calibri" pitchFamily="34" charset="0"/>
                 <a:ea typeface="Calibri" pitchFamily="34" charset="-122"/>
                 <a:cs typeface="Calibri" pitchFamily="34" charset="-120"/>
               </a:rPr>
-              <a:t>'e' dropped before vowel suffix</a:t>
-            </a:r>
-            <a:endParaRPr lang="en-US" sz="700" dirty="0"/>
-          </a:p>
-        </p:txBody>
-      </p:sp>
-      <p:sp>
-        <p:nvSpPr>
-          <p:cNvPr id="26" name="Shape 24"/>
-          <p:cNvSpPr/>
-          <p:nvPr/>
-        </p:nvSpPr>
-        <p:spPr>
-          <a:xfrm>
-            <a:off x="365760" y="3273552"/>
-            <a:ext cx="1371600" cy="658368"/>
+              <a:t>Write here...</a:t>
+            </a:r>
+            <a:endParaRPr lang="en-US" sz="1100" dirty="0"/>
+          </a:p>
+        </p:txBody>
+      </p:sp>
+      <p:sp>
+        <p:nvSpPr>
+          <p:cNvPr id="29" name="Shape 27"/>
+          <p:cNvSpPr/>
+          <p:nvPr/>
+        </p:nvSpPr>
+        <p:spPr>
+          <a:xfrm>
+            <a:off x="365760" y="4096512"/>
+            <a:ext cx="1371600" cy="804672"/>
           </a:xfrm>
           <a:prstGeom prst="rect">
             <a:avLst>
-              <a:gd name="adj" fmla="val 8333"/>
+              <a:gd name="adj" fmla="val 6818"/>
             </a:avLst>
           </a:prstGeom>
           <a:solidFill>
@@ -25118,14 +26243,14 @@
       </p:sp>
       <p:sp>
         <p:nvSpPr>
-          <p:cNvPr id="27" name="Text 25"/>
-          <p:cNvSpPr/>
-          <p:nvPr/>
-        </p:nvSpPr>
-        <p:spPr>
-          <a:xfrm>
-            <a:off x="365760" y="3273552"/>
-            <a:ext cx="1371600" cy="658368"/>
+          <p:cNvPr id="30" name="Text 28"/>
+          <p:cNvSpPr/>
+          <p:nvPr/>
+        </p:nvSpPr>
+        <p:spPr>
+          <a:xfrm>
+            <a:off x="365760" y="4096512"/>
+            <a:ext cx="1371600" cy="804672"/>
           </a:xfrm>
           <a:prstGeom prst="rect">
             <a:avLst/>
@@ -25149,7 +26274,7 @@
                 <a:ea typeface="Trebuchet MS" pitchFamily="34" charset="-122"/>
                 <a:cs typeface="Trebuchet MS" pitchFamily="34" charset="-120"/>
               </a:rPr>
-              <a:t>Syllables</a:t>
+              <a:t>Phonemes</a:t>
             </a:r>
             <a:endParaRPr lang="en-US" sz="1100" dirty="0"/>
           </a:p>
@@ -25157,80 +26282,14 @@
       </p:sp>
       <p:sp>
         <p:nvSpPr>
-          <p:cNvPr id="28" name="Shape 26"/>
-          <p:cNvSpPr/>
-          <p:nvPr/>
-        </p:nvSpPr>
-        <p:spPr>
-          <a:xfrm>
-            <a:off x="1874520" y="3273552"/>
-            <a:ext cx="6903720" cy="658368"/>
-          </a:xfrm>
-          <a:prstGeom prst="rect">
-            <a:avLst>
-              <a:gd name="adj" fmla="val 8333"/>
-            </a:avLst>
-          </a:prstGeom>
-          <a:solidFill>
-            <a:srgbClr val="F8FAFC"/>
-          </a:solidFill>
-          <a:ln w="12700">
-            <a:solidFill>
-              <a:srgbClr val="E2E8F0"/>
-            </a:solidFill>
-            <a:prstDash val="dash"/>
-          </a:ln>
-        </p:spPr>
-      </p:sp>
-      <p:sp>
-        <p:nvSpPr>
-          <p:cNvPr id="29" name="Text 27"/>
-          <p:cNvSpPr/>
-          <p:nvPr/>
-        </p:nvSpPr>
-        <p:spPr>
-          <a:xfrm>
-            <a:off x="1874520" y="3273552"/>
-            <a:ext cx="6903720" cy="658368"/>
-          </a:xfrm>
-          <a:prstGeom prst="rect">
-            <a:avLst/>
-          </a:prstGeom>
-          <a:noFill/>
-          <a:ln/>
-        </p:spPr>
-        <p:txBody>
-          <a:bodyPr wrap="square" rtlCol="0" anchor="ctr"/>
-          <a:lstStyle/>
-          <a:p>
-            <a:pPr algn="ctr" indent="0" marL="0">
-              <a:buNone/>
-            </a:pPr>
-            <a:r>
-              <a:rPr lang="en-US" sz="1100" i="1" dirty="0">
-                <a:solidFill>
-                  <a:srgbClr val="CBD5E1"/>
-                </a:solidFill>
-                <a:latin typeface="Calibri" pitchFamily="34" charset="0"/>
-                <a:ea typeface="Calibri" pitchFamily="34" charset="-122"/>
-                <a:cs typeface="Calibri" pitchFamily="34" charset="-120"/>
-              </a:rPr>
-              <a:t>Write here...</a:t>
-            </a:r>
-            <a:endParaRPr lang="en-US" sz="1100" dirty="0"/>
-          </a:p>
-        </p:txBody>
-      </p:sp>
-      <p:sp>
-        <p:nvSpPr>
-          <p:cNvPr id="30" name="Shape 28"/>
-          <p:cNvSpPr/>
-          <p:nvPr/>
-        </p:nvSpPr>
-        <p:spPr>
-          <a:xfrm>
-            <a:off x="365760" y="4096512"/>
-            <a:ext cx="1371600" cy="804672"/>
+          <p:cNvPr id="31" name="Shape 29"/>
+          <p:cNvSpPr/>
+          <p:nvPr/>
+        </p:nvSpPr>
+        <p:spPr>
+          <a:xfrm>
+            <a:off x="1874520" y="4096512"/>
+            <a:ext cx="6903720" cy="804672"/>
           </a:xfrm>
           <a:prstGeom prst="rect">
             <a:avLst>
@@ -25238,85 +26297,19 @@
             </a:avLst>
           </a:prstGeom>
           <a:solidFill>
-            <a:srgbClr val="E2E8F0"/>
+            <a:srgbClr val="F8FAFC"/>
           </a:solidFill>
           <a:ln w="12700">
             <a:solidFill>
               <a:srgbClr val="E2E8F0"/>
             </a:solidFill>
-            <a:prstDash val="solid"/>
-          </a:ln>
-        </p:spPr>
-      </p:sp>
-      <p:sp>
-        <p:nvSpPr>
-          <p:cNvPr id="31" name="Text 29"/>
-          <p:cNvSpPr/>
-          <p:nvPr/>
-        </p:nvSpPr>
-        <p:spPr>
-          <a:xfrm>
-            <a:off x="365760" y="4096512"/>
-            <a:ext cx="1371600" cy="804672"/>
-          </a:xfrm>
-          <a:prstGeom prst="rect">
-            <a:avLst/>
-          </a:prstGeom>
-          <a:noFill/>
-          <a:ln/>
-        </p:spPr>
-        <p:txBody>
-          <a:bodyPr wrap="square" lIns="0" tIns="0" rIns="0" bIns="0" rtlCol="0" anchor="ctr"/>
-          <a:lstStyle/>
-          <a:p>
-            <a:pPr algn="ctr" indent="0" marL="0">
-              <a:buNone/>
-            </a:pPr>
-            <a:r>
-              <a:rPr lang="en-US" sz="1100" b="1" dirty="0">
-                <a:solidFill>
-                  <a:srgbClr val="475569"/>
-                </a:solidFill>
-                <a:latin typeface="Trebuchet MS" pitchFamily="34" charset="0"/>
-                <a:ea typeface="Trebuchet MS" pitchFamily="34" charset="-122"/>
-                <a:cs typeface="Trebuchet MS" pitchFamily="34" charset="-120"/>
-              </a:rPr>
-              <a:t>Phonemes</a:t>
-            </a:r>
-            <a:endParaRPr lang="en-US" sz="1100" dirty="0"/>
-          </a:p>
-        </p:txBody>
-      </p:sp>
-      <p:sp>
-        <p:nvSpPr>
-          <p:cNvPr id="32" name="Shape 30"/>
-          <p:cNvSpPr/>
-          <p:nvPr/>
-        </p:nvSpPr>
-        <p:spPr>
-          <a:xfrm>
-            <a:off x="1874520" y="4096512"/>
-            <a:ext cx="6903720" cy="804672"/>
-          </a:xfrm>
-          <a:prstGeom prst="rect">
-            <a:avLst>
-              <a:gd name="adj" fmla="val 6818"/>
-            </a:avLst>
-          </a:prstGeom>
-          <a:solidFill>
-            <a:srgbClr val="F8FAFC"/>
-          </a:solidFill>
-          <a:ln w="12700">
-            <a:solidFill>
-              <a:srgbClr val="E2E8F0"/>
-            </a:solidFill>
             <a:prstDash val="dash"/>
           </a:ln>
         </p:spPr>
       </p:sp>
       <p:sp>
         <p:nvSpPr>
-          <p:cNvPr id="33" name="Text 31"/>
+          <p:cNvPr id="32" name="Text 30"/>
           <p:cNvSpPr/>
           <p:nvPr/>
         </p:nvSpPr>
@@ -26497,7 +27490,7 @@
                 <a:ea typeface="Trebuchet MS" pitchFamily="34" charset="-122"/>
                 <a:cs typeface="Trebuchet MS" pitchFamily="34" charset="-120"/>
               </a:rPr>
-              <a:t>underlining</a:t>
+              <a:t>rethinking</a:t>
             </a:r>
             <a:endParaRPr lang="en-US" sz="2800" dirty="0"/>
           </a:p>
@@ -26636,7 +27629,7 @@
                 <a:ea typeface="Trebuchet MS" pitchFamily="34" charset="-122"/>
                 <a:cs typeface="Trebuchet MS" pitchFamily="34" charset="-120"/>
               </a:rPr>
-              <a:t>under</a:t>
+              <a:t>re</a:t>
             </a:r>
             <a:endParaRPr lang="en-US" sz="1300" dirty="0"/>
           </a:p>
@@ -26675,7 +27668,7 @@
                 <a:ea typeface="Calibri" pitchFamily="34" charset="-122"/>
                 <a:cs typeface="Calibri" pitchFamily="34" charset="-120"/>
               </a:rPr>
-              <a:t>below</a:t>
+              <a:t>again</a:t>
             </a:r>
             <a:endParaRPr lang="en-US" sz="850" dirty="0"/>
           </a:p>
@@ -26748,7 +27741,7 @@
                 <a:ea typeface="Trebuchet MS" pitchFamily="34" charset="-122"/>
                 <a:cs typeface="Trebuchet MS" pitchFamily="34" charset="-120"/>
               </a:rPr>
-              <a:t>line</a:t>
+              <a:t>think</a:t>
             </a:r>
             <a:endParaRPr lang="en-US" sz="1300" dirty="0"/>
           </a:p>
@@ -26787,7 +27780,7 @@
                 <a:ea typeface="Calibri" pitchFamily="34" charset="-122"/>
                 <a:cs typeface="Calibri" pitchFamily="34" charset="-120"/>
               </a:rPr>
-              <a:t>a straight mark</a:t>
+              <a:t>to use the mind</a:t>
             </a:r>
             <a:endParaRPr lang="en-US" sz="850" dirty="0"/>
           </a:p>
@@ -26899,7 +27892,7 @@
                 <a:ea typeface="Calibri" pitchFamily="34" charset="-122"/>
                 <a:cs typeface="Calibri" pitchFamily="34" charset="-120"/>
               </a:rPr>
-              <a:t>ongoing action</a:t>
+              <a:t>action in progress</a:t>
             </a:r>
             <a:endParaRPr lang="en-US" sz="850" dirty="0"/>
           </a:p>
@@ -26907,46 +27900,7 @@
       </p:sp>
       <p:sp>
         <p:nvSpPr>
-          <p:cNvPr id="25" name="Text 23"/>
-          <p:cNvSpPr/>
-          <p:nvPr/>
-        </p:nvSpPr>
-        <p:spPr>
-          <a:xfrm>
-            <a:off x="6519672" y="2752344"/>
-            <a:ext cx="1828800" cy="182880"/>
-          </a:xfrm>
-          <a:prstGeom prst="rect">
-            <a:avLst/>
-          </a:prstGeom>
-          <a:noFill/>
-          <a:ln/>
-        </p:spPr>
-        <p:txBody>
-          <a:bodyPr wrap="square" lIns="0" tIns="0" rIns="0" bIns="0" rtlCol="0" anchor="t"/>
-          <a:lstStyle/>
-          <a:p>
-            <a:pPr algn="ctr" indent="0" marL="0">
-              <a:buNone/>
-            </a:pPr>
-            <a:r>
-              <a:rPr lang="en-US" sz="700" i="1" dirty="0">
-                <a:solidFill>
-                  <a:srgbClr val="94A3B8"/>
-                </a:solidFill>
-                <a:latin typeface="Calibri" pitchFamily="34" charset="0"/>
-                <a:ea typeface="Calibri" pitchFamily="34" charset="-122"/>
-                <a:cs typeface="Calibri" pitchFamily="34" charset="-120"/>
-              </a:rPr>
-              <a:t>'e' dropped before vowel suffix</a:t>
-            </a:r>
-            <a:endParaRPr lang="en-US" sz="700" dirty="0"/>
-          </a:p>
-        </p:txBody>
-      </p:sp>
-      <p:sp>
-        <p:nvSpPr>
-          <p:cNvPr id="26" name="Shape 24"/>
+          <p:cNvPr id="25" name="Shape 23"/>
           <p:cNvSpPr/>
           <p:nvPr/>
         </p:nvSpPr>
@@ -26973,7 +27927,7 @@
       </p:sp>
       <p:sp>
         <p:nvSpPr>
-          <p:cNvPr id="27" name="Text 25"/>
+          <p:cNvPr id="26" name="Text 24"/>
           <p:cNvSpPr/>
           <p:nvPr/>
         </p:nvSpPr>
@@ -27012,7 +27966,7 @@
       </p:sp>
       <p:sp>
         <p:nvSpPr>
-          <p:cNvPr id="28" name="Shape 26"/>
+          <p:cNvPr id="27" name="Shape 25"/>
           <p:cNvSpPr/>
           <p:nvPr/>
         </p:nvSpPr>
@@ -27039,14 +27993,14 @@
       </p:sp>
       <p:sp>
         <p:nvSpPr>
-          <p:cNvPr id="29" name="Shape 27"/>
-          <p:cNvSpPr/>
-          <p:nvPr/>
-        </p:nvSpPr>
-        <p:spPr>
-          <a:xfrm>
-            <a:off x="1975104" y="3364992"/>
-            <a:ext cx="1554480" cy="475488"/>
+          <p:cNvPr id="28" name="Shape 26"/>
+          <p:cNvSpPr/>
+          <p:nvPr/>
+        </p:nvSpPr>
+        <p:spPr>
+          <a:xfrm>
+            <a:off x="2313432" y="3364992"/>
+            <a:ext cx="1645920" cy="475488"/>
           </a:xfrm>
           <a:prstGeom prst="rect">
             <a:avLst>
@@ -27066,14 +28020,14 @@
       </p:sp>
       <p:sp>
         <p:nvSpPr>
-          <p:cNvPr id="30" name="Text 28"/>
-          <p:cNvSpPr/>
-          <p:nvPr/>
-        </p:nvSpPr>
-        <p:spPr>
-          <a:xfrm>
-            <a:off x="1975104" y="3364992"/>
-            <a:ext cx="1554480" cy="475488"/>
+          <p:cNvPr id="29" name="Text 27"/>
+          <p:cNvSpPr/>
+          <p:nvPr/>
+        </p:nvSpPr>
+        <p:spPr>
+          <a:xfrm>
+            <a:off x="2313432" y="3364992"/>
+            <a:ext cx="1645920" cy="475488"/>
           </a:xfrm>
           <a:prstGeom prst="rect">
             <a:avLst/>
@@ -27097,7 +28051,7 @@
                 <a:ea typeface="Trebuchet MS" pitchFamily="34" charset="-122"/>
                 <a:cs typeface="Trebuchet MS" pitchFamily="34" charset="-120"/>
               </a:rPr>
-              <a:t>un</a:t>
+              <a:t>re</a:t>
             </a:r>
             <a:endParaRPr lang="en-US" sz="1400" dirty="0"/>
           </a:p>
@@ -27105,14 +28059,14 @@
       </p:sp>
       <p:sp>
         <p:nvSpPr>
-          <p:cNvPr id="31" name="Text 29"/>
-          <p:cNvSpPr/>
-          <p:nvPr/>
-        </p:nvSpPr>
-        <p:spPr>
-          <a:xfrm>
-            <a:off x="3529584" y="3364992"/>
-            <a:ext cx="73152" cy="475488"/>
+          <p:cNvPr id="30" name="Text 28"/>
+          <p:cNvSpPr/>
+          <p:nvPr/>
+        </p:nvSpPr>
+        <p:spPr>
+          <a:xfrm>
+            <a:off x="3959352" y="3364992"/>
+            <a:ext cx="411480" cy="475488"/>
           </a:xfrm>
           <a:prstGeom prst="rect">
             <a:avLst/>
@@ -27144,14 +28098,14 @@
       </p:sp>
       <p:sp>
         <p:nvSpPr>
-          <p:cNvPr id="32" name="Shape 30"/>
-          <p:cNvSpPr/>
-          <p:nvPr/>
-        </p:nvSpPr>
-        <p:spPr>
-          <a:xfrm>
-            <a:off x="3602736" y="3364992"/>
-            <a:ext cx="1554480" cy="475488"/>
+          <p:cNvPr id="31" name="Shape 29"/>
+          <p:cNvSpPr/>
+          <p:nvPr/>
+        </p:nvSpPr>
+        <p:spPr>
+          <a:xfrm>
+            <a:off x="4370832" y="3364992"/>
+            <a:ext cx="1645920" cy="475488"/>
           </a:xfrm>
           <a:prstGeom prst="rect">
             <a:avLst>
@@ -27171,14 +28125,14 @@
       </p:sp>
       <p:sp>
         <p:nvSpPr>
-          <p:cNvPr id="33" name="Text 31"/>
-          <p:cNvSpPr/>
-          <p:nvPr/>
-        </p:nvSpPr>
-        <p:spPr>
-          <a:xfrm>
-            <a:off x="3602736" y="3364992"/>
-            <a:ext cx="1554480" cy="475488"/>
+          <p:cNvPr id="32" name="Text 30"/>
+          <p:cNvSpPr/>
+          <p:nvPr/>
+        </p:nvSpPr>
+        <p:spPr>
+          <a:xfrm>
+            <a:off x="4370832" y="3364992"/>
+            <a:ext cx="1645920" cy="475488"/>
           </a:xfrm>
           <a:prstGeom prst="rect">
             <a:avLst/>
@@ -27202,7 +28156,7 @@
                 <a:ea typeface="Trebuchet MS" pitchFamily="34" charset="-122"/>
                 <a:cs typeface="Trebuchet MS" pitchFamily="34" charset="-120"/>
               </a:rPr>
-              <a:t>der</a:t>
+              <a:t>think</a:t>
             </a:r>
             <a:endParaRPr lang="en-US" sz="1400" dirty="0"/>
           </a:p>
@@ -27210,14 +28164,14 @@
       </p:sp>
       <p:sp>
         <p:nvSpPr>
-          <p:cNvPr id="34" name="Text 32"/>
-          <p:cNvSpPr/>
-          <p:nvPr/>
-        </p:nvSpPr>
-        <p:spPr>
-          <a:xfrm>
-            <a:off x="5157216" y="3364992"/>
-            <a:ext cx="73152" cy="475488"/>
+          <p:cNvPr id="33" name="Text 31"/>
+          <p:cNvSpPr/>
+          <p:nvPr/>
+        </p:nvSpPr>
+        <p:spPr>
+          <a:xfrm>
+            <a:off x="6016752" y="3364992"/>
+            <a:ext cx="411480" cy="475488"/>
           </a:xfrm>
           <a:prstGeom prst="rect">
             <a:avLst/>
@@ -27249,14 +28203,14 @@
       </p:sp>
       <p:sp>
         <p:nvSpPr>
-          <p:cNvPr id="35" name="Shape 33"/>
-          <p:cNvSpPr/>
-          <p:nvPr/>
-        </p:nvSpPr>
-        <p:spPr>
-          <a:xfrm>
-            <a:off x="5230368" y="3364992"/>
-            <a:ext cx="1554480" cy="475488"/>
+          <p:cNvPr id="34" name="Shape 32"/>
+          <p:cNvSpPr/>
+          <p:nvPr/>
+        </p:nvSpPr>
+        <p:spPr>
+          <a:xfrm>
+            <a:off x="6428232" y="3364992"/>
+            <a:ext cx="1645920" cy="475488"/>
           </a:xfrm>
           <a:prstGeom prst="rect">
             <a:avLst>
@@ -27276,14 +28230,14 @@
       </p:sp>
       <p:sp>
         <p:nvSpPr>
-          <p:cNvPr id="36" name="Text 34"/>
-          <p:cNvSpPr/>
-          <p:nvPr/>
-        </p:nvSpPr>
-        <p:spPr>
-          <a:xfrm>
-            <a:off x="5230368" y="3364992"/>
-            <a:ext cx="1554480" cy="475488"/>
+          <p:cNvPr id="35" name="Text 33"/>
+          <p:cNvSpPr/>
+          <p:nvPr/>
+        </p:nvSpPr>
+        <p:spPr>
+          <a:xfrm>
+            <a:off x="6428232" y="3364992"/>
+            <a:ext cx="1645920" cy="475488"/>
           </a:xfrm>
           <a:prstGeom prst="rect">
             <a:avLst/>
@@ -27307,7 +28261,7 @@
                 <a:ea typeface="Trebuchet MS" pitchFamily="34" charset="-122"/>
                 <a:cs typeface="Trebuchet MS" pitchFamily="34" charset="-120"/>
               </a:rPr>
-              <a:t>lin</a:t>
+              <a:t>ing</a:t>
             </a:r>
             <a:endParaRPr lang="en-US" sz="1400" dirty="0"/>
           </a:p>
@@ -27315,40 +28269,67 @@
       </p:sp>
       <p:sp>
         <p:nvSpPr>
+          <p:cNvPr id="36" name="Shape 34"/>
+          <p:cNvSpPr/>
+          <p:nvPr/>
+        </p:nvSpPr>
+        <p:spPr>
+          <a:xfrm>
+            <a:off x="365760" y="4096512"/>
+            <a:ext cx="1371600" cy="804672"/>
+          </a:xfrm>
+          <a:prstGeom prst="rect">
+            <a:avLst>
+              <a:gd name="adj" fmla="val 6818"/>
+            </a:avLst>
+          </a:prstGeom>
+          <a:solidFill>
+            <a:srgbClr val="E2E8F0"/>
+          </a:solidFill>
+          <a:ln w="12700">
+            <a:solidFill>
+              <a:srgbClr val="E2E8F0"/>
+            </a:solidFill>
+            <a:prstDash val="solid"/>
+          </a:ln>
+        </p:spPr>
+      </p:sp>
+      <p:sp>
+        <p:nvSpPr>
           <p:cNvPr id="37" name="Text 35"/>
           <p:cNvSpPr/>
           <p:nvPr/>
         </p:nvSpPr>
         <p:spPr>
           <a:xfrm>
-            <a:off x="6784848" y="3364992"/>
-            <a:ext cx="73152" cy="475488"/>
-          </a:xfrm>
-          <a:prstGeom prst="rect">
-            <a:avLst/>
-          </a:prstGeom>
-          <a:noFill/>
-          <a:ln/>
-        </p:spPr>
-        <p:txBody>
-          <a:bodyPr wrap="square" lIns="0" tIns="0" rIns="0" bIns="0" rtlCol="0" anchor="ctr"/>
-          <a:lstStyle/>
-          <a:p>
-            <a:pPr algn="ctr" indent="0" marL="0">
-              <a:buNone/>
-            </a:pPr>
-            <a:r>
-              <a:rPr lang="en-US" sz="1600" b="1" dirty="0">
-                <a:solidFill>
-                  <a:srgbClr val="0D9488"/>
+            <a:off x="365760" y="4096512"/>
+            <a:ext cx="1371600" cy="804672"/>
+          </a:xfrm>
+          <a:prstGeom prst="rect">
+            <a:avLst/>
+          </a:prstGeom>
+          <a:noFill/>
+          <a:ln/>
+        </p:spPr>
+        <p:txBody>
+          <a:bodyPr wrap="square" lIns="0" tIns="0" rIns="0" bIns="0" rtlCol="0" anchor="ctr"/>
+          <a:lstStyle/>
+          <a:p>
+            <a:pPr algn="ctr" indent="0" marL="0">
+              <a:buNone/>
+            </a:pPr>
+            <a:r>
+              <a:rPr lang="en-US" sz="1100" b="1" dirty="0">
+                <a:solidFill>
+                  <a:srgbClr val="475569"/>
                 </a:solidFill>
                 <a:latin typeface="Trebuchet MS" pitchFamily="34" charset="0"/>
                 <a:ea typeface="Trebuchet MS" pitchFamily="34" charset="-122"/>
                 <a:cs typeface="Trebuchet MS" pitchFamily="34" charset="-120"/>
               </a:rPr>
-              <a:t>·</a:t>
-            </a:r>
-            <a:endParaRPr lang="en-US" sz="1600" dirty="0"/>
+              <a:t>Phonemes</a:t>
+            </a:r>
+            <a:endParaRPr lang="en-US" sz="1100" dirty="0"/>
           </a:p>
         </p:txBody>
       </p:sp>
@@ -27360,74 +28341,8 @@
         </p:nvSpPr>
         <p:spPr>
           <a:xfrm>
-            <a:off x="6858000" y="3364992"/>
-            <a:ext cx="1554480" cy="475488"/>
-          </a:xfrm>
-          <a:prstGeom prst="rect">
-            <a:avLst>
-              <a:gd name="adj" fmla="val 9615"/>
-            </a:avLst>
-          </a:prstGeom>
-          <a:solidFill>
-            <a:srgbClr val="FFFFFF"/>
-          </a:solidFill>
-          <a:ln w="12700">
-            <a:solidFill>
-              <a:srgbClr val="0D9488"/>
-            </a:solidFill>
-            <a:prstDash val="solid"/>
-          </a:ln>
-        </p:spPr>
-      </p:sp>
-      <p:sp>
-        <p:nvSpPr>
-          <p:cNvPr id="39" name="Text 37"/>
-          <p:cNvSpPr/>
-          <p:nvPr/>
-        </p:nvSpPr>
-        <p:spPr>
-          <a:xfrm>
-            <a:off x="6858000" y="3364992"/>
-            <a:ext cx="1554480" cy="475488"/>
-          </a:xfrm>
-          <a:prstGeom prst="rect">
-            <a:avLst/>
-          </a:prstGeom>
-          <a:noFill/>
-          <a:ln/>
-        </p:spPr>
-        <p:txBody>
-          <a:bodyPr wrap="square" lIns="0" tIns="0" rIns="0" bIns="0" rtlCol="0" anchor="ctr"/>
-          <a:lstStyle/>
-          <a:p>
-            <a:pPr algn="ctr" indent="0" marL="0">
-              <a:buNone/>
-            </a:pPr>
-            <a:r>
-              <a:rPr lang="en-US" sz="1400" b="1" dirty="0">
-                <a:solidFill>
-                  <a:srgbClr val="0D9488"/>
-                </a:solidFill>
-                <a:latin typeface="Trebuchet MS" pitchFamily="34" charset="0"/>
-                <a:ea typeface="Trebuchet MS" pitchFamily="34" charset="-122"/>
-                <a:cs typeface="Trebuchet MS" pitchFamily="34" charset="-120"/>
-              </a:rPr>
-              <a:t>ing</a:t>
-            </a:r>
-            <a:endParaRPr lang="en-US" sz="1400" dirty="0"/>
-          </a:p>
-        </p:txBody>
-      </p:sp>
-      <p:sp>
-        <p:nvSpPr>
-          <p:cNvPr id="40" name="Shape 38"/>
-          <p:cNvSpPr/>
-          <p:nvPr/>
-        </p:nvSpPr>
-        <p:spPr>
-          <a:xfrm>
-            <a:off x="365760" y="4096512"/>
-            <a:ext cx="1371600" cy="804672"/>
+            <a:off x="1874520" y="4096512"/>
+            <a:ext cx="6903720" cy="804672"/>
           </a:xfrm>
           <a:prstGeom prst="rect">
             <a:avLst>
@@ -27435,85 +28350,19 @@
             </a:avLst>
           </a:prstGeom>
           <a:solidFill>
-            <a:srgbClr val="E2E8F0"/>
+            <a:srgbClr val="F8FAFC"/>
           </a:solidFill>
           <a:ln w="12700">
             <a:solidFill>
               <a:srgbClr val="E2E8F0"/>
             </a:solidFill>
-            <a:prstDash val="solid"/>
-          </a:ln>
-        </p:spPr>
-      </p:sp>
-      <p:sp>
-        <p:nvSpPr>
-          <p:cNvPr id="41" name="Text 39"/>
-          <p:cNvSpPr/>
-          <p:nvPr/>
-        </p:nvSpPr>
-        <p:spPr>
-          <a:xfrm>
-            <a:off x="365760" y="4096512"/>
-            <a:ext cx="1371600" cy="804672"/>
-          </a:xfrm>
-          <a:prstGeom prst="rect">
-            <a:avLst/>
-          </a:prstGeom>
-          <a:noFill/>
-          <a:ln/>
-        </p:spPr>
-        <p:txBody>
-          <a:bodyPr wrap="square" lIns="0" tIns="0" rIns="0" bIns="0" rtlCol="0" anchor="ctr"/>
-          <a:lstStyle/>
-          <a:p>
-            <a:pPr algn="ctr" indent="0" marL="0">
-              <a:buNone/>
-            </a:pPr>
-            <a:r>
-              <a:rPr lang="en-US" sz="1100" b="1" dirty="0">
-                <a:solidFill>
-                  <a:srgbClr val="475569"/>
-                </a:solidFill>
-                <a:latin typeface="Trebuchet MS" pitchFamily="34" charset="0"/>
-                <a:ea typeface="Trebuchet MS" pitchFamily="34" charset="-122"/>
-                <a:cs typeface="Trebuchet MS" pitchFamily="34" charset="-120"/>
-              </a:rPr>
-              <a:t>Phonemes</a:t>
-            </a:r>
-            <a:endParaRPr lang="en-US" sz="1100" dirty="0"/>
-          </a:p>
-        </p:txBody>
-      </p:sp>
-      <p:sp>
-        <p:nvSpPr>
-          <p:cNvPr id="42" name="Shape 40"/>
-          <p:cNvSpPr/>
-          <p:nvPr/>
-        </p:nvSpPr>
-        <p:spPr>
-          <a:xfrm>
-            <a:off x="1874520" y="4096512"/>
-            <a:ext cx="6903720" cy="804672"/>
-          </a:xfrm>
-          <a:prstGeom prst="rect">
-            <a:avLst>
-              <a:gd name="adj" fmla="val 6818"/>
-            </a:avLst>
-          </a:prstGeom>
-          <a:solidFill>
-            <a:srgbClr val="F8FAFC"/>
-          </a:solidFill>
-          <a:ln w="12700">
-            <a:solidFill>
-              <a:srgbClr val="E2E8F0"/>
-            </a:solidFill>
             <a:prstDash val="dash"/>
           </a:ln>
         </p:spPr>
       </p:sp>
       <p:sp>
         <p:nvSpPr>
-          <p:cNvPr id="43" name="Text 41"/>
+          <p:cNvPr id="39" name="Text 37"/>
           <p:cNvSpPr/>
           <p:nvPr/>
         </p:nvSpPr>
@@ -27975,7 +28824,7 @@
                 <a:ea typeface="Trebuchet MS" pitchFamily="34" charset="-122"/>
                 <a:cs typeface="Trebuchet MS" pitchFamily="34" charset="-120"/>
               </a:rPr>
-              <a:t>underlining</a:t>
+              <a:t>rethinking</a:t>
             </a:r>
             <a:endParaRPr lang="en-US" sz="2800" dirty="0"/>
           </a:p>
@@ -28114,7 +28963,7 @@
                 <a:ea typeface="Trebuchet MS" pitchFamily="34" charset="-122"/>
                 <a:cs typeface="Trebuchet MS" pitchFamily="34" charset="-120"/>
               </a:rPr>
-              <a:t>under</a:t>
+              <a:t>re</a:t>
             </a:r>
             <a:endParaRPr lang="en-US" sz="1300" dirty="0"/>
           </a:p>
@@ -28153,7 +29002,7 @@
                 <a:ea typeface="Calibri" pitchFamily="34" charset="-122"/>
                 <a:cs typeface="Calibri" pitchFamily="34" charset="-120"/>
               </a:rPr>
-              <a:t>below</a:t>
+              <a:t>again</a:t>
             </a:r>
             <a:endParaRPr lang="en-US" sz="850" dirty="0"/>
           </a:p>
@@ -28226,7 +29075,7 @@
                 <a:ea typeface="Trebuchet MS" pitchFamily="34" charset="-122"/>
                 <a:cs typeface="Trebuchet MS" pitchFamily="34" charset="-120"/>
               </a:rPr>
-              <a:t>line</a:t>
+              <a:t>think</a:t>
             </a:r>
             <a:endParaRPr lang="en-US" sz="1300" dirty="0"/>
           </a:p>
@@ -28265,7 +29114,7 @@
                 <a:ea typeface="Calibri" pitchFamily="34" charset="-122"/>
                 <a:cs typeface="Calibri" pitchFamily="34" charset="-120"/>
               </a:rPr>
-              <a:t>a straight mark</a:t>
+              <a:t>to use the mind</a:t>
             </a:r>
             <a:endParaRPr lang="en-US" sz="850" dirty="0"/>
           </a:p>
@@ -28377,7 +29226,7 @@
                 <a:ea typeface="Calibri" pitchFamily="34" charset="-122"/>
                 <a:cs typeface="Calibri" pitchFamily="34" charset="-120"/>
               </a:rPr>
-              <a:t>ongoing action</a:t>
+              <a:t>action in progress</a:t>
             </a:r>
             <a:endParaRPr lang="en-US" sz="850" dirty="0"/>
           </a:p>
@@ -28385,14 +29234,806 @@
       </p:sp>
       <p:sp>
         <p:nvSpPr>
-          <p:cNvPr id="25" name="Text 23"/>
-          <p:cNvSpPr/>
-          <p:nvPr/>
-        </p:nvSpPr>
-        <p:spPr>
-          <a:xfrm>
-            <a:off x="6519672" y="2752344"/>
-            <a:ext cx="1828800" cy="182880"/>
+          <p:cNvPr id="25" name="Shape 23"/>
+          <p:cNvSpPr/>
+          <p:nvPr/>
+        </p:nvSpPr>
+        <p:spPr>
+          <a:xfrm>
+            <a:off x="365760" y="3273552"/>
+            <a:ext cx="1371600" cy="658368"/>
+          </a:xfrm>
+          <a:prstGeom prst="rect">
+            <a:avLst>
+              <a:gd name="adj" fmla="val 8333"/>
+            </a:avLst>
+          </a:prstGeom>
+          <a:solidFill>
+            <a:srgbClr val="E2E8F0"/>
+          </a:solidFill>
+          <a:ln w="12700">
+            <a:solidFill>
+              <a:srgbClr val="E2E8F0"/>
+            </a:solidFill>
+            <a:prstDash val="solid"/>
+          </a:ln>
+        </p:spPr>
+      </p:sp>
+      <p:sp>
+        <p:nvSpPr>
+          <p:cNvPr id="26" name="Text 24"/>
+          <p:cNvSpPr/>
+          <p:nvPr/>
+        </p:nvSpPr>
+        <p:spPr>
+          <a:xfrm>
+            <a:off x="365760" y="3273552"/>
+            <a:ext cx="1371600" cy="658368"/>
+          </a:xfrm>
+          <a:prstGeom prst="rect">
+            <a:avLst/>
+          </a:prstGeom>
+          <a:noFill/>
+          <a:ln/>
+        </p:spPr>
+        <p:txBody>
+          <a:bodyPr wrap="square" lIns="0" tIns="0" rIns="0" bIns="0" rtlCol="0" anchor="ctr"/>
+          <a:lstStyle/>
+          <a:p>
+            <a:pPr algn="ctr" indent="0" marL="0">
+              <a:buNone/>
+            </a:pPr>
+            <a:r>
+              <a:rPr lang="en-US" sz="1100" b="1" dirty="0">
+                <a:solidFill>
+                  <a:srgbClr val="475569"/>
+                </a:solidFill>
+                <a:latin typeface="Trebuchet MS" pitchFamily="34" charset="0"/>
+                <a:ea typeface="Trebuchet MS" pitchFamily="34" charset="-122"/>
+                <a:cs typeface="Trebuchet MS" pitchFamily="34" charset="-120"/>
+              </a:rPr>
+              <a:t>Syllables</a:t>
+            </a:r>
+            <a:endParaRPr lang="en-US" sz="1100" dirty="0"/>
+          </a:p>
+        </p:txBody>
+      </p:sp>
+      <p:sp>
+        <p:nvSpPr>
+          <p:cNvPr id="27" name="Shape 25"/>
+          <p:cNvSpPr/>
+          <p:nvPr/>
+        </p:nvSpPr>
+        <p:spPr>
+          <a:xfrm>
+            <a:off x="1874520" y="3273552"/>
+            <a:ext cx="6903720" cy="658368"/>
+          </a:xfrm>
+          <a:prstGeom prst="rect">
+            <a:avLst>
+              <a:gd name="adj" fmla="val 8333"/>
+            </a:avLst>
+          </a:prstGeom>
+          <a:solidFill>
+            <a:srgbClr val="CCFBF1"/>
+          </a:solidFill>
+          <a:ln w="12700">
+            <a:solidFill>
+              <a:srgbClr val="0D9488"/>
+            </a:solidFill>
+            <a:prstDash val="solid"/>
+          </a:ln>
+        </p:spPr>
+      </p:sp>
+      <p:sp>
+        <p:nvSpPr>
+          <p:cNvPr id="28" name="Shape 26"/>
+          <p:cNvSpPr/>
+          <p:nvPr/>
+        </p:nvSpPr>
+        <p:spPr>
+          <a:xfrm>
+            <a:off x="2313432" y="3364992"/>
+            <a:ext cx="1645920" cy="475488"/>
+          </a:xfrm>
+          <a:prstGeom prst="rect">
+            <a:avLst>
+              <a:gd name="adj" fmla="val 9615"/>
+            </a:avLst>
+          </a:prstGeom>
+          <a:solidFill>
+            <a:srgbClr val="FFFFFF"/>
+          </a:solidFill>
+          <a:ln w="12700">
+            <a:solidFill>
+              <a:srgbClr val="0D9488"/>
+            </a:solidFill>
+            <a:prstDash val="solid"/>
+          </a:ln>
+        </p:spPr>
+      </p:sp>
+      <p:sp>
+        <p:nvSpPr>
+          <p:cNvPr id="29" name="Text 27"/>
+          <p:cNvSpPr/>
+          <p:nvPr/>
+        </p:nvSpPr>
+        <p:spPr>
+          <a:xfrm>
+            <a:off x="2313432" y="3364992"/>
+            <a:ext cx="1645920" cy="475488"/>
+          </a:xfrm>
+          <a:prstGeom prst="rect">
+            <a:avLst/>
+          </a:prstGeom>
+          <a:noFill/>
+          <a:ln/>
+        </p:spPr>
+        <p:txBody>
+          <a:bodyPr wrap="square" lIns="0" tIns="0" rIns="0" bIns="0" rtlCol="0" anchor="ctr"/>
+          <a:lstStyle/>
+          <a:p>
+            <a:pPr algn="ctr" indent="0" marL="0">
+              <a:buNone/>
+            </a:pPr>
+            <a:r>
+              <a:rPr lang="en-US" sz="1400" b="1" dirty="0">
+                <a:solidFill>
+                  <a:srgbClr val="0D9488"/>
+                </a:solidFill>
+                <a:latin typeface="Trebuchet MS" pitchFamily="34" charset="0"/>
+                <a:ea typeface="Trebuchet MS" pitchFamily="34" charset="-122"/>
+                <a:cs typeface="Trebuchet MS" pitchFamily="34" charset="-120"/>
+              </a:rPr>
+              <a:t>re</a:t>
+            </a:r>
+            <a:endParaRPr lang="en-US" sz="1400" dirty="0"/>
+          </a:p>
+        </p:txBody>
+      </p:sp>
+      <p:sp>
+        <p:nvSpPr>
+          <p:cNvPr id="30" name="Text 28"/>
+          <p:cNvSpPr/>
+          <p:nvPr/>
+        </p:nvSpPr>
+        <p:spPr>
+          <a:xfrm>
+            <a:off x="3959352" y="3364992"/>
+            <a:ext cx="411480" cy="475488"/>
+          </a:xfrm>
+          <a:prstGeom prst="rect">
+            <a:avLst/>
+          </a:prstGeom>
+          <a:noFill/>
+          <a:ln/>
+        </p:spPr>
+        <p:txBody>
+          <a:bodyPr wrap="square" lIns="0" tIns="0" rIns="0" bIns="0" rtlCol="0" anchor="ctr"/>
+          <a:lstStyle/>
+          <a:p>
+            <a:pPr algn="ctr" indent="0" marL="0">
+              <a:buNone/>
+            </a:pPr>
+            <a:r>
+              <a:rPr lang="en-US" sz="1600" b="1" dirty="0">
+                <a:solidFill>
+                  <a:srgbClr val="0D9488"/>
+                </a:solidFill>
+                <a:latin typeface="Trebuchet MS" pitchFamily="34" charset="0"/>
+                <a:ea typeface="Trebuchet MS" pitchFamily="34" charset="-122"/>
+                <a:cs typeface="Trebuchet MS" pitchFamily="34" charset="-120"/>
+              </a:rPr>
+              <a:t>·</a:t>
+            </a:r>
+            <a:endParaRPr lang="en-US" sz="1600" dirty="0"/>
+          </a:p>
+        </p:txBody>
+      </p:sp>
+      <p:sp>
+        <p:nvSpPr>
+          <p:cNvPr id="31" name="Shape 29"/>
+          <p:cNvSpPr/>
+          <p:nvPr/>
+        </p:nvSpPr>
+        <p:spPr>
+          <a:xfrm>
+            <a:off x="4370832" y="3364992"/>
+            <a:ext cx="1645920" cy="475488"/>
+          </a:xfrm>
+          <a:prstGeom prst="rect">
+            <a:avLst>
+              <a:gd name="adj" fmla="val 9615"/>
+            </a:avLst>
+          </a:prstGeom>
+          <a:solidFill>
+            <a:srgbClr val="FFFFFF"/>
+          </a:solidFill>
+          <a:ln w="12700">
+            <a:solidFill>
+              <a:srgbClr val="0D9488"/>
+            </a:solidFill>
+            <a:prstDash val="solid"/>
+          </a:ln>
+        </p:spPr>
+      </p:sp>
+      <p:sp>
+        <p:nvSpPr>
+          <p:cNvPr id="32" name="Text 30"/>
+          <p:cNvSpPr/>
+          <p:nvPr/>
+        </p:nvSpPr>
+        <p:spPr>
+          <a:xfrm>
+            <a:off x="4370832" y="3364992"/>
+            <a:ext cx="1645920" cy="475488"/>
+          </a:xfrm>
+          <a:prstGeom prst="rect">
+            <a:avLst/>
+          </a:prstGeom>
+          <a:noFill/>
+          <a:ln/>
+        </p:spPr>
+        <p:txBody>
+          <a:bodyPr wrap="square" lIns="0" tIns="0" rIns="0" bIns="0" rtlCol="0" anchor="ctr"/>
+          <a:lstStyle/>
+          <a:p>
+            <a:pPr algn="ctr" indent="0" marL="0">
+              <a:buNone/>
+            </a:pPr>
+            <a:r>
+              <a:rPr lang="en-US" sz="1400" b="1" dirty="0">
+                <a:solidFill>
+                  <a:srgbClr val="0D9488"/>
+                </a:solidFill>
+                <a:latin typeface="Trebuchet MS" pitchFamily="34" charset="0"/>
+                <a:ea typeface="Trebuchet MS" pitchFamily="34" charset="-122"/>
+                <a:cs typeface="Trebuchet MS" pitchFamily="34" charset="-120"/>
+              </a:rPr>
+              <a:t>think</a:t>
+            </a:r>
+            <a:endParaRPr lang="en-US" sz="1400" dirty="0"/>
+          </a:p>
+        </p:txBody>
+      </p:sp>
+      <p:sp>
+        <p:nvSpPr>
+          <p:cNvPr id="33" name="Text 31"/>
+          <p:cNvSpPr/>
+          <p:nvPr/>
+        </p:nvSpPr>
+        <p:spPr>
+          <a:xfrm>
+            <a:off x="6016752" y="3364992"/>
+            <a:ext cx="411480" cy="475488"/>
+          </a:xfrm>
+          <a:prstGeom prst="rect">
+            <a:avLst/>
+          </a:prstGeom>
+          <a:noFill/>
+          <a:ln/>
+        </p:spPr>
+        <p:txBody>
+          <a:bodyPr wrap="square" lIns="0" tIns="0" rIns="0" bIns="0" rtlCol="0" anchor="ctr"/>
+          <a:lstStyle/>
+          <a:p>
+            <a:pPr algn="ctr" indent="0" marL="0">
+              <a:buNone/>
+            </a:pPr>
+            <a:r>
+              <a:rPr lang="en-US" sz="1600" b="1" dirty="0">
+                <a:solidFill>
+                  <a:srgbClr val="0D9488"/>
+                </a:solidFill>
+                <a:latin typeface="Trebuchet MS" pitchFamily="34" charset="0"/>
+                <a:ea typeface="Trebuchet MS" pitchFamily="34" charset="-122"/>
+                <a:cs typeface="Trebuchet MS" pitchFamily="34" charset="-120"/>
+              </a:rPr>
+              <a:t>·</a:t>
+            </a:r>
+            <a:endParaRPr lang="en-US" sz="1600" dirty="0"/>
+          </a:p>
+        </p:txBody>
+      </p:sp>
+      <p:sp>
+        <p:nvSpPr>
+          <p:cNvPr id="34" name="Shape 32"/>
+          <p:cNvSpPr/>
+          <p:nvPr/>
+        </p:nvSpPr>
+        <p:spPr>
+          <a:xfrm>
+            <a:off x="6428232" y="3364992"/>
+            <a:ext cx="1645920" cy="475488"/>
+          </a:xfrm>
+          <a:prstGeom prst="rect">
+            <a:avLst>
+              <a:gd name="adj" fmla="val 9615"/>
+            </a:avLst>
+          </a:prstGeom>
+          <a:solidFill>
+            <a:srgbClr val="FFFFFF"/>
+          </a:solidFill>
+          <a:ln w="12700">
+            <a:solidFill>
+              <a:srgbClr val="0D9488"/>
+            </a:solidFill>
+            <a:prstDash val="solid"/>
+          </a:ln>
+        </p:spPr>
+      </p:sp>
+      <p:sp>
+        <p:nvSpPr>
+          <p:cNvPr id="35" name="Text 33"/>
+          <p:cNvSpPr/>
+          <p:nvPr/>
+        </p:nvSpPr>
+        <p:spPr>
+          <a:xfrm>
+            <a:off x="6428232" y="3364992"/>
+            <a:ext cx="1645920" cy="475488"/>
+          </a:xfrm>
+          <a:prstGeom prst="rect">
+            <a:avLst/>
+          </a:prstGeom>
+          <a:noFill/>
+          <a:ln/>
+        </p:spPr>
+        <p:txBody>
+          <a:bodyPr wrap="square" lIns="0" tIns="0" rIns="0" bIns="0" rtlCol="0" anchor="ctr"/>
+          <a:lstStyle/>
+          <a:p>
+            <a:pPr algn="ctr" indent="0" marL="0">
+              <a:buNone/>
+            </a:pPr>
+            <a:r>
+              <a:rPr lang="en-US" sz="1400" b="1" dirty="0">
+                <a:solidFill>
+                  <a:srgbClr val="0D9488"/>
+                </a:solidFill>
+                <a:latin typeface="Trebuchet MS" pitchFamily="34" charset="0"/>
+                <a:ea typeface="Trebuchet MS" pitchFamily="34" charset="-122"/>
+                <a:cs typeface="Trebuchet MS" pitchFamily="34" charset="-120"/>
+              </a:rPr>
+              <a:t>ing</a:t>
+            </a:r>
+            <a:endParaRPr lang="en-US" sz="1400" dirty="0"/>
+          </a:p>
+        </p:txBody>
+      </p:sp>
+      <p:sp>
+        <p:nvSpPr>
+          <p:cNvPr id="36" name="Shape 34"/>
+          <p:cNvSpPr/>
+          <p:nvPr/>
+        </p:nvSpPr>
+        <p:spPr>
+          <a:xfrm>
+            <a:off x="365760" y="4096512"/>
+            <a:ext cx="1371600" cy="804672"/>
+          </a:xfrm>
+          <a:prstGeom prst="rect">
+            <a:avLst>
+              <a:gd name="adj" fmla="val 6818"/>
+            </a:avLst>
+          </a:prstGeom>
+          <a:solidFill>
+            <a:srgbClr val="E2E8F0"/>
+          </a:solidFill>
+          <a:ln w="12700">
+            <a:solidFill>
+              <a:srgbClr val="E2E8F0"/>
+            </a:solidFill>
+            <a:prstDash val="solid"/>
+          </a:ln>
+        </p:spPr>
+      </p:sp>
+      <p:sp>
+        <p:nvSpPr>
+          <p:cNvPr id="37" name="Text 35"/>
+          <p:cNvSpPr/>
+          <p:nvPr/>
+        </p:nvSpPr>
+        <p:spPr>
+          <a:xfrm>
+            <a:off x="365760" y="4096512"/>
+            <a:ext cx="1371600" cy="804672"/>
+          </a:xfrm>
+          <a:prstGeom prst="rect">
+            <a:avLst/>
+          </a:prstGeom>
+          <a:noFill/>
+          <a:ln/>
+        </p:spPr>
+        <p:txBody>
+          <a:bodyPr wrap="square" lIns="0" tIns="0" rIns="0" bIns="0" rtlCol="0" anchor="ctr"/>
+          <a:lstStyle/>
+          <a:p>
+            <a:pPr algn="ctr" indent="0" marL="0">
+              <a:buNone/>
+            </a:pPr>
+            <a:r>
+              <a:rPr lang="en-US" sz="1100" b="1" dirty="0">
+                <a:solidFill>
+                  <a:srgbClr val="475569"/>
+                </a:solidFill>
+                <a:latin typeface="Trebuchet MS" pitchFamily="34" charset="0"/>
+                <a:ea typeface="Trebuchet MS" pitchFamily="34" charset="-122"/>
+                <a:cs typeface="Trebuchet MS" pitchFamily="34" charset="-120"/>
+              </a:rPr>
+              <a:t>Phonemes</a:t>
+            </a:r>
+            <a:endParaRPr lang="en-US" sz="1100" dirty="0"/>
+          </a:p>
+        </p:txBody>
+      </p:sp>
+      <p:sp>
+        <p:nvSpPr>
+          <p:cNvPr id="38" name="Shape 36"/>
+          <p:cNvSpPr/>
+          <p:nvPr/>
+        </p:nvSpPr>
+        <p:spPr>
+          <a:xfrm>
+            <a:off x="1874520" y="4096512"/>
+            <a:ext cx="6903720" cy="804672"/>
+          </a:xfrm>
+          <a:prstGeom prst="rect">
+            <a:avLst>
+              <a:gd name="adj" fmla="val 6818"/>
+            </a:avLst>
+          </a:prstGeom>
+          <a:solidFill>
+            <a:srgbClr val="FCE7F3"/>
+          </a:solidFill>
+          <a:ln w="12700">
+            <a:solidFill>
+              <a:srgbClr val="DB2777"/>
+            </a:solidFill>
+            <a:prstDash val="solid"/>
+          </a:ln>
+        </p:spPr>
+      </p:sp>
+      <p:sp>
+        <p:nvSpPr>
+          <p:cNvPr id="39" name="Shape 37"/>
+          <p:cNvSpPr/>
+          <p:nvPr/>
+        </p:nvSpPr>
+        <p:spPr>
+          <a:xfrm>
+            <a:off x="2124837" y="4169664"/>
+            <a:ext cx="685800" cy="384048"/>
+          </a:xfrm>
+          <a:prstGeom prst="rect">
+            <a:avLst>
+              <a:gd name="adj" fmla="val 9524"/>
+            </a:avLst>
+          </a:prstGeom>
+          <a:solidFill>
+            <a:srgbClr val="FFFFFF"/>
+          </a:solidFill>
+          <a:ln w="12700">
+            <a:solidFill>
+              <a:srgbClr val="DB2777"/>
+            </a:solidFill>
+            <a:prstDash val="solid"/>
+          </a:ln>
+        </p:spPr>
+      </p:sp>
+      <p:sp>
+        <p:nvSpPr>
+          <p:cNvPr id="40" name="Text 38"/>
+          <p:cNvSpPr/>
+          <p:nvPr/>
+        </p:nvSpPr>
+        <p:spPr>
+          <a:xfrm>
+            <a:off x="2124837" y="4169664"/>
+            <a:ext cx="685800" cy="384048"/>
+          </a:xfrm>
+          <a:prstGeom prst="rect">
+            <a:avLst/>
+          </a:prstGeom>
+          <a:noFill/>
+          <a:ln/>
+        </p:spPr>
+        <p:txBody>
+          <a:bodyPr wrap="square" lIns="0" tIns="0" rIns="0" bIns="0" rtlCol="0" anchor="ctr"/>
+          <a:lstStyle/>
+          <a:p>
+            <a:pPr algn="ctr" indent="0" marL="0">
+              <a:buNone/>
+            </a:pPr>
+            <a:r>
+              <a:rPr lang="en-US" sz="900" b="1" dirty="0">
+                <a:solidFill>
+                  <a:srgbClr val="9D174D"/>
+                </a:solidFill>
+                <a:latin typeface="Trebuchet MS" pitchFamily="34" charset="0"/>
+                <a:ea typeface="Trebuchet MS" pitchFamily="34" charset="-122"/>
+                <a:cs typeface="Trebuchet MS" pitchFamily="34" charset="-120"/>
+              </a:rPr>
+              <a:t>r</a:t>
+            </a:r>
+            <a:endParaRPr lang="en-US" sz="900" dirty="0"/>
+          </a:p>
+        </p:txBody>
+      </p:sp>
+      <p:sp>
+        <p:nvSpPr>
+          <p:cNvPr id="41" name="Shape 39"/>
+          <p:cNvSpPr/>
+          <p:nvPr/>
+        </p:nvSpPr>
+        <p:spPr>
+          <a:xfrm>
+            <a:off x="3033522" y="4169664"/>
+            <a:ext cx="685800" cy="384048"/>
+          </a:xfrm>
+          <a:prstGeom prst="rect">
+            <a:avLst>
+              <a:gd name="adj" fmla="val 9524"/>
+            </a:avLst>
+          </a:prstGeom>
+          <a:solidFill>
+            <a:srgbClr val="FFFFFF"/>
+          </a:solidFill>
+          <a:ln w="12700">
+            <a:solidFill>
+              <a:srgbClr val="DB2777"/>
+            </a:solidFill>
+            <a:prstDash val="solid"/>
+          </a:ln>
+        </p:spPr>
+      </p:sp>
+      <p:sp>
+        <p:nvSpPr>
+          <p:cNvPr id="42" name="Text 40"/>
+          <p:cNvSpPr/>
+          <p:nvPr/>
+        </p:nvSpPr>
+        <p:spPr>
+          <a:xfrm>
+            <a:off x="3033522" y="4169664"/>
+            <a:ext cx="685800" cy="384048"/>
+          </a:xfrm>
+          <a:prstGeom prst="rect">
+            <a:avLst/>
+          </a:prstGeom>
+          <a:noFill/>
+          <a:ln/>
+        </p:spPr>
+        <p:txBody>
+          <a:bodyPr wrap="square" lIns="0" tIns="0" rIns="0" bIns="0" rtlCol="0" anchor="ctr"/>
+          <a:lstStyle/>
+          <a:p>
+            <a:pPr algn="ctr" indent="0" marL="0">
+              <a:buNone/>
+            </a:pPr>
+            <a:r>
+              <a:rPr lang="en-US" sz="900" b="1" dirty="0">
+                <a:solidFill>
+                  <a:srgbClr val="9D174D"/>
+                </a:solidFill>
+                <a:latin typeface="Trebuchet MS" pitchFamily="34" charset="0"/>
+                <a:ea typeface="Trebuchet MS" pitchFamily="34" charset="-122"/>
+                <a:cs typeface="Trebuchet MS" pitchFamily="34" charset="-120"/>
+              </a:rPr>
+              <a:t>e</a:t>
+            </a:r>
+            <a:endParaRPr lang="en-US" sz="900" dirty="0"/>
+          </a:p>
+        </p:txBody>
+      </p:sp>
+      <p:sp>
+        <p:nvSpPr>
+          <p:cNvPr id="43" name="Shape 41"/>
+          <p:cNvSpPr/>
+          <p:nvPr/>
+        </p:nvSpPr>
+        <p:spPr>
+          <a:xfrm>
+            <a:off x="3942207" y="4169664"/>
+            <a:ext cx="685800" cy="384048"/>
+          </a:xfrm>
+          <a:prstGeom prst="rect">
+            <a:avLst>
+              <a:gd name="adj" fmla="val 9524"/>
+            </a:avLst>
+          </a:prstGeom>
+          <a:solidFill>
+            <a:srgbClr val="FFFFFF"/>
+          </a:solidFill>
+          <a:ln w="12700">
+            <a:solidFill>
+              <a:srgbClr val="DB2777"/>
+            </a:solidFill>
+            <a:prstDash val="solid"/>
+          </a:ln>
+        </p:spPr>
+      </p:sp>
+      <p:sp>
+        <p:nvSpPr>
+          <p:cNvPr id="44" name="Text 42"/>
+          <p:cNvSpPr/>
+          <p:nvPr/>
+        </p:nvSpPr>
+        <p:spPr>
+          <a:xfrm>
+            <a:off x="3942207" y="4169664"/>
+            <a:ext cx="685800" cy="384048"/>
+          </a:xfrm>
+          <a:prstGeom prst="rect">
+            <a:avLst/>
+          </a:prstGeom>
+          <a:noFill/>
+          <a:ln/>
+        </p:spPr>
+        <p:txBody>
+          <a:bodyPr wrap="square" lIns="0" tIns="0" rIns="0" bIns="0" rtlCol="0" anchor="ctr"/>
+          <a:lstStyle/>
+          <a:p>
+            <a:pPr algn="ctr" indent="0" marL="0">
+              <a:buNone/>
+            </a:pPr>
+            <a:r>
+              <a:rPr lang="en-US" sz="900" b="1" dirty="0">
+                <a:solidFill>
+                  <a:srgbClr val="9D174D"/>
+                </a:solidFill>
+                <a:latin typeface="Trebuchet MS" pitchFamily="34" charset="0"/>
+                <a:ea typeface="Trebuchet MS" pitchFamily="34" charset="-122"/>
+                <a:cs typeface="Trebuchet MS" pitchFamily="34" charset="-120"/>
+              </a:rPr>
+              <a:t>th</a:t>
+            </a:r>
+            <a:endParaRPr lang="en-US" sz="900" dirty="0"/>
+          </a:p>
+        </p:txBody>
+      </p:sp>
+      <p:sp>
+        <p:nvSpPr>
+          <p:cNvPr id="45" name="Shape 43"/>
+          <p:cNvSpPr/>
+          <p:nvPr/>
+        </p:nvSpPr>
+        <p:spPr>
+          <a:xfrm>
+            <a:off x="4850892" y="4169664"/>
+            <a:ext cx="685800" cy="384048"/>
+          </a:xfrm>
+          <a:prstGeom prst="rect">
+            <a:avLst>
+              <a:gd name="adj" fmla="val 9524"/>
+            </a:avLst>
+          </a:prstGeom>
+          <a:solidFill>
+            <a:srgbClr val="FFFFFF"/>
+          </a:solidFill>
+          <a:ln w="12700">
+            <a:solidFill>
+              <a:srgbClr val="DB2777"/>
+            </a:solidFill>
+            <a:prstDash val="solid"/>
+          </a:ln>
+        </p:spPr>
+      </p:sp>
+      <p:sp>
+        <p:nvSpPr>
+          <p:cNvPr id="46" name="Text 44"/>
+          <p:cNvSpPr/>
+          <p:nvPr/>
+        </p:nvSpPr>
+        <p:spPr>
+          <a:xfrm>
+            <a:off x="4850892" y="4169664"/>
+            <a:ext cx="685800" cy="384048"/>
+          </a:xfrm>
+          <a:prstGeom prst="rect">
+            <a:avLst/>
+          </a:prstGeom>
+          <a:noFill/>
+          <a:ln/>
+        </p:spPr>
+        <p:txBody>
+          <a:bodyPr wrap="square" lIns="0" tIns="0" rIns="0" bIns="0" rtlCol="0" anchor="ctr"/>
+          <a:lstStyle/>
+          <a:p>
+            <a:pPr algn="ctr" indent="0" marL="0">
+              <a:buNone/>
+            </a:pPr>
+            <a:r>
+              <a:rPr lang="en-US" sz="900" b="1" dirty="0">
+                <a:solidFill>
+                  <a:srgbClr val="9D174D"/>
+                </a:solidFill>
+                <a:latin typeface="Trebuchet MS" pitchFamily="34" charset="0"/>
+                <a:ea typeface="Trebuchet MS" pitchFamily="34" charset="-122"/>
+                <a:cs typeface="Trebuchet MS" pitchFamily="34" charset="-120"/>
+              </a:rPr>
+              <a:t>i</a:t>
+            </a:r>
+            <a:endParaRPr lang="en-US" sz="900" dirty="0"/>
+          </a:p>
+        </p:txBody>
+      </p:sp>
+      <p:sp>
+        <p:nvSpPr>
+          <p:cNvPr id="47" name="Shape 45"/>
+          <p:cNvSpPr/>
+          <p:nvPr/>
+        </p:nvSpPr>
+        <p:spPr>
+          <a:xfrm>
+            <a:off x="5759577" y="4169664"/>
+            <a:ext cx="685800" cy="384048"/>
+          </a:xfrm>
+          <a:prstGeom prst="rect">
+            <a:avLst>
+              <a:gd name="adj" fmla="val 9524"/>
+            </a:avLst>
+          </a:prstGeom>
+          <a:solidFill>
+            <a:srgbClr val="FFFFFF"/>
+          </a:solidFill>
+          <a:ln w="12700">
+            <a:solidFill>
+              <a:srgbClr val="DB2777"/>
+            </a:solidFill>
+            <a:prstDash val="solid"/>
+          </a:ln>
+        </p:spPr>
+      </p:sp>
+      <p:sp>
+        <p:nvSpPr>
+          <p:cNvPr id="48" name="Text 46"/>
+          <p:cNvSpPr/>
+          <p:nvPr/>
+        </p:nvSpPr>
+        <p:spPr>
+          <a:xfrm>
+            <a:off x="5759577" y="4169664"/>
+            <a:ext cx="685800" cy="384048"/>
+          </a:xfrm>
+          <a:prstGeom prst="rect">
+            <a:avLst/>
+          </a:prstGeom>
+          <a:noFill/>
+          <a:ln/>
+        </p:spPr>
+        <p:txBody>
+          <a:bodyPr wrap="square" lIns="0" tIns="0" rIns="0" bIns="0" rtlCol="0" anchor="ctr"/>
+          <a:lstStyle/>
+          <a:p>
+            <a:pPr algn="ctr" indent="0" marL="0">
+              <a:buNone/>
+            </a:pPr>
+            <a:r>
+              <a:rPr lang="en-US" sz="900" b="1" dirty="0">
+                <a:solidFill>
+                  <a:srgbClr val="9D174D"/>
+                </a:solidFill>
+                <a:latin typeface="Trebuchet MS" pitchFamily="34" charset="0"/>
+                <a:ea typeface="Trebuchet MS" pitchFamily="34" charset="-122"/>
+                <a:cs typeface="Trebuchet MS" pitchFamily="34" charset="-120"/>
+              </a:rPr>
+              <a:t>nk</a:t>
+            </a:r>
+            <a:endParaRPr lang="en-US" sz="900" dirty="0"/>
+          </a:p>
+        </p:txBody>
+      </p:sp>
+      <p:sp>
+        <p:nvSpPr>
+          <p:cNvPr id="49" name="Text 47"/>
+          <p:cNvSpPr/>
+          <p:nvPr/>
+        </p:nvSpPr>
+        <p:spPr>
+          <a:xfrm>
+            <a:off x="5759577" y="4572000"/>
+            <a:ext cx="685800" cy="219456"/>
           </a:xfrm>
           <a:prstGeom prst="rect">
             <a:avLst/>
@@ -28408,7 +30049,7 @@
               <a:buNone/>
             </a:pPr>
             <a:r>
-              <a:rPr lang="en-US" sz="700" i="1" dirty="0">
+              <a:rPr lang="en-US" sz="750" i="1" dirty="0">
                 <a:solidFill>
                   <a:srgbClr val="94A3B8"/>
                 </a:solidFill>
@@ -28416,573 +30057,99 @@
                 <a:ea typeface="Calibri" pitchFamily="34" charset="-122"/>
                 <a:cs typeface="Calibri" pitchFamily="34" charset="-120"/>
               </a:rPr>
-              <a:t>'e' dropped before vowel suffix</a:t>
-            </a:r>
-            <a:endParaRPr lang="en-US" sz="700" dirty="0"/>
-          </a:p>
-        </p:txBody>
-      </p:sp>
-      <p:sp>
-        <p:nvSpPr>
-          <p:cNvPr id="26" name="Shape 24"/>
-          <p:cNvSpPr/>
-          <p:nvPr/>
-        </p:nvSpPr>
-        <p:spPr>
-          <a:xfrm>
-            <a:off x="365760" y="3273552"/>
-            <a:ext cx="1371600" cy="658368"/>
+              <a:t>/ngk/</a:t>
+            </a:r>
+            <a:endParaRPr lang="en-US" sz="750" dirty="0"/>
+          </a:p>
+        </p:txBody>
+      </p:sp>
+      <p:sp>
+        <p:nvSpPr>
+          <p:cNvPr id="50" name="Shape 48"/>
+          <p:cNvSpPr/>
+          <p:nvPr/>
+        </p:nvSpPr>
+        <p:spPr>
+          <a:xfrm>
+            <a:off x="6668262" y="4169664"/>
+            <a:ext cx="685800" cy="384048"/>
           </a:xfrm>
           <a:prstGeom prst="rect">
             <a:avLst>
-              <a:gd name="adj" fmla="val 8333"/>
+              <a:gd name="adj" fmla="val 9524"/>
             </a:avLst>
           </a:prstGeom>
           <a:solidFill>
-            <a:srgbClr val="E2E8F0"/>
-          </a:solidFill>
-          <a:ln w="12700">
-            <a:solidFill>
-              <a:srgbClr val="E2E8F0"/>
-            </a:solidFill>
-            <a:prstDash val="solid"/>
-          </a:ln>
-        </p:spPr>
-      </p:sp>
-      <p:sp>
-        <p:nvSpPr>
-          <p:cNvPr id="27" name="Text 25"/>
-          <p:cNvSpPr/>
-          <p:nvPr/>
-        </p:nvSpPr>
-        <p:spPr>
-          <a:xfrm>
-            <a:off x="365760" y="3273552"/>
-            <a:ext cx="1371600" cy="658368"/>
-          </a:xfrm>
-          <a:prstGeom prst="rect">
-            <a:avLst/>
-          </a:prstGeom>
-          <a:noFill/>
-          <a:ln/>
-        </p:spPr>
-        <p:txBody>
-          <a:bodyPr wrap="square" lIns="0" tIns="0" rIns="0" bIns="0" rtlCol="0" anchor="ctr"/>
-          <a:lstStyle/>
-          <a:p>
-            <a:pPr algn="ctr" indent="0" marL="0">
-              <a:buNone/>
-            </a:pPr>
-            <a:r>
-              <a:rPr lang="en-US" sz="1100" b="1" dirty="0">
-                <a:solidFill>
-                  <a:srgbClr val="475569"/>
+            <a:srgbClr val="FFFFFF"/>
+          </a:solidFill>
+          <a:ln w="12700">
+            <a:solidFill>
+              <a:srgbClr val="DB2777"/>
+            </a:solidFill>
+            <a:prstDash val="solid"/>
+          </a:ln>
+        </p:spPr>
+      </p:sp>
+      <p:sp>
+        <p:nvSpPr>
+          <p:cNvPr id="51" name="Text 49"/>
+          <p:cNvSpPr/>
+          <p:nvPr/>
+        </p:nvSpPr>
+        <p:spPr>
+          <a:xfrm>
+            <a:off x="6668262" y="4169664"/>
+            <a:ext cx="685800" cy="384048"/>
+          </a:xfrm>
+          <a:prstGeom prst="rect">
+            <a:avLst/>
+          </a:prstGeom>
+          <a:noFill/>
+          <a:ln/>
+        </p:spPr>
+        <p:txBody>
+          <a:bodyPr wrap="square" lIns="0" tIns="0" rIns="0" bIns="0" rtlCol="0" anchor="ctr"/>
+          <a:lstStyle/>
+          <a:p>
+            <a:pPr algn="ctr" indent="0" marL="0">
+              <a:buNone/>
+            </a:pPr>
+            <a:r>
+              <a:rPr lang="en-US" sz="900" b="1" dirty="0">
+                <a:solidFill>
+                  <a:srgbClr val="9D174D"/>
                 </a:solidFill>
                 <a:latin typeface="Trebuchet MS" pitchFamily="34" charset="0"/>
                 <a:ea typeface="Trebuchet MS" pitchFamily="34" charset="-122"/>
                 <a:cs typeface="Trebuchet MS" pitchFamily="34" charset="-120"/>
               </a:rPr>
-              <a:t>Syllables</a:t>
-            </a:r>
-            <a:endParaRPr lang="en-US" sz="1100" dirty="0"/>
-          </a:p>
-        </p:txBody>
-      </p:sp>
-      <p:sp>
-        <p:nvSpPr>
-          <p:cNvPr id="28" name="Shape 26"/>
-          <p:cNvSpPr/>
-          <p:nvPr/>
-        </p:nvSpPr>
-        <p:spPr>
-          <a:xfrm>
-            <a:off x="1874520" y="3273552"/>
-            <a:ext cx="6903720" cy="658368"/>
+              <a:t>i</a:t>
+            </a:r>
+            <a:endParaRPr lang="en-US" sz="900" dirty="0"/>
+          </a:p>
+        </p:txBody>
+      </p:sp>
+      <p:sp>
+        <p:nvSpPr>
+          <p:cNvPr id="52" name="Shape 50"/>
+          <p:cNvSpPr/>
+          <p:nvPr/>
+        </p:nvSpPr>
+        <p:spPr>
+          <a:xfrm>
+            <a:off x="7576947" y="4169664"/>
+            <a:ext cx="685800" cy="384048"/>
           </a:xfrm>
           <a:prstGeom prst="rect">
             <a:avLst>
-              <a:gd name="adj" fmla="val 8333"/>
+              <a:gd name="adj" fmla="val 9524"/>
             </a:avLst>
           </a:prstGeom>
           <a:solidFill>
-            <a:srgbClr val="CCFBF1"/>
-          </a:solidFill>
-          <a:ln w="12700">
-            <a:solidFill>
-              <a:srgbClr val="0D9488"/>
-            </a:solidFill>
-            <a:prstDash val="solid"/>
-          </a:ln>
-        </p:spPr>
-      </p:sp>
-      <p:sp>
-        <p:nvSpPr>
-          <p:cNvPr id="29" name="Shape 27"/>
-          <p:cNvSpPr/>
-          <p:nvPr/>
-        </p:nvSpPr>
-        <p:spPr>
-          <a:xfrm>
-            <a:off x="1975104" y="3364992"/>
-            <a:ext cx="1554480" cy="475488"/>
-          </a:xfrm>
-          <a:prstGeom prst="rect">
-            <a:avLst>
-              <a:gd name="adj" fmla="val 9615"/>
-            </a:avLst>
-          </a:prstGeom>
-          <a:solidFill>
             <a:srgbClr val="FFFFFF"/>
           </a:solidFill>
           <a:ln w="12700">
             <a:solidFill>
-              <a:srgbClr val="0D9488"/>
-            </a:solidFill>
-            <a:prstDash val="solid"/>
-          </a:ln>
-        </p:spPr>
-      </p:sp>
-      <p:sp>
-        <p:nvSpPr>
-          <p:cNvPr id="30" name="Text 28"/>
-          <p:cNvSpPr/>
-          <p:nvPr/>
-        </p:nvSpPr>
-        <p:spPr>
-          <a:xfrm>
-            <a:off x="1975104" y="3364992"/>
-            <a:ext cx="1554480" cy="475488"/>
-          </a:xfrm>
-          <a:prstGeom prst="rect">
-            <a:avLst/>
-          </a:prstGeom>
-          <a:noFill/>
-          <a:ln/>
-        </p:spPr>
-        <p:txBody>
-          <a:bodyPr wrap="square" lIns="0" tIns="0" rIns="0" bIns="0" rtlCol="0" anchor="ctr"/>
-          <a:lstStyle/>
-          <a:p>
-            <a:pPr algn="ctr" indent="0" marL="0">
-              <a:buNone/>
-            </a:pPr>
-            <a:r>
-              <a:rPr lang="en-US" sz="1400" b="1" dirty="0">
-                <a:solidFill>
-                  <a:srgbClr val="0D9488"/>
-                </a:solidFill>
-                <a:latin typeface="Trebuchet MS" pitchFamily="34" charset="0"/>
-                <a:ea typeface="Trebuchet MS" pitchFamily="34" charset="-122"/>
-                <a:cs typeface="Trebuchet MS" pitchFamily="34" charset="-120"/>
-              </a:rPr>
-              <a:t>un</a:t>
-            </a:r>
-            <a:endParaRPr lang="en-US" sz="1400" dirty="0"/>
-          </a:p>
-        </p:txBody>
-      </p:sp>
-      <p:sp>
-        <p:nvSpPr>
-          <p:cNvPr id="31" name="Text 29"/>
-          <p:cNvSpPr/>
-          <p:nvPr/>
-        </p:nvSpPr>
-        <p:spPr>
-          <a:xfrm>
-            <a:off x="3529584" y="3364992"/>
-            <a:ext cx="73152" cy="475488"/>
-          </a:xfrm>
-          <a:prstGeom prst="rect">
-            <a:avLst/>
-          </a:prstGeom>
-          <a:noFill/>
-          <a:ln/>
-        </p:spPr>
-        <p:txBody>
-          <a:bodyPr wrap="square" lIns="0" tIns="0" rIns="0" bIns="0" rtlCol="0" anchor="ctr"/>
-          <a:lstStyle/>
-          <a:p>
-            <a:pPr algn="ctr" indent="0" marL="0">
-              <a:buNone/>
-            </a:pPr>
-            <a:r>
-              <a:rPr lang="en-US" sz="1600" b="1" dirty="0">
-                <a:solidFill>
-                  <a:srgbClr val="0D9488"/>
-                </a:solidFill>
-                <a:latin typeface="Trebuchet MS" pitchFamily="34" charset="0"/>
-                <a:ea typeface="Trebuchet MS" pitchFamily="34" charset="-122"/>
-                <a:cs typeface="Trebuchet MS" pitchFamily="34" charset="-120"/>
-              </a:rPr>
-              <a:t>·</a:t>
-            </a:r>
-            <a:endParaRPr lang="en-US" sz="1600" dirty="0"/>
-          </a:p>
-        </p:txBody>
-      </p:sp>
-      <p:sp>
-        <p:nvSpPr>
-          <p:cNvPr id="32" name="Shape 30"/>
-          <p:cNvSpPr/>
-          <p:nvPr/>
-        </p:nvSpPr>
-        <p:spPr>
-          <a:xfrm>
-            <a:off x="3602736" y="3364992"/>
-            <a:ext cx="1554480" cy="475488"/>
-          </a:xfrm>
-          <a:prstGeom prst="rect">
-            <a:avLst>
-              <a:gd name="adj" fmla="val 9615"/>
-            </a:avLst>
-          </a:prstGeom>
-          <a:solidFill>
-            <a:srgbClr val="FFFFFF"/>
-          </a:solidFill>
-          <a:ln w="12700">
-            <a:solidFill>
-              <a:srgbClr val="0D9488"/>
-            </a:solidFill>
-            <a:prstDash val="solid"/>
-          </a:ln>
-        </p:spPr>
-      </p:sp>
-      <p:sp>
-        <p:nvSpPr>
-          <p:cNvPr id="33" name="Text 31"/>
-          <p:cNvSpPr/>
-          <p:nvPr/>
-        </p:nvSpPr>
-        <p:spPr>
-          <a:xfrm>
-            <a:off x="3602736" y="3364992"/>
-            <a:ext cx="1554480" cy="475488"/>
-          </a:xfrm>
-          <a:prstGeom prst="rect">
-            <a:avLst/>
-          </a:prstGeom>
-          <a:noFill/>
-          <a:ln/>
-        </p:spPr>
-        <p:txBody>
-          <a:bodyPr wrap="square" lIns="0" tIns="0" rIns="0" bIns="0" rtlCol="0" anchor="ctr"/>
-          <a:lstStyle/>
-          <a:p>
-            <a:pPr algn="ctr" indent="0" marL="0">
-              <a:buNone/>
-            </a:pPr>
-            <a:r>
-              <a:rPr lang="en-US" sz="1400" b="1" dirty="0">
-                <a:solidFill>
-                  <a:srgbClr val="0D9488"/>
-                </a:solidFill>
-                <a:latin typeface="Trebuchet MS" pitchFamily="34" charset="0"/>
-                <a:ea typeface="Trebuchet MS" pitchFamily="34" charset="-122"/>
-                <a:cs typeface="Trebuchet MS" pitchFamily="34" charset="-120"/>
-              </a:rPr>
-              <a:t>der</a:t>
-            </a:r>
-            <a:endParaRPr lang="en-US" sz="1400" dirty="0"/>
-          </a:p>
-        </p:txBody>
-      </p:sp>
-      <p:sp>
-        <p:nvSpPr>
-          <p:cNvPr id="34" name="Text 32"/>
-          <p:cNvSpPr/>
-          <p:nvPr/>
-        </p:nvSpPr>
-        <p:spPr>
-          <a:xfrm>
-            <a:off x="5157216" y="3364992"/>
-            <a:ext cx="73152" cy="475488"/>
-          </a:xfrm>
-          <a:prstGeom prst="rect">
-            <a:avLst/>
-          </a:prstGeom>
-          <a:noFill/>
-          <a:ln/>
-        </p:spPr>
-        <p:txBody>
-          <a:bodyPr wrap="square" lIns="0" tIns="0" rIns="0" bIns="0" rtlCol="0" anchor="ctr"/>
-          <a:lstStyle/>
-          <a:p>
-            <a:pPr algn="ctr" indent="0" marL="0">
-              <a:buNone/>
-            </a:pPr>
-            <a:r>
-              <a:rPr lang="en-US" sz="1600" b="1" dirty="0">
-                <a:solidFill>
-                  <a:srgbClr val="0D9488"/>
-                </a:solidFill>
-                <a:latin typeface="Trebuchet MS" pitchFamily="34" charset="0"/>
-                <a:ea typeface="Trebuchet MS" pitchFamily="34" charset="-122"/>
-                <a:cs typeface="Trebuchet MS" pitchFamily="34" charset="-120"/>
-              </a:rPr>
-              <a:t>·</a:t>
-            </a:r>
-            <a:endParaRPr lang="en-US" sz="1600" dirty="0"/>
-          </a:p>
-        </p:txBody>
-      </p:sp>
-      <p:sp>
-        <p:nvSpPr>
-          <p:cNvPr id="35" name="Shape 33"/>
-          <p:cNvSpPr/>
-          <p:nvPr/>
-        </p:nvSpPr>
-        <p:spPr>
-          <a:xfrm>
-            <a:off x="5230368" y="3364992"/>
-            <a:ext cx="1554480" cy="475488"/>
-          </a:xfrm>
-          <a:prstGeom prst="rect">
-            <a:avLst>
-              <a:gd name="adj" fmla="val 9615"/>
-            </a:avLst>
-          </a:prstGeom>
-          <a:solidFill>
-            <a:srgbClr val="FFFFFF"/>
-          </a:solidFill>
-          <a:ln w="12700">
-            <a:solidFill>
-              <a:srgbClr val="0D9488"/>
-            </a:solidFill>
-            <a:prstDash val="solid"/>
-          </a:ln>
-        </p:spPr>
-      </p:sp>
-      <p:sp>
-        <p:nvSpPr>
-          <p:cNvPr id="36" name="Text 34"/>
-          <p:cNvSpPr/>
-          <p:nvPr/>
-        </p:nvSpPr>
-        <p:spPr>
-          <a:xfrm>
-            <a:off x="5230368" y="3364992"/>
-            <a:ext cx="1554480" cy="475488"/>
-          </a:xfrm>
-          <a:prstGeom prst="rect">
-            <a:avLst/>
-          </a:prstGeom>
-          <a:noFill/>
-          <a:ln/>
-        </p:spPr>
-        <p:txBody>
-          <a:bodyPr wrap="square" lIns="0" tIns="0" rIns="0" bIns="0" rtlCol="0" anchor="ctr"/>
-          <a:lstStyle/>
-          <a:p>
-            <a:pPr algn="ctr" indent="0" marL="0">
-              <a:buNone/>
-            </a:pPr>
-            <a:r>
-              <a:rPr lang="en-US" sz="1400" b="1" dirty="0">
-                <a:solidFill>
-                  <a:srgbClr val="0D9488"/>
-                </a:solidFill>
-                <a:latin typeface="Trebuchet MS" pitchFamily="34" charset="0"/>
-                <a:ea typeface="Trebuchet MS" pitchFamily="34" charset="-122"/>
-                <a:cs typeface="Trebuchet MS" pitchFamily="34" charset="-120"/>
-              </a:rPr>
-              <a:t>lin</a:t>
-            </a:r>
-            <a:endParaRPr lang="en-US" sz="1400" dirty="0"/>
-          </a:p>
-        </p:txBody>
-      </p:sp>
-      <p:sp>
-        <p:nvSpPr>
-          <p:cNvPr id="37" name="Text 35"/>
-          <p:cNvSpPr/>
-          <p:nvPr/>
-        </p:nvSpPr>
-        <p:spPr>
-          <a:xfrm>
-            <a:off x="6784848" y="3364992"/>
-            <a:ext cx="73152" cy="475488"/>
-          </a:xfrm>
-          <a:prstGeom prst="rect">
-            <a:avLst/>
-          </a:prstGeom>
-          <a:noFill/>
-          <a:ln/>
-        </p:spPr>
-        <p:txBody>
-          <a:bodyPr wrap="square" lIns="0" tIns="0" rIns="0" bIns="0" rtlCol="0" anchor="ctr"/>
-          <a:lstStyle/>
-          <a:p>
-            <a:pPr algn="ctr" indent="0" marL="0">
-              <a:buNone/>
-            </a:pPr>
-            <a:r>
-              <a:rPr lang="en-US" sz="1600" b="1" dirty="0">
-                <a:solidFill>
-                  <a:srgbClr val="0D9488"/>
-                </a:solidFill>
-                <a:latin typeface="Trebuchet MS" pitchFamily="34" charset="0"/>
-                <a:ea typeface="Trebuchet MS" pitchFamily="34" charset="-122"/>
-                <a:cs typeface="Trebuchet MS" pitchFamily="34" charset="-120"/>
-              </a:rPr>
-              <a:t>·</a:t>
-            </a:r>
-            <a:endParaRPr lang="en-US" sz="1600" dirty="0"/>
-          </a:p>
-        </p:txBody>
-      </p:sp>
-      <p:sp>
-        <p:nvSpPr>
-          <p:cNvPr id="38" name="Shape 36"/>
-          <p:cNvSpPr/>
-          <p:nvPr/>
-        </p:nvSpPr>
-        <p:spPr>
-          <a:xfrm>
-            <a:off x="6858000" y="3364992"/>
-            <a:ext cx="1554480" cy="475488"/>
-          </a:xfrm>
-          <a:prstGeom prst="rect">
-            <a:avLst>
-              <a:gd name="adj" fmla="val 9615"/>
-            </a:avLst>
-          </a:prstGeom>
-          <a:solidFill>
-            <a:srgbClr val="FFFFFF"/>
-          </a:solidFill>
-          <a:ln w="12700">
-            <a:solidFill>
-              <a:srgbClr val="0D9488"/>
-            </a:solidFill>
-            <a:prstDash val="solid"/>
-          </a:ln>
-        </p:spPr>
-      </p:sp>
-      <p:sp>
-        <p:nvSpPr>
-          <p:cNvPr id="39" name="Text 37"/>
-          <p:cNvSpPr/>
-          <p:nvPr/>
-        </p:nvSpPr>
-        <p:spPr>
-          <a:xfrm>
-            <a:off x="6858000" y="3364992"/>
-            <a:ext cx="1554480" cy="475488"/>
-          </a:xfrm>
-          <a:prstGeom prst="rect">
-            <a:avLst/>
-          </a:prstGeom>
-          <a:noFill/>
-          <a:ln/>
-        </p:spPr>
-        <p:txBody>
-          <a:bodyPr wrap="square" lIns="0" tIns="0" rIns="0" bIns="0" rtlCol="0" anchor="ctr"/>
-          <a:lstStyle/>
-          <a:p>
-            <a:pPr algn="ctr" indent="0" marL="0">
-              <a:buNone/>
-            </a:pPr>
-            <a:r>
-              <a:rPr lang="en-US" sz="1400" b="1" dirty="0">
-                <a:solidFill>
-                  <a:srgbClr val="0D9488"/>
-                </a:solidFill>
-                <a:latin typeface="Trebuchet MS" pitchFamily="34" charset="0"/>
-                <a:ea typeface="Trebuchet MS" pitchFamily="34" charset="-122"/>
-                <a:cs typeface="Trebuchet MS" pitchFamily="34" charset="-120"/>
-              </a:rPr>
-              <a:t>ing</a:t>
-            </a:r>
-            <a:endParaRPr lang="en-US" sz="1400" dirty="0"/>
-          </a:p>
-        </p:txBody>
-      </p:sp>
-      <p:sp>
-        <p:nvSpPr>
-          <p:cNvPr id="40" name="Shape 38"/>
-          <p:cNvSpPr/>
-          <p:nvPr/>
-        </p:nvSpPr>
-        <p:spPr>
-          <a:xfrm>
-            <a:off x="365760" y="4096512"/>
-            <a:ext cx="1371600" cy="804672"/>
-          </a:xfrm>
-          <a:prstGeom prst="rect">
-            <a:avLst>
-              <a:gd name="adj" fmla="val 6818"/>
-            </a:avLst>
-          </a:prstGeom>
-          <a:solidFill>
-            <a:srgbClr val="E2E8F0"/>
-          </a:solidFill>
-          <a:ln w="12700">
-            <a:solidFill>
-              <a:srgbClr val="E2E8F0"/>
-            </a:solidFill>
-            <a:prstDash val="solid"/>
-          </a:ln>
-        </p:spPr>
-      </p:sp>
-      <p:sp>
-        <p:nvSpPr>
-          <p:cNvPr id="41" name="Text 39"/>
-          <p:cNvSpPr/>
-          <p:nvPr/>
-        </p:nvSpPr>
-        <p:spPr>
-          <a:xfrm>
-            <a:off x="365760" y="4096512"/>
-            <a:ext cx="1371600" cy="804672"/>
-          </a:xfrm>
-          <a:prstGeom prst="rect">
-            <a:avLst/>
-          </a:prstGeom>
-          <a:noFill/>
-          <a:ln/>
-        </p:spPr>
-        <p:txBody>
-          <a:bodyPr wrap="square" lIns="0" tIns="0" rIns="0" bIns="0" rtlCol="0" anchor="ctr"/>
-          <a:lstStyle/>
-          <a:p>
-            <a:pPr algn="ctr" indent="0" marL="0">
-              <a:buNone/>
-            </a:pPr>
-            <a:r>
-              <a:rPr lang="en-US" sz="1100" b="1" dirty="0">
-                <a:solidFill>
-                  <a:srgbClr val="475569"/>
-                </a:solidFill>
-                <a:latin typeface="Trebuchet MS" pitchFamily="34" charset="0"/>
-                <a:ea typeface="Trebuchet MS" pitchFamily="34" charset="-122"/>
-                <a:cs typeface="Trebuchet MS" pitchFamily="34" charset="-120"/>
-              </a:rPr>
-              <a:t>Phonemes</a:t>
-            </a:r>
-            <a:endParaRPr lang="en-US" sz="1100" dirty="0"/>
-          </a:p>
-        </p:txBody>
-      </p:sp>
-      <p:sp>
-        <p:nvSpPr>
-          <p:cNvPr id="42" name="Shape 40"/>
-          <p:cNvSpPr/>
-          <p:nvPr/>
-        </p:nvSpPr>
-        <p:spPr>
-          <a:xfrm>
-            <a:off x="1874520" y="4096512"/>
-            <a:ext cx="6903720" cy="658368"/>
-          </a:xfrm>
-          <a:prstGeom prst="rect">
-            <a:avLst>
-              <a:gd name="adj" fmla="val 8333"/>
-            </a:avLst>
-          </a:prstGeom>
-          <a:solidFill>
-            <a:srgbClr val="FCE7F3"/>
-          </a:solidFill>
-          <a:ln w="12700">
-            <a:solidFill>
               <a:srgbClr val="DB2777"/>
             </a:solidFill>
             <a:prstDash val="solid"/>
@@ -28991,569 +30158,14 @@
       </p:sp>
       <p:sp>
         <p:nvSpPr>
-          <p:cNvPr id="43" name="Shape 41"/>
-          <p:cNvSpPr/>
-          <p:nvPr/>
-        </p:nvSpPr>
-        <p:spPr>
-          <a:xfrm>
-            <a:off x="1951330" y="4169664"/>
-            <a:ext cx="676656" cy="475488"/>
-          </a:xfrm>
-          <a:prstGeom prst="rect">
-            <a:avLst>
-              <a:gd name="adj" fmla="val 7692"/>
-            </a:avLst>
-          </a:prstGeom>
-          <a:solidFill>
-            <a:srgbClr val="FFFFFF"/>
-          </a:solidFill>
-          <a:ln w="12700">
-            <a:solidFill>
-              <a:srgbClr val="DB2777"/>
-            </a:solidFill>
-            <a:prstDash val="solid"/>
-          </a:ln>
-        </p:spPr>
-      </p:sp>
-      <p:sp>
-        <p:nvSpPr>
-          <p:cNvPr id="44" name="Text 42"/>
-          <p:cNvSpPr/>
-          <p:nvPr/>
-        </p:nvSpPr>
-        <p:spPr>
-          <a:xfrm>
-            <a:off x="1951330" y="4169664"/>
-            <a:ext cx="676656" cy="475488"/>
-          </a:xfrm>
-          <a:prstGeom prst="rect">
-            <a:avLst/>
-          </a:prstGeom>
-          <a:noFill/>
-          <a:ln/>
-        </p:spPr>
-        <p:txBody>
-          <a:bodyPr wrap="square" lIns="0" tIns="0" rIns="0" bIns="0" rtlCol="0" anchor="ctr"/>
-          <a:lstStyle/>
-          <a:p>
-            <a:pPr algn="ctr" indent="0" marL="0">
-              <a:buNone/>
-            </a:pPr>
-            <a:r>
-              <a:rPr lang="en-US" sz="900" b="1" dirty="0">
-                <a:solidFill>
-                  <a:srgbClr val="9D174D"/>
-                </a:solidFill>
-                <a:latin typeface="Trebuchet MS" pitchFamily="34" charset="0"/>
-                <a:ea typeface="Trebuchet MS" pitchFamily="34" charset="-122"/>
-                <a:cs typeface="Trebuchet MS" pitchFamily="34" charset="-120"/>
-              </a:rPr>
-              <a:t>u</a:t>
-            </a:r>
-            <a:endParaRPr lang="en-US" sz="900" dirty="0"/>
-          </a:p>
-        </p:txBody>
-      </p:sp>
-      <p:sp>
-        <p:nvSpPr>
-          <p:cNvPr id="45" name="Shape 43"/>
-          <p:cNvSpPr/>
-          <p:nvPr/>
-        </p:nvSpPr>
-        <p:spPr>
-          <a:xfrm>
-            <a:off x="2677363" y="4169664"/>
-            <a:ext cx="676656" cy="475488"/>
-          </a:xfrm>
-          <a:prstGeom prst="rect">
-            <a:avLst>
-              <a:gd name="adj" fmla="val 7692"/>
-            </a:avLst>
-          </a:prstGeom>
-          <a:solidFill>
-            <a:srgbClr val="FFFFFF"/>
-          </a:solidFill>
-          <a:ln w="12700">
-            <a:solidFill>
-              <a:srgbClr val="DB2777"/>
-            </a:solidFill>
-            <a:prstDash val="solid"/>
-          </a:ln>
-        </p:spPr>
-      </p:sp>
-      <p:sp>
-        <p:nvSpPr>
-          <p:cNvPr id="46" name="Text 44"/>
-          <p:cNvSpPr/>
-          <p:nvPr/>
-        </p:nvSpPr>
-        <p:spPr>
-          <a:xfrm>
-            <a:off x="2677363" y="4169664"/>
-            <a:ext cx="676656" cy="475488"/>
-          </a:xfrm>
-          <a:prstGeom prst="rect">
-            <a:avLst/>
-          </a:prstGeom>
-          <a:noFill/>
-          <a:ln/>
-        </p:spPr>
-        <p:txBody>
-          <a:bodyPr wrap="square" lIns="0" tIns="0" rIns="0" bIns="0" rtlCol="0" anchor="ctr"/>
-          <a:lstStyle/>
-          <a:p>
-            <a:pPr algn="ctr" indent="0" marL="0">
-              <a:buNone/>
-            </a:pPr>
-            <a:r>
-              <a:rPr lang="en-US" sz="900" b="1" dirty="0">
-                <a:solidFill>
-                  <a:srgbClr val="9D174D"/>
-                </a:solidFill>
-                <a:latin typeface="Trebuchet MS" pitchFamily="34" charset="0"/>
-                <a:ea typeface="Trebuchet MS" pitchFamily="34" charset="-122"/>
-                <a:cs typeface="Trebuchet MS" pitchFamily="34" charset="-120"/>
-              </a:rPr>
-              <a:t>n</a:t>
-            </a:r>
-            <a:endParaRPr lang="en-US" sz="900" dirty="0"/>
-          </a:p>
-        </p:txBody>
-      </p:sp>
-      <p:sp>
-        <p:nvSpPr>
-          <p:cNvPr id="47" name="Shape 45"/>
-          <p:cNvSpPr/>
-          <p:nvPr/>
-        </p:nvSpPr>
-        <p:spPr>
-          <a:xfrm>
-            <a:off x="3403397" y="4169664"/>
-            <a:ext cx="676656" cy="475488"/>
-          </a:xfrm>
-          <a:prstGeom prst="rect">
-            <a:avLst>
-              <a:gd name="adj" fmla="val 7692"/>
-            </a:avLst>
-          </a:prstGeom>
-          <a:solidFill>
-            <a:srgbClr val="FFFFFF"/>
-          </a:solidFill>
-          <a:ln w="12700">
-            <a:solidFill>
-              <a:srgbClr val="DB2777"/>
-            </a:solidFill>
-            <a:prstDash val="solid"/>
-          </a:ln>
-        </p:spPr>
-      </p:sp>
-      <p:sp>
-        <p:nvSpPr>
-          <p:cNvPr id="48" name="Text 46"/>
-          <p:cNvSpPr/>
-          <p:nvPr/>
-        </p:nvSpPr>
-        <p:spPr>
-          <a:xfrm>
-            <a:off x="3403397" y="4169664"/>
-            <a:ext cx="676656" cy="475488"/>
-          </a:xfrm>
-          <a:prstGeom prst="rect">
-            <a:avLst/>
-          </a:prstGeom>
-          <a:noFill/>
-          <a:ln/>
-        </p:spPr>
-        <p:txBody>
-          <a:bodyPr wrap="square" lIns="0" tIns="0" rIns="0" bIns="0" rtlCol="0" anchor="ctr"/>
-          <a:lstStyle/>
-          <a:p>
-            <a:pPr algn="ctr" indent="0" marL="0">
-              <a:buNone/>
-            </a:pPr>
-            <a:r>
-              <a:rPr lang="en-US" sz="900" b="1" dirty="0">
-                <a:solidFill>
-                  <a:srgbClr val="9D174D"/>
-                </a:solidFill>
-                <a:latin typeface="Trebuchet MS" pitchFamily="34" charset="0"/>
-                <a:ea typeface="Trebuchet MS" pitchFamily="34" charset="-122"/>
-                <a:cs typeface="Trebuchet MS" pitchFamily="34" charset="-120"/>
-              </a:rPr>
-              <a:t>d</a:t>
-            </a:r>
-            <a:endParaRPr lang="en-US" sz="900" dirty="0"/>
-          </a:p>
-        </p:txBody>
-      </p:sp>
-      <p:sp>
-        <p:nvSpPr>
-          <p:cNvPr id="49" name="Shape 47"/>
-          <p:cNvSpPr/>
-          <p:nvPr/>
-        </p:nvSpPr>
-        <p:spPr>
-          <a:xfrm>
-            <a:off x="4129430" y="4169664"/>
-            <a:ext cx="676656" cy="475488"/>
-          </a:xfrm>
-          <a:prstGeom prst="rect">
-            <a:avLst>
-              <a:gd name="adj" fmla="val 7692"/>
-            </a:avLst>
-          </a:prstGeom>
-          <a:solidFill>
-            <a:srgbClr val="FFFFFF"/>
-          </a:solidFill>
-          <a:ln w="12700">
-            <a:solidFill>
-              <a:srgbClr val="DB2777"/>
-            </a:solidFill>
-            <a:prstDash val="solid"/>
-          </a:ln>
-        </p:spPr>
-      </p:sp>
-      <p:sp>
-        <p:nvSpPr>
-          <p:cNvPr id="50" name="Text 48"/>
-          <p:cNvSpPr/>
-          <p:nvPr/>
-        </p:nvSpPr>
-        <p:spPr>
-          <a:xfrm>
-            <a:off x="4129430" y="4169664"/>
-            <a:ext cx="676656" cy="475488"/>
-          </a:xfrm>
-          <a:prstGeom prst="rect">
-            <a:avLst/>
-          </a:prstGeom>
-          <a:noFill/>
-          <a:ln/>
-        </p:spPr>
-        <p:txBody>
-          <a:bodyPr wrap="square" lIns="0" tIns="0" rIns="0" bIns="0" rtlCol="0" anchor="ctr"/>
-          <a:lstStyle/>
-          <a:p>
-            <a:pPr algn="ctr" indent="0" marL="0">
-              <a:buNone/>
-            </a:pPr>
-            <a:r>
-              <a:rPr lang="en-US" sz="900" b="1" dirty="0">
-                <a:solidFill>
-                  <a:srgbClr val="9D174D"/>
-                </a:solidFill>
-                <a:latin typeface="Trebuchet MS" pitchFamily="34" charset="0"/>
-                <a:ea typeface="Trebuchet MS" pitchFamily="34" charset="-122"/>
-                <a:cs typeface="Trebuchet MS" pitchFamily="34" charset="-120"/>
-              </a:rPr>
-              <a:t>er</a:t>
-            </a:r>
-            <a:endParaRPr lang="en-US" sz="900" dirty="0"/>
-          </a:p>
-        </p:txBody>
-      </p:sp>
-      <p:sp>
-        <p:nvSpPr>
-          <p:cNvPr id="51" name="Shape 49"/>
-          <p:cNvSpPr/>
-          <p:nvPr/>
-        </p:nvSpPr>
-        <p:spPr>
-          <a:xfrm>
-            <a:off x="4855464" y="4169664"/>
-            <a:ext cx="676656" cy="475488"/>
-          </a:xfrm>
-          <a:prstGeom prst="rect">
-            <a:avLst>
-              <a:gd name="adj" fmla="val 7692"/>
-            </a:avLst>
-          </a:prstGeom>
-          <a:solidFill>
-            <a:srgbClr val="FFFFFF"/>
-          </a:solidFill>
-          <a:ln w="12700">
-            <a:solidFill>
-              <a:srgbClr val="DB2777"/>
-            </a:solidFill>
-            <a:prstDash val="solid"/>
-          </a:ln>
-        </p:spPr>
-      </p:sp>
-      <p:sp>
-        <p:nvSpPr>
-          <p:cNvPr id="52" name="Text 50"/>
-          <p:cNvSpPr/>
-          <p:nvPr/>
-        </p:nvSpPr>
-        <p:spPr>
-          <a:xfrm>
-            <a:off x="4855464" y="4169664"/>
-            <a:ext cx="676656" cy="475488"/>
-          </a:xfrm>
-          <a:prstGeom prst="rect">
-            <a:avLst/>
-          </a:prstGeom>
-          <a:noFill/>
-          <a:ln/>
-        </p:spPr>
-        <p:txBody>
-          <a:bodyPr wrap="square" lIns="0" tIns="0" rIns="0" bIns="0" rtlCol="0" anchor="ctr"/>
-          <a:lstStyle/>
-          <a:p>
-            <a:pPr algn="ctr" indent="0" marL="0">
-              <a:buNone/>
-            </a:pPr>
-            <a:r>
-              <a:rPr lang="en-US" sz="900" b="1" dirty="0">
-                <a:solidFill>
-                  <a:srgbClr val="9D174D"/>
-                </a:solidFill>
-                <a:latin typeface="Trebuchet MS" pitchFamily="34" charset="0"/>
-                <a:ea typeface="Trebuchet MS" pitchFamily="34" charset="-122"/>
-                <a:cs typeface="Trebuchet MS" pitchFamily="34" charset="-120"/>
-              </a:rPr>
-              <a:t>l</a:t>
-            </a:r>
-            <a:endParaRPr lang="en-US" sz="900" dirty="0"/>
-          </a:p>
-        </p:txBody>
-      </p:sp>
-      <p:sp>
-        <p:nvSpPr>
-          <p:cNvPr id="53" name="Shape 51"/>
-          <p:cNvSpPr/>
-          <p:nvPr/>
-        </p:nvSpPr>
-        <p:spPr>
-          <a:xfrm>
-            <a:off x="5581498" y="4169664"/>
-            <a:ext cx="676656" cy="475488"/>
-          </a:xfrm>
-          <a:prstGeom prst="rect">
-            <a:avLst>
-              <a:gd name="adj" fmla="val 7692"/>
-            </a:avLst>
-          </a:prstGeom>
-          <a:solidFill>
-            <a:srgbClr val="FFFFFF"/>
-          </a:solidFill>
-          <a:ln w="12700">
-            <a:solidFill>
-              <a:srgbClr val="DB2777"/>
-            </a:solidFill>
-            <a:prstDash val="solid"/>
-          </a:ln>
-        </p:spPr>
-      </p:sp>
-      <p:sp>
-        <p:nvSpPr>
-          <p:cNvPr id="54" name="Text 52"/>
-          <p:cNvSpPr/>
-          <p:nvPr/>
-        </p:nvSpPr>
-        <p:spPr>
-          <a:xfrm>
-            <a:off x="5581498" y="4169664"/>
-            <a:ext cx="676656" cy="475488"/>
-          </a:xfrm>
-          <a:prstGeom prst="rect">
-            <a:avLst/>
-          </a:prstGeom>
-          <a:noFill/>
-          <a:ln/>
-        </p:spPr>
-        <p:txBody>
-          <a:bodyPr wrap="square" lIns="0" tIns="0" rIns="0" bIns="0" rtlCol="0" anchor="ctr"/>
-          <a:lstStyle/>
-          <a:p>
-            <a:pPr algn="ctr" indent="0" marL="0">
-              <a:buNone/>
-            </a:pPr>
-            <a:r>
-              <a:rPr lang="en-US" sz="900" b="1" dirty="0">
-                <a:solidFill>
-                  <a:srgbClr val="9D174D"/>
-                </a:solidFill>
-                <a:latin typeface="Trebuchet MS" pitchFamily="34" charset="0"/>
-                <a:ea typeface="Trebuchet MS" pitchFamily="34" charset="-122"/>
-                <a:cs typeface="Trebuchet MS" pitchFamily="34" charset="-120"/>
-              </a:rPr>
-              <a:t>i</a:t>
-            </a:r>
-            <a:endParaRPr lang="en-US" sz="900" dirty="0"/>
-          </a:p>
-        </p:txBody>
-      </p:sp>
-      <p:sp>
-        <p:nvSpPr>
-          <p:cNvPr id="55" name="Shape 53"/>
-          <p:cNvSpPr/>
-          <p:nvPr/>
-        </p:nvSpPr>
-        <p:spPr>
-          <a:xfrm>
-            <a:off x="6307531" y="4169664"/>
-            <a:ext cx="676656" cy="475488"/>
-          </a:xfrm>
-          <a:prstGeom prst="rect">
-            <a:avLst>
-              <a:gd name="adj" fmla="val 7692"/>
-            </a:avLst>
-          </a:prstGeom>
-          <a:solidFill>
-            <a:srgbClr val="FFFFFF"/>
-          </a:solidFill>
-          <a:ln w="12700">
-            <a:solidFill>
-              <a:srgbClr val="DB2777"/>
-            </a:solidFill>
-            <a:prstDash val="solid"/>
-          </a:ln>
-        </p:spPr>
-      </p:sp>
-      <p:sp>
-        <p:nvSpPr>
-          <p:cNvPr id="56" name="Text 54"/>
-          <p:cNvSpPr/>
-          <p:nvPr/>
-        </p:nvSpPr>
-        <p:spPr>
-          <a:xfrm>
-            <a:off x="6307531" y="4169664"/>
-            <a:ext cx="676656" cy="475488"/>
-          </a:xfrm>
-          <a:prstGeom prst="rect">
-            <a:avLst/>
-          </a:prstGeom>
-          <a:noFill/>
-          <a:ln/>
-        </p:spPr>
-        <p:txBody>
-          <a:bodyPr wrap="square" lIns="0" tIns="0" rIns="0" bIns="0" rtlCol="0" anchor="ctr"/>
-          <a:lstStyle/>
-          <a:p>
-            <a:pPr algn="ctr" indent="0" marL="0">
-              <a:buNone/>
-            </a:pPr>
-            <a:r>
-              <a:rPr lang="en-US" sz="900" b="1" dirty="0">
-                <a:solidFill>
-                  <a:srgbClr val="9D174D"/>
-                </a:solidFill>
-                <a:latin typeface="Trebuchet MS" pitchFamily="34" charset="0"/>
-                <a:ea typeface="Trebuchet MS" pitchFamily="34" charset="-122"/>
-                <a:cs typeface="Trebuchet MS" pitchFamily="34" charset="-120"/>
-              </a:rPr>
-              <a:t>n</a:t>
-            </a:r>
-            <a:endParaRPr lang="en-US" sz="900" dirty="0"/>
-          </a:p>
-        </p:txBody>
-      </p:sp>
-      <p:sp>
-        <p:nvSpPr>
-          <p:cNvPr id="57" name="Shape 55"/>
-          <p:cNvSpPr/>
-          <p:nvPr/>
-        </p:nvSpPr>
-        <p:spPr>
-          <a:xfrm>
-            <a:off x="7033565" y="4169664"/>
-            <a:ext cx="676656" cy="475488"/>
-          </a:xfrm>
-          <a:prstGeom prst="rect">
-            <a:avLst>
-              <a:gd name="adj" fmla="val 7692"/>
-            </a:avLst>
-          </a:prstGeom>
-          <a:solidFill>
-            <a:srgbClr val="FFFFFF"/>
-          </a:solidFill>
-          <a:ln w="12700">
-            <a:solidFill>
-              <a:srgbClr val="DB2777"/>
-            </a:solidFill>
-            <a:prstDash val="solid"/>
-          </a:ln>
-        </p:spPr>
-      </p:sp>
-      <p:sp>
-        <p:nvSpPr>
-          <p:cNvPr id="58" name="Text 56"/>
-          <p:cNvSpPr/>
-          <p:nvPr/>
-        </p:nvSpPr>
-        <p:spPr>
-          <a:xfrm>
-            <a:off x="7033565" y="4169664"/>
-            <a:ext cx="676656" cy="475488"/>
-          </a:xfrm>
-          <a:prstGeom prst="rect">
-            <a:avLst/>
-          </a:prstGeom>
-          <a:noFill/>
-          <a:ln/>
-        </p:spPr>
-        <p:txBody>
-          <a:bodyPr wrap="square" lIns="0" tIns="0" rIns="0" bIns="0" rtlCol="0" anchor="ctr"/>
-          <a:lstStyle/>
-          <a:p>
-            <a:pPr algn="ctr" indent="0" marL="0">
-              <a:buNone/>
-            </a:pPr>
-            <a:r>
-              <a:rPr lang="en-US" sz="900" b="1" dirty="0">
-                <a:solidFill>
-                  <a:srgbClr val="9D174D"/>
-                </a:solidFill>
-                <a:latin typeface="Trebuchet MS" pitchFamily="34" charset="0"/>
-                <a:ea typeface="Trebuchet MS" pitchFamily="34" charset="-122"/>
-                <a:cs typeface="Trebuchet MS" pitchFamily="34" charset="-120"/>
-              </a:rPr>
-              <a:t>i</a:t>
-            </a:r>
-            <a:endParaRPr lang="en-US" sz="900" dirty="0"/>
-          </a:p>
-        </p:txBody>
-      </p:sp>
-      <p:sp>
-        <p:nvSpPr>
-          <p:cNvPr id="59" name="Shape 57"/>
-          <p:cNvSpPr/>
-          <p:nvPr/>
-        </p:nvSpPr>
-        <p:spPr>
-          <a:xfrm>
-            <a:off x="7759598" y="4169664"/>
-            <a:ext cx="676656" cy="475488"/>
-          </a:xfrm>
-          <a:prstGeom prst="rect">
-            <a:avLst>
-              <a:gd name="adj" fmla="val 7692"/>
-            </a:avLst>
-          </a:prstGeom>
-          <a:solidFill>
-            <a:srgbClr val="FFFFFF"/>
-          </a:solidFill>
-          <a:ln w="12700">
-            <a:solidFill>
-              <a:srgbClr val="DB2777"/>
-            </a:solidFill>
-            <a:prstDash val="solid"/>
-          </a:ln>
-        </p:spPr>
-      </p:sp>
-      <p:sp>
-        <p:nvSpPr>
-          <p:cNvPr id="60" name="Text 58"/>
-          <p:cNvSpPr/>
-          <p:nvPr/>
-        </p:nvSpPr>
-        <p:spPr>
-          <a:xfrm>
-            <a:off x="7759598" y="4169664"/>
-            <a:ext cx="676656" cy="475488"/>
+          <p:cNvPr id="53" name="Text 51"/>
+          <p:cNvSpPr/>
+          <p:nvPr/>
+        </p:nvSpPr>
+        <p:spPr>
+          <a:xfrm>
+            <a:off x="7576947" y="4169664"/>
+            <a:ext cx="685800" cy="384048"/>
           </a:xfrm>
           <a:prstGeom prst="rect">
             <a:avLst/>
@@ -30008,7 +30620,7 @@
                 <a:ea typeface="Trebuchet MS" pitchFamily="34" charset="-122"/>
                 <a:cs typeface="Trebuchet MS" pitchFamily="34" charset="-120"/>
               </a:rPr>
-              <a:t>rethinking</a:t>
+              <a:t>rebuilding</a:t>
             </a:r>
             <a:endParaRPr lang="en-US" sz="2800" dirty="0"/>
           </a:p>
@@ -30835,7 +31447,7 @@
                 <a:ea typeface="Trebuchet MS" pitchFamily="34" charset="-122"/>
                 <a:cs typeface="Trebuchet MS" pitchFamily="34" charset="-120"/>
               </a:rPr>
-              <a:t>rethinking</a:t>
+              <a:t>rebuilding</a:t>
             </a:r>
             <a:endParaRPr lang="en-US" sz="2800" dirty="0"/>
           </a:p>
@@ -31086,7 +31698,7 @@
                 <a:ea typeface="Trebuchet MS" pitchFamily="34" charset="-122"/>
                 <a:cs typeface="Trebuchet MS" pitchFamily="34" charset="-120"/>
               </a:rPr>
-              <a:t>think</a:t>
+              <a:t>build</a:t>
             </a:r>
             <a:endParaRPr lang="en-US" sz="1300" dirty="0"/>
           </a:p>
@@ -31125,7 +31737,7 @@
                 <a:ea typeface="Calibri" pitchFamily="34" charset="-122"/>
                 <a:cs typeface="Calibri" pitchFamily="34" charset="-120"/>
               </a:rPr>
-              <a:t>to use your mind</a:t>
+              <a:t>to construct or put together</a:t>
             </a:r>
             <a:endParaRPr lang="en-US" sz="850" dirty="0"/>
           </a:p>
@@ -31237,7 +31849,7 @@
                 <a:ea typeface="Calibri" pitchFamily="34" charset="-122"/>
                 <a:cs typeface="Calibri" pitchFamily="34" charset="-120"/>
               </a:rPr>
-              <a:t>ongoing action</a:t>
+              <a:t>action in progress</a:t>
             </a:r>
             <a:endParaRPr lang="en-US" sz="850" dirty="0"/>
           </a:p>
@@ -31932,7 +32544,7 @@
                 <a:ea typeface="Trebuchet MS" pitchFamily="34" charset="-122"/>
                 <a:cs typeface="Trebuchet MS" pitchFamily="34" charset="-120"/>
               </a:rPr>
-              <a:t>rethinking</a:t>
+              <a:t>rebuilding</a:t>
             </a:r>
             <a:endParaRPr lang="en-US" sz="2800" dirty="0"/>
           </a:p>
@@ -32183,7 +32795,7 @@
                 <a:ea typeface="Trebuchet MS" pitchFamily="34" charset="-122"/>
                 <a:cs typeface="Trebuchet MS" pitchFamily="34" charset="-120"/>
               </a:rPr>
-              <a:t>think</a:t>
+              <a:t>build</a:t>
             </a:r>
             <a:endParaRPr lang="en-US" sz="1300" dirty="0"/>
           </a:p>
@@ -32222,7 +32834,7 @@
                 <a:ea typeface="Calibri" pitchFamily="34" charset="-122"/>
                 <a:cs typeface="Calibri" pitchFamily="34" charset="-120"/>
               </a:rPr>
-              <a:t>to use your mind</a:t>
+              <a:t>to construct or put together</a:t>
             </a:r>
             <a:endParaRPr lang="en-US" sz="850" dirty="0"/>
           </a:p>
@@ -32334,7 +32946,7 @@
                 <a:ea typeface="Calibri" pitchFamily="34" charset="-122"/>
                 <a:cs typeface="Calibri" pitchFamily="34" charset="-120"/>
               </a:rPr>
-              <a:t>ongoing action</a:t>
+              <a:t>action in progress</a:t>
             </a:r>
             <a:endParaRPr lang="en-US" sz="850" dirty="0"/>
           </a:p>
@@ -32598,7 +33210,7 @@
                 <a:ea typeface="Trebuchet MS" pitchFamily="34" charset="-122"/>
                 <a:cs typeface="Trebuchet MS" pitchFamily="34" charset="-120"/>
               </a:rPr>
-              <a:t>think</a:t>
+              <a:t>build</a:t>
             </a:r>
             <a:endParaRPr lang="en-US" sz="1400" dirty="0"/>
           </a:p>
@@ -33266,7 +33878,7 @@
                 <a:ea typeface="Trebuchet MS" pitchFamily="34" charset="-122"/>
                 <a:cs typeface="Trebuchet MS" pitchFamily="34" charset="-120"/>
               </a:rPr>
-              <a:t>rethinking</a:t>
+              <a:t>rebuilding</a:t>
             </a:r>
             <a:endParaRPr lang="en-US" sz="2800" dirty="0"/>
           </a:p>
@@ -33517,7 +34129,7 @@
                 <a:ea typeface="Trebuchet MS" pitchFamily="34" charset="-122"/>
                 <a:cs typeface="Trebuchet MS" pitchFamily="34" charset="-120"/>
               </a:rPr>
-              <a:t>think</a:t>
+              <a:t>build</a:t>
             </a:r>
             <a:endParaRPr lang="en-US" sz="1300" dirty="0"/>
           </a:p>
@@ -33556,7 +34168,7 @@
                 <a:ea typeface="Calibri" pitchFamily="34" charset="-122"/>
                 <a:cs typeface="Calibri" pitchFamily="34" charset="-120"/>
               </a:rPr>
-              <a:t>to use your mind</a:t>
+              <a:t>to construct or put together</a:t>
             </a:r>
             <a:endParaRPr lang="en-US" sz="850" dirty="0"/>
           </a:p>
@@ -33668,7 +34280,7 @@
                 <a:ea typeface="Calibri" pitchFamily="34" charset="-122"/>
                 <a:cs typeface="Calibri" pitchFamily="34" charset="-120"/>
               </a:rPr>
-              <a:t>ongoing action</a:t>
+              <a:t>action in progress</a:t>
             </a:r>
             <a:endParaRPr lang="en-US" sz="850" dirty="0"/>
           </a:p>
@@ -33932,7 +34544,7 @@
                 <a:ea typeface="Trebuchet MS" pitchFamily="34" charset="-122"/>
                 <a:cs typeface="Trebuchet MS" pitchFamily="34" charset="-120"/>
               </a:rPr>
-              <a:t>think</a:t>
+              <a:t>build</a:t>
             </a:r>
             <a:endParaRPr lang="en-US" sz="1400" dirty="0"/>
           </a:p>
@@ -34118,11 +34730,11 @@
         <p:spPr>
           <a:xfrm>
             <a:off x="1874520" y="4096512"/>
-            <a:ext cx="6903720" cy="658368"/>
+            <a:ext cx="6903720" cy="804672"/>
           </a:xfrm>
           <a:prstGeom prst="rect">
             <a:avLst>
-              <a:gd name="adj" fmla="val 8333"/>
+              <a:gd name="adj" fmla="val 6818"/>
             </a:avLst>
           </a:prstGeom>
           <a:solidFill>
@@ -34144,12 +34756,12 @@
         </p:nvSpPr>
         <p:spPr>
           <a:xfrm>
-            <a:off x="2124837" y="4169664"/>
-            <a:ext cx="685800" cy="475488"/>
+            <a:off x="2023872" y="4169664"/>
+            <a:ext cx="685800" cy="384048"/>
           </a:xfrm>
           <a:prstGeom prst="rect">
             <a:avLst>
-              <a:gd name="adj" fmla="val 7692"/>
+              <a:gd name="adj" fmla="val 9524"/>
             </a:avLst>
           </a:prstGeom>
           <a:solidFill>
@@ -34171,8 +34783,8 @@
         </p:nvSpPr>
         <p:spPr>
           <a:xfrm>
-            <a:off x="2124837" y="4169664"/>
-            <a:ext cx="685800" cy="475488"/>
+            <a:off x="2023872" y="4169664"/>
+            <a:ext cx="685800" cy="384048"/>
           </a:xfrm>
           <a:prstGeom prst="rect">
             <a:avLst/>
@@ -34210,12 +34822,12 @@
         </p:nvSpPr>
         <p:spPr>
           <a:xfrm>
-            <a:off x="3033522" y="4169664"/>
-            <a:ext cx="685800" cy="475488"/>
+            <a:off x="2831592" y="4169664"/>
+            <a:ext cx="685800" cy="384048"/>
           </a:xfrm>
           <a:prstGeom prst="rect">
             <a:avLst>
-              <a:gd name="adj" fmla="val 7692"/>
+              <a:gd name="adj" fmla="val 9524"/>
             </a:avLst>
           </a:prstGeom>
           <a:solidFill>
@@ -34237,8 +34849,8 @@
         </p:nvSpPr>
         <p:spPr>
           <a:xfrm>
-            <a:off x="3033522" y="4169664"/>
-            <a:ext cx="685800" cy="475488"/>
+            <a:off x="2831592" y="4169664"/>
+            <a:ext cx="685800" cy="384048"/>
           </a:xfrm>
           <a:prstGeom prst="rect">
             <a:avLst/>
@@ -34276,12 +34888,12 @@
         </p:nvSpPr>
         <p:spPr>
           <a:xfrm>
-            <a:off x="3942207" y="4169664"/>
-            <a:ext cx="685800" cy="475488"/>
+            <a:off x="3639312" y="4169664"/>
+            <a:ext cx="685800" cy="384048"/>
           </a:xfrm>
           <a:prstGeom prst="rect">
             <a:avLst>
-              <a:gd name="adj" fmla="val 7692"/>
+              <a:gd name="adj" fmla="val 9524"/>
             </a:avLst>
           </a:prstGeom>
           <a:solidFill>
@@ -34303,8 +34915,8 @@
         </p:nvSpPr>
         <p:spPr>
           <a:xfrm>
-            <a:off x="3942207" y="4169664"/>
-            <a:ext cx="685800" cy="475488"/>
+            <a:off x="3639312" y="4169664"/>
+            <a:ext cx="685800" cy="384048"/>
           </a:xfrm>
           <a:prstGeom prst="rect">
             <a:avLst/>
@@ -34328,7 +34940,7 @@
                 <a:ea typeface="Trebuchet MS" pitchFamily="34" charset="-122"/>
                 <a:cs typeface="Trebuchet MS" pitchFamily="34" charset="-120"/>
               </a:rPr>
-              <a:t>th</a:t>
+              <a:t>b</a:t>
             </a:r>
             <a:endParaRPr lang="en-US" sz="900" dirty="0"/>
           </a:p>
@@ -34342,12 +34954,12 @@
         </p:nvSpPr>
         <p:spPr>
           <a:xfrm>
-            <a:off x="4850892" y="4169664"/>
-            <a:ext cx="685800" cy="475488"/>
+            <a:off x="4447032" y="4169664"/>
+            <a:ext cx="685800" cy="384048"/>
           </a:xfrm>
           <a:prstGeom prst="rect">
             <a:avLst>
-              <a:gd name="adj" fmla="val 7692"/>
+              <a:gd name="adj" fmla="val 9524"/>
             </a:avLst>
           </a:prstGeom>
           <a:solidFill>
@@ -34369,8 +34981,8 @@
         </p:nvSpPr>
         <p:spPr>
           <a:xfrm>
-            <a:off x="4850892" y="4169664"/>
-            <a:ext cx="685800" cy="475488"/>
+            <a:off x="4447032" y="4169664"/>
+            <a:ext cx="685800" cy="384048"/>
           </a:xfrm>
           <a:prstGeom prst="rect">
             <a:avLst/>
@@ -34394,7 +35006,7 @@
                 <a:ea typeface="Trebuchet MS" pitchFamily="34" charset="-122"/>
                 <a:cs typeface="Trebuchet MS" pitchFamily="34" charset="-120"/>
               </a:rPr>
-              <a:t>i</a:t>
+              <a:t>ui</a:t>
             </a:r>
             <a:endParaRPr lang="en-US" sz="900" dirty="0"/>
           </a:p>
@@ -34402,18 +35014,57 @@
       </p:sp>
       <p:sp>
         <p:nvSpPr>
-          <p:cNvPr id="47" name="Shape 45"/>
-          <p:cNvSpPr/>
-          <p:nvPr/>
-        </p:nvSpPr>
-        <p:spPr>
-          <a:xfrm>
-            <a:off x="5759577" y="4169664"/>
-            <a:ext cx="685800" cy="475488"/>
+          <p:cNvPr id="47" name="Text 45"/>
+          <p:cNvSpPr/>
+          <p:nvPr/>
+        </p:nvSpPr>
+        <p:spPr>
+          <a:xfrm>
+            <a:off x="4447032" y="4572000"/>
+            <a:ext cx="685800" cy="219456"/>
+          </a:xfrm>
+          <a:prstGeom prst="rect">
+            <a:avLst/>
+          </a:prstGeom>
+          <a:noFill/>
+          <a:ln/>
+        </p:spPr>
+        <p:txBody>
+          <a:bodyPr wrap="square" lIns="0" tIns="0" rIns="0" bIns="0" rtlCol="0" anchor="t"/>
+          <a:lstStyle/>
+          <a:p>
+            <a:pPr algn="ctr" indent="0" marL="0">
+              <a:buNone/>
+            </a:pPr>
+            <a:r>
+              <a:rPr lang="en-US" sz="750" i="1" dirty="0">
+                <a:solidFill>
+                  <a:srgbClr val="94A3B8"/>
+                </a:solidFill>
+                <a:latin typeface="Calibri" pitchFamily="34" charset="0"/>
+                <a:ea typeface="Calibri" pitchFamily="34" charset="-122"/>
+                <a:cs typeface="Calibri" pitchFamily="34" charset="-120"/>
+              </a:rPr>
+              <a:t>/i/</a:t>
+            </a:r>
+            <a:endParaRPr lang="en-US" sz="750" dirty="0"/>
+          </a:p>
+        </p:txBody>
+      </p:sp>
+      <p:sp>
+        <p:nvSpPr>
+          <p:cNvPr id="48" name="Shape 46"/>
+          <p:cNvSpPr/>
+          <p:nvPr/>
+        </p:nvSpPr>
+        <p:spPr>
+          <a:xfrm>
+            <a:off x="5254752" y="4169664"/>
+            <a:ext cx="685800" cy="384048"/>
           </a:xfrm>
           <a:prstGeom prst="rect">
             <a:avLst>
-              <a:gd name="adj" fmla="val 7692"/>
+              <a:gd name="adj" fmla="val 9524"/>
             </a:avLst>
           </a:prstGeom>
           <a:solidFill>
@@ -34429,14 +35080,14 @@
       </p:sp>
       <p:sp>
         <p:nvSpPr>
-          <p:cNvPr id="48" name="Text 46"/>
-          <p:cNvSpPr/>
-          <p:nvPr/>
-        </p:nvSpPr>
-        <p:spPr>
-          <a:xfrm>
-            <a:off x="5759577" y="4169664"/>
-            <a:ext cx="685800" cy="475488"/>
+          <p:cNvPr id="49" name="Text 47"/>
+          <p:cNvSpPr/>
+          <p:nvPr/>
+        </p:nvSpPr>
+        <p:spPr>
+          <a:xfrm>
+            <a:off x="5254752" y="4169664"/>
+            <a:ext cx="685800" cy="384048"/>
           </a:xfrm>
           <a:prstGeom prst="rect">
             <a:avLst/>
@@ -34460,7 +35111,7 @@
                 <a:ea typeface="Trebuchet MS" pitchFamily="34" charset="-122"/>
                 <a:cs typeface="Trebuchet MS" pitchFamily="34" charset="-120"/>
               </a:rPr>
-              <a:t>nk</a:t>
+              <a:t>l</a:t>
             </a:r>
             <a:endParaRPr lang="en-US" sz="900" dirty="0"/>
           </a:p>
@@ -34468,18 +35119,18 @@
       </p:sp>
       <p:sp>
         <p:nvSpPr>
-          <p:cNvPr id="49" name="Shape 47"/>
-          <p:cNvSpPr/>
-          <p:nvPr/>
-        </p:nvSpPr>
-        <p:spPr>
-          <a:xfrm>
-            <a:off x="6668262" y="4169664"/>
-            <a:ext cx="685800" cy="475488"/>
+          <p:cNvPr id="50" name="Shape 48"/>
+          <p:cNvSpPr/>
+          <p:nvPr/>
+        </p:nvSpPr>
+        <p:spPr>
+          <a:xfrm>
+            <a:off x="6062472" y="4169664"/>
+            <a:ext cx="685800" cy="384048"/>
           </a:xfrm>
           <a:prstGeom prst="rect">
             <a:avLst>
-              <a:gd name="adj" fmla="val 7692"/>
+              <a:gd name="adj" fmla="val 9524"/>
             </a:avLst>
           </a:prstGeom>
           <a:solidFill>
@@ -34495,14 +35146,14 @@
       </p:sp>
       <p:sp>
         <p:nvSpPr>
-          <p:cNvPr id="50" name="Text 48"/>
-          <p:cNvSpPr/>
-          <p:nvPr/>
-        </p:nvSpPr>
-        <p:spPr>
-          <a:xfrm>
-            <a:off x="6668262" y="4169664"/>
-            <a:ext cx="685800" cy="475488"/>
+          <p:cNvPr id="51" name="Text 49"/>
+          <p:cNvSpPr/>
+          <p:nvPr/>
+        </p:nvSpPr>
+        <p:spPr>
+          <a:xfrm>
+            <a:off x="6062472" y="4169664"/>
+            <a:ext cx="685800" cy="384048"/>
           </a:xfrm>
           <a:prstGeom prst="rect">
             <a:avLst/>
@@ -34526,6 +35177,72 @@
                 <a:ea typeface="Trebuchet MS" pitchFamily="34" charset="-122"/>
                 <a:cs typeface="Trebuchet MS" pitchFamily="34" charset="-120"/>
               </a:rPr>
+              <a:t>d</a:t>
+            </a:r>
+            <a:endParaRPr lang="en-US" sz="900" dirty="0"/>
+          </a:p>
+        </p:txBody>
+      </p:sp>
+      <p:sp>
+        <p:nvSpPr>
+          <p:cNvPr id="52" name="Shape 50"/>
+          <p:cNvSpPr/>
+          <p:nvPr/>
+        </p:nvSpPr>
+        <p:spPr>
+          <a:xfrm>
+            <a:off x="6870192" y="4169664"/>
+            <a:ext cx="685800" cy="384048"/>
+          </a:xfrm>
+          <a:prstGeom prst="rect">
+            <a:avLst>
+              <a:gd name="adj" fmla="val 9524"/>
+            </a:avLst>
+          </a:prstGeom>
+          <a:solidFill>
+            <a:srgbClr val="FFFFFF"/>
+          </a:solidFill>
+          <a:ln w="12700">
+            <a:solidFill>
+              <a:srgbClr val="DB2777"/>
+            </a:solidFill>
+            <a:prstDash val="solid"/>
+          </a:ln>
+        </p:spPr>
+      </p:sp>
+      <p:sp>
+        <p:nvSpPr>
+          <p:cNvPr id="53" name="Text 51"/>
+          <p:cNvSpPr/>
+          <p:nvPr/>
+        </p:nvSpPr>
+        <p:spPr>
+          <a:xfrm>
+            <a:off x="6870192" y="4169664"/>
+            <a:ext cx="685800" cy="384048"/>
+          </a:xfrm>
+          <a:prstGeom prst="rect">
+            <a:avLst/>
+          </a:prstGeom>
+          <a:noFill/>
+          <a:ln/>
+        </p:spPr>
+        <p:txBody>
+          <a:bodyPr wrap="square" lIns="0" tIns="0" rIns="0" bIns="0" rtlCol="0" anchor="ctr"/>
+          <a:lstStyle/>
+          <a:p>
+            <a:pPr algn="ctr" indent="0" marL="0">
+              <a:buNone/>
+            </a:pPr>
+            <a:r>
+              <a:rPr lang="en-US" sz="900" b="1" dirty="0">
+                <a:solidFill>
+                  <a:srgbClr val="9D174D"/>
+                </a:solidFill>
+                <a:latin typeface="Trebuchet MS" pitchFamily="34" charset="0"/>
+                <a:ea typeface="Trebuchet MS" pitchFamily="34" charset="-122"/>
+                <a:cs typeface="Trebuchet MS" pitchFamily="34" charset="-120"/>
+              </a:rPr>
               <a:t>i</a:t>
             </a:r>
             <a:endParaRPr lang="en-US" sz="900" dirty="0"/>
@@ -34534,18 +35251,18 @@
       </p:sp>
       <p:sp>
         <p:nvSpPr>
-          <p:cNvPr id="51" name="Shape 49"/>
-          <p:cNvSpPr/>
-          <p:nvPr/>
-        </p:nvSpPr>
-        <p:spPr>
-          <a:xfrm>
-            <a:off x="7576947" y="4169664"/>
-            <a:ext cx="685800" cy="475488"/>
+          <p:cNvPr id="54" name="Shape 52"/>
+          <p:cNvSpPr/>
+          <p:nvPr/>
+        </p:nvSpPr>
+        <p:spPr>
+          <a:xfrm>
+            <a:off x="7677912" y="4169664"/>
+            <a:ext cx="685800" cy="384048"/>
           </a:xfrm>
           <a:prstGeom prst="rect">
             <a:avLst>
-              <a:gd name="adj" fmla="val 7692"/>
+              <a:gd name="adj" fmla="val 9524"/>
             </a:avLst>
           </a:prstGeom>
           <a:solidFill>
@@ -34561,14 +35278,14 @@
       </p:sp>
       <p:sp>
         <p:nvSpPr>
-          <p:cNvPr id="52" name="Text 50"/>
-          <p:cNvSpPr/>
-          <p:nvPr/>
-        </p:nvSpPr>
-        <p:spPr>
-          <a:xfrm>
-            <a:off x="7576947" y="4169664"/>
-            <a:ext cx="685800" cy="475488"/>
+          <p:cNvPr id="55" name="Text 53"/>
+          <p:cNvSpPr/>
+          <p:nvPr/>
+        </p:nvSpPr>
+        <p:spPr>
+          <a:xfrm>
+            <a:off x="7677912" y="4169664"/>
+            <a:ext cx="685800" cy="384048"/>
           </a:xfrm>
           <a:prstGeom prst="rect">
             <a:avLst/>
@@ -36852,7 +37569,7 @@
                 <a:ea typeface="Trebuchet MS" pitchFamily="34" charset="-122"/>
                 <a:cs typeface="Trebuchet MS" pitchFamily="34" charset="-120"/>
               </a:rPr>
-              <a:t>out-</a:t>
+              <a:t>dis-</a:t>
             </a:r>
             <a:endParaRPr lang="en-US" sz="1300" dirty="0"/>
           </a:p>
@@ -36916,7 +37633,7 @@
                 <a:ea typeface="Trebuchet MS" pitchFamily="34" charset="-122"/>
                 <a:cs typeface="Trebuchet MS" pitchFamily="34" charset="-120"/>
               </a:rPr>
-              <a:t>work</a:t>
+              <a:t>build</a:t>
             </a:r>
             <a:endParaRPr lang="en-US" sz="1300" dirty="0"/>
           </a:p>
@@ -37005,7 +37722,7 @@
                 <a:ea typeface="Trebuchet MS" pitchFamily="34" charset="-122"/>
                 <a:cs typeface="Trebuchet MS" pitchFamily="34" charset="-120"/>
               </a:rPr>
-              <a:t>under-</a:t>
+              <a:t>pre-</a:t>
             </a:r>
             <a:endParaRPr lang="en-US" sz="1300" dirty="0"/>
           </a:p>
@@ -37069,7 +37786,7 @@
                 <a:ea typeface="Trebuchet MS" pitchFamily="34" charset="-122"/>
                 <a:cs typeface="Trebuchet MS" pitchFamily="34" charset="-120"/>
               </a:rPr>
-              <a:t>read</a:t>
+              <a:t>sing</a:t>
             </a:r>
             <a:endParaRPr lang="en-US" sz="1300" dirty="0"/>
           </a:p>
@@ -37331,7 +38048,7 @@
                 <a:ea typeface="Trebuchet MS" pitchFamily="34" charset="-122"/>
                 <a:cs typeface="Trebuchet MS" pitchFamily="34" charset="-120"/>
               </a:rPr>
-              <a:t>playing</a:t>
+              <a:t>building</a:t>
             </a:r>
             <a:endParaRPr lang="en-US" sz="1200" dirty="0"/>
           </a:p>
@@ -37397,7 +38114,7 @@
                 <a:ea typeface="Trebuchet MS" pitchFamily="34" charset="-122"/>
                 <a:cs typeface="Trebuchet MS" pitchFamily="34" charset="-120"/>
               </a:rPr>
-              <a:t>reading</a:t>
+              <a:t>singing</a:t>
             </a:r>
             <a:endParaRPr lang="en-US" sz="1200" dirty="0"/>
           </a:p>
@@ -37463,7 +38180,7 @@
                 <a:ea typeface="Trebuchet MS" pitchFamily="34" charset="-122"/>
                 <a:cs typeface="Trebuchet MS" pitchFamily="34" charset="-120"/>
               </a:rPr>
-              <a:t>working</a:t>
+              <a:t>exploring</a:t>
             </a:r>
             <a:endParaRPr lang="en-US" sz="1200" dirty="0"/>
           </a:p>
@@ -37529,7 +38246,7 @@
                 <a:ea typeface="Trebuchet MS" pitchFamily="34" charset="-122"/>
                 <a:cs typeface="Trebuchet MS" pitchFamily="34" charset="-120"/>
               </a:rPr>
-              <a:t>jumping</a:t>
+              <a:t>discovering</a:t>
             </a:r>
             <a:endParaRPr lang="en-US" sz="1200" dirty="0"/>
           </a:p>
@@ -37595,7 +38312,7 @@
                 <a:ea typeface="Trebuchet MS" pitchFamily="34" charset="-122"/>
                 <a:cs typeface="Trebuchet MS" pitchFamily="34" charset="-120"/>
               </a:rPr>
-              <a:t>building</a:t>
+              <a:t>overflowing</a:t>
             </a:r>
             <a:endParaRPr lang="en-US" sz="1200" dirty="0"/>
           </a:p>
@@ -37661,7 +38378,7 @@
                 <a:ea typeface="Trebuchet MS" pitchFamily="34" charset="-122"/>
                 <a:cs typeface="Trebuchet MS" pitchFamily="34" charset="-120"/>
               </a:rPr>
-              <a:t>writing</a:t>
+              <a:t>rethinking</a:t>
             </a:r>
             <a:endParaRPr lang="en-US" sz="1200" dirty="0"/>
           </a:p>
@@ -38849,7 +39566,7 @@
                 <a:ea typeface="Calibri" pitchFamily="34" charset="-122"/>
                 <a:cs typeface="Calibri" pitchFamily="34" charset="-120"/>
               </a:rPr>
-              <a:t>1.  Adding '-ing' to a verb shows that an action is happening or continuing.</a:t>
+              <a:t>1.  The suffix '-ing' can be added to a verb to show that an action is happening right now.</a:t>
             </a:r>
             <a:endParaRPr lang="en-US" sz="1300" dirty="0"/>
           </a:p>
@@ -38988,7 +39705,7 @@
                 <a:ea typeface="Calibri" pitchFamily="34" charset="-122"/>
                 <a:cs typeface="Calibri" pitchFamily="34" charset="-120"/>
               </a:rPr>
-              <a:t>2.  The suffix '-ing' changes a verb into a noun that names a person.</a:t>
+              <a:t>2.  The suffix '-ing' can only be added to nouns, never to verbs.</a:t>
             </a:r>
             <a:endParaRPr lang="en-US" sz="1300" dirty="0"/>
           </a:p>
@@ -39127,7 +39844,7 @@
                 <a:ea typeface="Calibri" pitchFamily="34" charset="-122"/>
                 <a:cs typeface="Calibri" pitchFamily="34" charset="-120"/>
               </a:rPr>
-              <a:t>3.  When a short vowel word ends in one consonant, you usually double it before adding '-ing' (e.g. run → running).</a:t>
+              <a:t>3.  The suffix '-ing' comes from Old English.</a:t>
             </a:r>
             <a:endParaRPr lang="en-US" sz="1300" dirty="0"/>
           </a:p>
@@ -39266,7 +39983,7 @@
                 <a:ea typeface="Calibri" pitchFamily="34" charset="-122"/>
                 <a:cs typeface="Calibri" pitchFamily="34" charset="-120"/>
               </a:rPr>
-              <a:t>4.  Words ending in a silent 'e' usually drop the 'e' before adding '-ing' (e.g. write → writing).</a:t>
+              <a:t>4.  When a word ends in a silent 'e', you usually drop the 'e' before adding '-ing' (e.g. make → making).</a:t>
             </a:r>
             <a:endParaRPr lang="en-US" sz="1300" dirty="0"/>
           </a:p>
@@ -39405,7 +40122,7 @@
                 <a:ea typeface="Calibri" pitchFamily="34" charset="-122"/>
                 <a:cs typeface="Calibri" pitchFamily="34" charset="-120"/>
               </a:rPr>
-              <a:t>5.  The suffix '-ing' comes from a Latin root word.</a:t>
+              <a:t>5.  Adding '-ing' to a word always changes its meaning to the opposite.</a:t>
             </a:r>
             <a:endParaRPr lang="en-US" sz="1300" dirty="0"/>
           </a:p>
@@ -40176,7 +40893,7 @@
                 <a:ea typeface="Trebuchet MS" pitchFamily="34" charset="-122"/>
                 <a:cs typeface="Trebuchet MS" pitchFamily="34" charset="-120"/>
               </a:rPr>
-              <a:t>playing</a:t>
+              <a:t>building</a:t>
             </a:r>
             <a:endParaRPr lang="en-US" sz="1300" dirty="0"/>
           </a:p>
@@ -40242,7 +40959,7 @@
                 <a:ea typeface="Trebuchet MS" pitchFamily="34" charset="-122"/>
                 <a:cs typeface="Trebuchet MS" pitchFamily="34" charset="-120"/>
               </a:rPr>
-              <a:t>reading</a:t>
+              <a:t>singing</a:t>
             </a:r>
             <a:endParaRPr lang="en-US" sz="1300" dirty="0"/>
           </a:p>
@@ -40308,7 +41025,7 @@
                 <a:ea typeface="Trebuchet MS" pitchFamily="34" charset="-122"/>
                 <a:cs typeface="Trebuchet MS" pitchFamily="34" charset="-120"/>
               </a:rPr>
-              <a:t>working</a:t>
+              <a:t>exploring</a:t>
             </a:r>
             <a:endParaRPr lang="en-US" sz="1300" dirty="0"/>
           </a:p>
@@ -40374,7 +41091,7 @@
                 <a:ea typeface="Trebuchet MS" pitchFamily="34" charset="-122"/>
                 <a:cs typeface="Trebuchet MS" pitchFamily="34" charset="-120"/>
               </a:rPr>
-              <a:t>jumping</a:t>
+              <a:t>discovering</a:t>
             </a:r>
             <a:endParaRPr lang="en-US" sz="1300" dirty="0"/>
           </a:p>
@@ -40440,7 +41157,7 @@
                 <a:ea typeface="Trebuchet MS" pitchFamily="34" charset="-122"/>
                 <a:cs typeface="Trebuchet MS" pitchFamily="34" charset="-120"/>
               </a:rPr>
-              <a:t>building</a:t>
+              <a:t>overflowing</a:t>
             </a:r>
             <a:endParaRPr lang="en-US" sz="1300" dirty="0"/>
           </a:p>
@@ -41531,7 +42248,7 @@
                 <a:ea typeface="Trebuchet MS" pitchFamily="34" charset="-122"/>
                 <a:cs typeface="Trebuchet MS" pitchFamily="34" charset="-120"/>
               </a:rPr>
-              <a:t>out-</a:t>
+              <a:t>dis-</a:t>
             </a:r>
             <a:endParaRPr lang="en-US" sz="1300" dirty="0"/>
           </a:p>
@@ -41595,7 +42312,7 @@
                 <a:ea typeface="Trebuchet MS" pitchFamily="34" charset="-122"/>
                 <a:cs typeface="Trebuchet MS" pitchFamily="34" charset="-120"/>
               </a:rPr>
-              <a:t>work</a:t>
+              <a:t>build</a:t>
             </a:r>
             <a:endParaRPr lang="en-US" sz="1300" dirty="0"/>
           </a:p>
@@ -41684,7 +42401,7 @@
                 <a:ea typeface="Trebuchet MS" pitchFamily="34" charset="-122"/>
                 <a:cs typeface="Trebuchet MS" pitchFamily="34" charset="-120"/>
               </a:rPr>
-              <a:t>under-</a:t>
+              <a:t>pre-</a:t>
             </a:r>
             <a:endParaRPr lang="en-US" sz="1300" dirty="0"/>
           </a:p>
@@ -41748,7 +42465,7 @@
                 <a:ea typeface="Trebuchet MS" pitchFamily="34" charset="-122"/>
                 <a:cs typeface="Trebuchet MS" pitchFamily="34" charset="-120"/>
               </a:rPr>
-              <a:t>read</a:t>
+              <a:t>sing</a:t>
             </a:r>
             <a:endParaRPr lang="en-US" sz="1300" dirty="0"/>
           </a:p>
@@ -42684,7 +43401,7 @@
                 <a:ea typeface="Calibri" pitchFamily="34" charset="-122"/>
                 <a:cs typeface="Calibri" pitchFamily="34" charset="-120"/>
               </a:rPr>
-              <a:t>Putting materials together to make something, like a house.</a:t>
+              <a:t>When liquid or something else spills over the edge because there is too much of it.</a:t>
             </a:r>
             <a:endParaRPr lang="en-US" sz="1200" dirty="0"/>
           </a:p>
@@ -42823,7 +43540,7 @@
                 <a:ea typeface="Calibri" pitchFamily="34" charset="-122"/>
                 <a:cs typeface="Calibri" pitchFamily="34" charset="-120"/>
               </a:rPr>
-              <a:t>Moving your legs fast to get somewhere quickly.</a:t>
+              <a:t>Moving quickly on your feet, faster than walking.</a:t>
             </a:r>
             <a:endParaRPr lang="en-US" sz="1200" dirty="0"/>
           </a:p>
@@ -42896,7 +43613,7 @@
                 <a:ea typeface="Trebuchet MS" pitchFamily="34" charset="-122"/>
                 <a:cs typeface="Trebuchet MS" pitchFamily="34" charset="-120"/>
               </a:rPr>
-              <a:t>playing</a:t>
+              <a:t>building</a:t>
             </a:r>
             <a:endParaRPr lang="en-US" sz="1200" dirty="0"/>
           </a:p>
@@ -42962,7 +43679,7 @@
                 <a:ea typeface="Calibri" pitchFamily="34" charset="-122"/>
                 <a:cs typeface="Calibri" pitchFamily="34" charset="-120"/>
               </a:rPr>
-              <a:t>Looking at words and understanding what they mean.</a:t>
+              <a:t>Making music with your voice by producing notes and words.</a:t>
             </a:r>
             <a:endParaRPr lang="en-US" sz="1200" dirty="0"/>
           </a:p>
@@ -43035,7 +43752,7 @@
                 <a:ea typeface="Trebuchet MS" pitchFamily="34" charset="-122"/>
                 <a:cs typeface="Trebuchet MS" pitchFamily="34" charset="-120"/>
               </a:rPr>
-              <a:t>reading</a:t>
+              <a:t>singing</a:t>
             </a:r>
             <a:endParaRPr lang="en-US" sz="1200" dirty="0"/>
           </a:p>
@@ -43101,7 +43818,7 @@
                 <a:ea typeface="Calibri" pitchFamily="34" charset="-122"/>
                 <a:cs typeface="Calibri" pitchFamily="34" charset="-120"/>
               </a:rPr>
-              <a:t>Doing a task or job that takes effort.</a:t>
+              <a:t>Going to new or unknown places to discover what is there.</a:t>
             </a:r>
             <a:endParaRPr lang="en-US" sz="1200" dirty="0"/>
           </a:p>
@@ -43174,7 +43891,7 @@
                 <a:ea typeface="Trebuchet MS" pitchFamily="34" charset="-122"/>
                 <a:cs typeface="Trebuchet MS" pitchFamily="34" charset="-120"/>
               </a:rPr>
-              <a:t>working</a:t>
+              <a:t>exploring</a:t>
             </a:r>
             <a:endParaRPr lang="en-US" sz="1200" dirty="0"/>
           </a:p>
@@ -43240,7 +43957,7 @@
                 <a:ea typeface="Calibri" pitchFamily="34" charset="-122"/>
                 <a:cs typeface="Calibri" pitchFamily="34" charset="-120"/>
               </a:rPr>
-              <a:t>Pushing off the ground and going up into the air.</a:t>
+              <a:t>Finding or learning about something for the first time.</a:t>
             </a:r>
             <a:endParaRPr lang="en-US" sz="1200" dirty="0"/>
           </a:p>
@@ -43313,7 +44030,7 @@
                 <a:ea typeface="Trebuchet MS" pitchFamily="34" charset="-122"/>
                 <a:cs typeface="Trebuchet MS" pitchFamily="34" charset="-120"/>
               </a:rPr>
-              <a:t>jumping</a:t>
+              <a:t>discovering</a:t>
             </a:r>
             <a:endParaRPr lang="en-US" sz="1200" dirty="0"/>
           </a:p>
@@ -43379,7 +44096,7 @@
                 <a:ea typeface="Calibri" pitchFamily="34" charset="-122"/>
                 <a:cs typeface="Calibri" pitchFamily="34" charset="-120"/>
               </a:rPr>
-              <a:t>Taking part in a game or activity for fun.</a:t>
+              <a:t>Putting materials together to make something, like a house or a model.</a:t>
             </a:r>
             <a:endParaRPr lang="en-US" sz="1200" dirty="0"/>
           </a:p>
@@ -43452,7 +44169,7 @@
                 <a:ea typeface="Trebuchet MS" pitchFamily="34" charset="-122"/>
                 <a:cs typeface="Trebuchet MS" pitchFamily="34" charset="-120"/>
               </a:rPr>
-              <a:t>building</a:t>
+              <a:t>overflowing</a:t>
             </a:r>
             <a:endParaRPr lang="en-US" sz="1200" dirty="0"/>
           </a:p>
@@ -43518,7 +44235,7 @@
                 <a:ea typeface="Calibri" pitchFamily="34" charset="-122"/>
                 <a:cs typeface="Calibri" pitchFamily="34" charset="-120"/>
               </a:rPr>
-              <a:t>Using your brain to work something out or have ideas.</a:t>
+              <a:t>Using your mind to work something out or have ideas.</a:t>
             </a:r>
             <a:endParaRPr lang="en-US" sz="1200" dirty="0"/>
           </a:p>
@@ -44013,7 +44730,7 @@
                 <a:ea typeface="Calibri" pitchFamily="34" charset="-122"/>
                 <a:cs typeface="Calibri" pitchFamily="34" charset="-120"/>
               </a:rPr>
-              <a:t>The children were laughing and singing in the school hall.</a:t>
+              <a:t>The children were laughing and singing as they walked to school.</a:t>
             </a:r>
             <a:endParaRPr lang="en-US" sz="1500" dirty="0"/>
           </a:p>
@@ -44177,7 +44894,7 @@
                 <a:ea typeface="Calibri" pitchFamily="34" charset="-122"/>
                 <a:cs typeface="Calibri" pitchFamily="34" charset="-120"/>
               </a:rPr>
-              <a:t>She is working hard on her maths problem.</a:t>
+              <a:t>She spent the afternoon exploring the rock pools at the beach.</a:t>
             </a:r>
             <a:endParaRPr lang="en-US" sz="1500" dirty="0"/>
           </a:p>
@@ -44341,7 +45058,7 @@
                 <a:ea typeface="Calibri" pitchFamily="34" charset="-122"/>
                 <a:cs typeface="Calibri" pitchFamily="34" charset="-120"/>
               </a:rPr>
-              <a:t>The dog kept jumping up at the fence all morning.</a:t>
+              <a:t>He is rethinking his plan after hearing everyone's ideas.</a:t>
             </a:r>
             <a:endParaRPr lang="en-US" sz="1500" dirty="0"/>
           </a:p>
